--- a/docs/Fedora-Lane-Expansion-Pack-Technical-Solution.pptx
+++ b/docs/Fedora-Lane-Expansion-Pack-Technical-Solution.pptx
@@ -3194,7 +3194,7 @@
         </p:nvSpPr>
         <p:spPr>
           <a:xfrm>
-            <a:off x="731520" y="2011680"/>
+            <a:off x="731520" y="1920240"/>
             <a:ext cx="10515600" cy="1097280"/>
           </a:xfrm>
           <a:prstGeom prst="rect">
@@ -3209,7 +3209,7 @@
           <a:lstStyle/>
           <a:p>
             <a:r>
-              <a:rPr sz="4000" b="1">
+              <a:rPr sz="3600" b="1">
                 <a:solidFill>
                   <a:srgbClr val="FFFFFF"/>
                 </a:solidFill>
@@ -3243,13 +3243,13 @@
           <a:lstStyle/>
           <a:p>
             <a:r>
-              <a:rPr sz="2000" b="0">
+              <a:rPr sz="1800" b="0">
                 <a:solidFill>
                   <a:srgbClr val="CCCCCC"/>
                 </a:solidFill>
                 <a:latin typeface="Calibri"/>
               </a:rPr>
-              <a:t>Secure RHEL gold image for the e-commerce web fleet</a:t>
+              <a:t>Server/Cloud OS TDP  ·  Technical solution briefing</a:t>
             </a:r>
           </a:p>
         </p:txBody>
@@ -3277,13 +3277,13 @@
           <a:lstStyle/>
           <a:p>
             <a:r>
-              <a:rPr sz="2000" b="0">
+              <a:rPr sz="1800" b="0">
                 <a:solidFill>
                   <a:srgbClr val="CCCCCC"/>
                 </a:solidFill>
                 <a:latin typeface="Calibri"/>
               </a:rPr>
-              <a:t>Local RHEL Image Builder  ·  Proven on AWS (AMI) and Azure (VHD)</a:t>
+              <a:t>Local RHEL Image Builder gold image  ·  AWS AMI + Azure VHD</a:t>
             </a:r>
           </a:p>
         </p:txBody>
@@ -3311,13 +3311,13 @@
           <a:lstStyle/>
           <a:p>
             <a:r>
-              <a:rPr sz="2000" b="0">
+              <a:rPr sz="1800" b="0">
                 <a:solidFill>
                   <a:srgbClr val="CCCCCC"/>
                 </a:solidFill>
                 <a:latin typeface="Calibri"/>
               </a:rPr>
-              <a:t>Technical solution briefing  ·  ~15 minutes</a:t>
+              <a:t>~15 minutes  ·  Opening → Live walkthrough → Value → Closing</a:t>
             </a:r>
           </a:p>
         </p:txBody>
@@ -3428,50 +3428,16 @@
       </p:sp>
       <p:sp>
         <p:nvSpPr>
-          <p:cNvPr id="4" name="TextBox 3"/>
-          <p:cNvSpPr txBox="1"/>
-          <p:nvPr/>
-        </p:nvSpPr>
-        <p:spPr>
-          <a:xfrm>
-            <a:off x="548640" y="320040"/>
-            <a:ext cx="10972800" cy="640080"/>
-          </a:xfrm>
-          <a:prstGeom prst="rect">
-            <a:avLst/>
-          </a:prstGeom>
-          <a:noFill/>
-        </p:spPr>
-        <p:txBody>
-          <a:bodyPr wrap="none">
-            <a:spAutoFit/>
-          </a:bodyPr>
-          <a:lstStyle/>
-          <a:p>
-            <a:r>
-              <a:rPr sz="2800" b="1">
-                <a:solidFill>
-                  <a:srgbClr val="1A1A1A"/>
-                </a:solidFill>
-                <a:latin typeface="Calibri"/>
-              </a:rPr>
-              <a:t>Scaling toward ~1,600 servers</a:t>
-            </a:r>
-          </a:p>
-        </p:txBody>
-      </p:sp>
-      <p:sp>
-        <p:nvSpPr>
-          <p:cNvPr id="5" name="Rectangle 4"/>
+          <p:cNvPr id="4" name="Rounded Rectangle 3"/>
           <p:cNvSpPr/>
           <p:nvPr/>
         </p:nvSpPr>
         <p:spPr>
           <a:xfrm>
-            <a:off x="548640" y="960120"/>
-            <a:ext cx="2011680" cy="54864"/>
-          </a:xfrm>
-          <a:prstGeom prst="rect">
+            <a:off x="548640" y="228600"/>
+            <a:ext cx="2194560" cy="320040"/>
+          </a:xfrm>
+          <a:prstGeom prst="roundRect">
             <a:avLst/>
           </a:prstGeom>
           <a:solidFill>
@@ -3505,14 +3471,126 @@
       </p:sp>
       <p:sp>
         <p:nvSpPr>
+          <p:cNvPr id="5" name="TextBox 4"/>
+          <p:cNvSpPr txBox="1"/>
+          <p:nvPr/>
+        </p:nvSpPr>
+        <p:spPr>
+          <a:xfrm>
+            <a:off x="548640" y="256032"/>
+            <a:ext cx="2194560" cy="292608"/>
+          </a:xfrm>
+          <a:prstGeom prst="rect">
+            <a:avLst/>
+          </a:prstGeom>
+          <a:noFill/>
+        </p:spPr>
+        <p:txBody>
+          <a:bodyPr wrap="none">
+            <a:spAutoFit/>
+          </a:bodyPr>
+          <a:lstStyle/>
+          <a:p>
+            <a:pPr algn="l"/>
+            <a:r>
+              <a:rPr sz="1100" b="1">
+                <a:solidFill>
+                  <a:srgbClr val="FFFFFF"/>
+                </a:solidFill>
+                <a:latin typeface="Calibri"/>
+              </a:rPr>
+              <a:t>VALUE</a:t>
+            </a:r>
+          </a:p>
+        </p:txBody>
+      </p:sp>
+      <p:sp>
+        <p:nvSpPr>
           <p:cNvPr id="6" name="TextBox 5"/>
           <p:cNvSpPr txBox="1"/>
           <p:nvPr/>
         </p:nvSpPr>
         <p:spPr>
           <a:xfrm>
-            <a:off x="548640" y="1280160"/>
-            <a:ext cx="10972800" cy="5029200"/>
+            <a:off x="548640" y="640080"/>
+            <a:ext cx="10972800" cy="548640"/>
+          </a:xfrm>
+          <a:prstGeom prst="rect">
+            <a:avLst/>
+          </a:prstGeom>
+          <a:noFill/>
+        </p:spPr>
+        <p:txBody>
+          <a:bodyPr wrap="none">
+            <a:spAutoFit/>
+          </a:bodyPr>
+          <a:lstStyle/>
+          <a:p>
+            <a:r>
+              <a:rPr sz="2600" b="1">
+                <a:solidFill>
+                  <a:srgbClr val="1A1A1A"/>
+                </a:solidFill>
+                <a:latin typeface="Calibri"/>
+              </a:rPr>
+              <a:t>What this leaves open for the future</a:t>
+            </a:r>
+          </a:p>
+        </p:txBody>
+      </p:sp>
+      <p:sp>
+        <p:nvSpPr>
+          <p:cNvPr id="7" name="Rectangle 6"/>
+          <p:cNvSpPr/>
+          <p:nvPr/>
+        </p:nvSpPr>
+        <p:spPr>
+          <a:xfrm>
+            <a:off x="548640" y="1234440"/>
+            <a:ext cx="1828800" cy="45720"/>
+          </a:xfrm>
+          <a:prstGeom prst="rect">
+            <a:avLst/>
+          </a:prstGeom>
+          <a:solidFill>
+            <a:srgbClr val="EE0000"/>
+          </a:solidFill>
+          <a:ln>
+            <a:noFill/>
+          </a:ln>
+        </p:spPr>
+        <p:style>
+          <a:lnRef idx="1">
+            <a:schemeClr val="accent1"/>
+          </a:lnRef>
+          <a:fillRef idx="3">
+            <a:schemeClr val="accent1"/>
+          </a:fillRef>
+          <a:effectRef idx="2">
+            <a:schemeClr val="accent1"/>
+          </a:effectRef>
+          <a:fontRef idx="minor">
+            <a:schemeClr val="lt1"/>
+          </a:fontRef>
+        </p:style>
+        <p:txBody>
+          <a:bodyPr rtlCol="0" anchor="ctr"/>
+          <a:lstStyle/>
+          <a:p>
+            <a:pPr algn="ctr"/>
+          </a:p>
+        </p:txBody>
+      </p:sp>
+      <p:sp>
+        <p:nvSpPr>
+          <p:cNvPr id="8" name="TextBox 7"/>
+          <p:cNvSpPr txBox="1"/>
+          <p:nvPr/>
+        </p:nvSpPr>
+        <p:spPr>
+          <a:xfrm>
+            <a:off x="548640" y="1463040"/>
+            <a:ext cx="10972800" cy="4572000"/>
           </a:xfrm>
           <a:prstGeom prst="rect">
             <a:avLst/>
@@ -3527,97 +3605,81 @@
           <a:p>
             <a:pPr>
               <a:spcAft>
-                <a:spcPts val="1000"/>
+                <a:spcPts val="900"/>
               </a:spcAft>
             </a:pPr>
             <a:r>
-              <a:rPr sz="2000" b="0">
+              <a:rPr sz="1800" b="0">
                 <a:solidFill>
                   <a:srgbClr val="1A1A1A"/>
                 </a:solidFill>
                 <a:latin typeface="Calibri"/>
               </a:rPr>
-              <a:t>•  Do not run Image Builder 1,600 times</a:t>
+              <a:t>•  Scale: Launch Templates / ASG (AWS) and Scale Sets / Shared Image Gallery (Azure)</a:t>
             </a:r>
           </a:p>
           <a:p>
             <a:pPr>
               <a:spcAft>
-                <a:spcPts val="1000"/>
+                <a:spcPts val="900"/>
               </a:spcAft>
             </a:pPr>
             <a:r>
-              <a:rPr sz="2000" b="0">
+              <a:rPr sz="1800" b="0">
                 <a:solidFill>
                   <a:srgbClr val="1A1A1A"/>
                 </a:solidFill>
                 <a:latin typeface="Calibri"/>
               </a:rPr>
-              <a:t>•  Freeze a versioned gold AMI / Azure image</a:t>
+              <a:t>•  Day-2: change blueprint → recompose new gold version → roll replace waves</a:t>
             </a:r>
           </a:p>
           <a:p>
             <a:pPr>
               <a:spcAft>
-                <a:spcPts val="1000"/>
+                <a:spcPts val="900"/>
               </a:spcAft>
             </a:pPr>
             <a:r>
-              <a:rPr sz="2000" b="0">
+              <a:rPr sz="1800" b="0">
                 <a:solidFill>
                   <a:srgbClr val="1A1A1A"/>
                 </a:solidFill>
                 <a:latin typeface="Calibri"/>
               </a:rPr>
-              <a:t>•  Launch from Launch Template / ASG (AWS) or Scale Sets / Gallery (Azure)</a:t>
+              <a:t>•  Security: add OpenSCAP / CIS profile to the same Image Builder factory</a:t>
             </a:r>
           </a:p>
           <a:p>
             <a:pPr>
               <a:spcAft>
-                <a:spcPts val="1000"/>
+                <a:spcPts val="900"/>
               </a:spcAft>
             </a:pPr>
             <a:r>
-              <a:rPr sz="2000" b="0">
+              <a:rPr sz="1800" b="0">
                 <a:solidFill>
                   <a:srgbClr val="1A1A1A"/>
                 </a:solidFill>
                 <a:latin typeface="Calibri"/>
               </a:rPr>
-              <a:t>•  Replace in waves: canary → batches → rest</a:t>
+              <a:t>•  Alternates already in repo: Kickstart and Image Mode if you prefer those factories</a:t>
             </a:r>
           </a:p>
           <a:p>
             <a:pPr>
               <a:spcAft>
-                <a:spcPts val="1000"/>
+                <a:spcPts val="900"/>
               </a:spcAft>
             </a:pPr>
             <a:r>
-              <a:rPr sz="2000" b="0">
+              <a:rPr sz="1800" b="0">
                 <a:solidFill>
                   <a:srgbClr val="1A1A1A"/>
                 </a:solidFill>
                 <a:latin typeface="Calibri"/>
               </a:rPr>
-              <a:t>•  Day-2: change blueprint in Git → recompose → roll new waves</a:t>
-            </a:r>
-          </a:p>
-          <a:p>
-            <a:pPr>
-              <a:spcAft>
-                <a:spcPts val="1000"/>
-              </a:spcAft>
-            </a:pPr>
-            <a:r>
-              <a:rPr sz="2000" b="0">
-                <a:solidFill>
-                  <a:srgbClr val="1A1A1A"/>
-                </a:solidFill>
-                <a:latin typeface="Calibri"/>
-              </a:rPr>
-              <a:t>•  Primary model: replace from gold image (not in-place root swap)</a:t>
+              <a:t>•  Integration: feed gold images into existing CI/CD, IaC, and change-control processes</a:t>
             </a:r>
           </a:p>
         </p:txBody>
@@ -3728,50 +3790,16 @@
       </p:sp>
       <p:sp>
         <p:nvSpPr>
-          <p:cNvPr id="4" name="TextBox 3"/>
-          <p:cNvSpPr txBox="1"/>
-          <p:nvPr/>
-        </p:nvSpPr>
-        <p:spPr>
-          <a:xfrm>
-            <a:off x="548640" y="320040"/>
-            <a:ext cx="10972800" cy="640080"/>
-          </a:xfrm>
-          <a:prstGeom prst="rect">
-            <a:avLst/>
-          </a:prstGeom>
-          <a:noFill/>
-        </p:spPr>
-        <p:txBody>
-          <a:bodyPr wrap="none">
-            <a:spAutoFit/>
-          </a:bodyPr>
-          <a:lstStyle/>
-          <a:p>
-            <a:r>
-              <a:rPr sz="2800" b="1">
-                <a:solidFill>
-                  <a:srgbClr val="1A1A1A"/>
-                </a:solidFill>
-                <a:latin typeface="Calibri"/>
-              </a:rPr>
-              <a:t>Value mapped to your challenges</a:t>
-            </a:r>
-          </a:p>
-        </p:txBody>
-      </p:sp>
-      <p:sp>
-        <p:nvSpPr>
-          <p:cNvPr id="5" name="Rectangle 4"/>
+          <p:cNvPr id="4" name="Rounded Rectangle 3"/>
           <p:cNvSpPr/>
           <p:nvPr/>
         </p:nvSpPr>
         <p:spPr>
           <a:xfrm>
-            <a:off x="548640" y="960120"/>
-            <a:ext cx="2011680" cy="54864"/>
-          </a:xfrm>
-          <a:prstGeom prst="rect">
+            <a:off x="548640" y="228600"/>
+            <a:ext cx="2194560" cy="320040"/>
+          </a:xfrm>
+          <a:prstGeom prst="roundRect">
             <a:avLst/>
           </a:prstGeom>
           <a:solidFill>
@@ -3805,14 +3833,126 @@
       </p:sp>
       <p:sp>
         <p:nvSpPr>
+          <p:cNvPr id="5" name="TextBox 4"/>
+          <p:cNvSpPr txBox="1"/>
+          <p:nvPr/>
+        </p:nvSpPr>
+        <p:spPr>
+          <a:xfrm>
+            <a:off x="548640" y="256032"/>
+            <a:ext cx="2194560" cy="292608"/>
+          </a:xfrm>
+          <a:prstGeom prst="rect">
+            <a:avLst/>
+          </a:prstGeom>
+          <a:noFill/>
+        </p:spPr>
+        <p:txBody>
+          <a:bodyPr wrap="none">
+            <a:spAutoFit/>
+          </a:bodyPr>
+          <a:lstStyle/>
+          <a:p>
+            <a:pPr algn="l"/>
+            <a:r>
+              <a:rPr sz="1100" b="1">
+                <a:solidFill>
+                  <a:srgbClr val="FFFFFF"/>
+                </a:solidFill>
+                <a:latin typeface="Calibri"/>
+              </a:rPr>
+              <a:t>CLOSING · 1–2 min</a:t>
+            </a:r>
+          </a:p>
+        </p:txBody>
+      </p:sp>
+      <p:sp>
+        <p:nvSpPr>
           <p:cNvPr id="6" name="TextBox 5"/>
           <p:cNvSpPr txBox="1"/>
           <p:nvPr/>
         </p:nvSpPr>
         <p:spPr>
           <a:xfrm>
-            <a:off x="548640" y="1280160"/>
-            <a:ext cx="10972800" cy="5029200"/>
+            <a:off x="548640" y="640080"/>
+            <a:ext cx="10972800" cy="548640"/>
+          </a:xfrm>
+          <a:prstGeom prst="rect">
+            <a:avLst/>
+          </a:prstGeom>
+          <a:noFill/>
+        </p:spPr>
+        <p:txBody>
+          <a:bodyPr wrap="none">
+            <a:spAutoFit/>
+          </a:bodyPr>
+          <a:lstStyle/>
+          <a:p>
+            <a:r>
+              <a:rPr sz="2600" b="1">
+                <a:solidFill>
+                  <a:srgbClr val="1A1A1A"/>
+                </a:solidFill>
+                <a:latin typeface="Calibri"/>
+              </a:rPr>
+              <a:t>Core message</a:t>
+            </a:r>
+          </a:p>
+        </p:txBody>
+      </p:sp>
+      <p:sp>
+        <p:nvSpPr>
+          <p:cNvPr id="7" name="Rectangle 6"/>
+          <p:cNvSpPr/>
+          <p:nvPr/>
+        </p:nvSpPr>
+        <p:spPr>
+          <a:xfrm>
+            <a:off x="548640" y="1234440"/>
+            <a:ext cx="1828800" cy="45720"/>
+          </a:xfrm>
+          <a:prstGeom prst="rect">
+            <a:avLst/>
+          </a:prstGeom>
+          <a:solidFill>
+            <a:srgbClr val="EE0000"/>
+          </a:solidFill>
+          <a:ln>
+            <a:noFill/>
+          </a:ln>
+        </p:spPr>
+        <p:style>
+          <a:lnRef idx="1">
+            <a:schemeClr val="accent1"/>
+          </a:lnRef>
+          <a:fillRef idx="3">
+            <a:schemeClr val="accent1"/>
+          </a:fillRef>
+          <a:effectRef idx="2">
+            <a:schemeClr val="accent1"/>
+          </a:effectRef>
+          <a:fontRef idx="minor">
+            <a:schemeClr val="lt1"/>
+          </a:fontRef>
+        </p:style>
+        <p:txBody>
+          <a:bodyPr rtlCol="0" anchor="ctr"/>
+          <a:lstStyle/>
+          <a:p>
+            <a:pPr algn="ctr"/>
+          </a:p>
+        </p:txBody>
+      </p:sp>
+      <p:sp>
+        <p:nvSpPr>
+          <p:cNvPr id="8" name="TextBox 7"/>
+          <p:cNvSpPr txBox="1"/>
+          <p:nvPr/>
+        </p:nvSpPr>
+        <p:spPr>
+          <a:xfrm>
+            <a:off x="548640" y="1463040"/>
+            <a:ext cx="10972800" cy="4572000"/>
           </a:xfrm>
           <a:prstGeom prst="rect">
             <a:avLst/>
@@ -3827,65 +3967,49 @@
           <a:p>
             <a:pPr>
               <a:spcAft>
-                <a:spcPts val="1000"/>
+                <a:spcPts val="900"/>
               </a:spcAft>
             </a:pPr>
             <a:r>
-              <a:rPr sz="2000" b="0">
+              <a:rPr sz="1800" b="0">
                 <a:solidFill>
                   <a:srgbClr val="1A1A1A"/>
                 </a:solidFill>
                 <a:latin typeface="Calibri"/>
               </a:rPr>
-              <a:t>•  Inconsistency → one blueprint → identical AMI/VHD baselines</a:t>
+              <a:t>•  Fedora Lane can standardize the e-commerce web OS with a repeatable RHEL gold image</a:t>
             </a:r>
           </a:p>
           <a:p>
             <a:pPr>
               <a:spcAft>
-                <a:spcPts val="1000"/>
+                <a:spcPts val="900"/>
               </a:spcAft>
             </a:pPr>
             <a:r>
-              <a:rPr sz="2000" b="0">
+              <a:rPr sz="1800" b="0">
                 <a:solidFill>
                   <a:srgbClr val="1A1A1A"/>
                 </a:solidFill>
                 <a:latin typeface="Calibri"/>
               </a:rPr>
-              <a:t>•  Risky change → hardened SSH/sudo baked in; rebuild from Git</a:t>
+              <a:t>•  Built with Red Hat Image Builder, versioned in Git, proven on AWS and Azure</a:t>
             </a:r>
           </a:p>
           <a:p>
             <a:pPr>
               <a:spcAft>
-                <a:spcPts val="1000"/>
+                <a:spcPts val="900"/>
               </a:spcAft>
             </a:pPr>
             <a:r>
-              <a:rPr sz="2000" b="0">
+              <a:rPr sz="1800" b="0">
                 <a:solidFill>
                   <a:srgbClr val="1A1A1A"/>
                 </a:solidFill>
                 <a:latin typeface="Calibri"/>
               </a:rPr>
-              <a:t>•  Container skills gap → httpd runs as a container on every gold VM</a:t>
-            </a:r>
-          </a:p>
-          <a:p>
-            <a:pPr>
-              <a:spcAft>
-                <a:spcPts val="1000"/>
-              </a:spcAft>
-            </a:pPr>
-            <a:r>
-              <a:rPr sz="2000" b="0">
-                <a:solidFill>
-                  <a:srgbClr val="1A1A1A"/>
-                </a:solidFill>
-                <a:latin typeface="Calibri"/>
-              </a:rPr>
-              <a:t>•  Dual cloud → proven path on both AWS and Azure</a:t>
+              <a:t>•  Technical value today: Expansion Pack controls + containerized httpd + dual-cloud deploy</a:t>
             </a:r>
           </a:p>
         </p:txBody>
@@ -3996,50 +4120,16 @@
       </p:sp>
       <p:sp>
         <p:nvSpPr>
-          <p:cNvPr id="4" name="TextBox 3"/>
-          <p:cNvSpPr txBox="1"/>
-          <p:nvPr/>
-        </p:nvSpPr>
-        <p:spPr>
-          <a:xfrm>
-            <a:off x="548640" y="320040"/>
-            <a:ext cx="10972800" cy="640080"/>
-          </a:xfrm>
-          <a:prstGeom prst="rect">
-            <a:avLst/>
-          </a:prstGeom>
-          <a:noFill/>
-        </p:spPr>
-        <p:txBody>
-          <a:bodyPr wrap="none">
-            <a:spAutoFit/>
-          </a:bodyPr>
-          <a:lstStyle/>
-          <a:p>
-            <a:r>
-              <a:rPr sz="2800" b="1">
-                <a:solidFill>
-                  <a:srgbClr val="1A1A1A"/>
-                </a:solidFill>
-                <a:latin typeface="Calibri"/>
-              </a:rPr>
-              <a:t>Recommendations &amp; next phase</a:t>
-            </a:r>
-          </a:p>
-        </p:txBody>
-      </p:sp>
-      <p:sp>
-        <p:nvSpPr>
-          <p:cNvPr id="5" name="Rectangle 4"/>
+          <p:cNvPr id="4" name="Rounded Rectangle 3"/>
           <p:cNvSpPr/>
           <p:nvPr/>
         </p:nvSpPr>
         <p:spPr>
           <a:xfrm>
-            <a:off x="548640" y="960120"/>
-            <a:ext cx="2011680" cy="54864"/>
-          </a:xfrm>
-          <a:prstGeom prst="rect">
+            <a:off x="548640" y="228600"/>
+            <a:ext cx="2194560" cy="320040"/>
+          </a:xfrm>
+          <a:prstGeom prst="roundRect">
             <a:avLst/>
           </a:prstGeom>
           <a:solidFill>
@@ -4073,14 +4163,126 @@
       </p:sp>
       <p:sp>
         <p:nvSpPr>
+          <p:cNvPr id="5" name="TextBox 4"/>
+          <p:cNvSpPr txBox="1"/>
+          <p:nvPr/>
+        </p:nvSpPr>
+        <p:spPr>
+          <a:xfrm>
+            <a:off x="548640" y="256032"/>
+            <a:ext cx="2194560" cy="292608"/>
+          </a:xfrm>
+          <a:prstGeom prst="rect">
+            <a:avLst/>
+          </a:prstGeom>
+          <a:noFill/>
+        </p:spPr>
+        <p:txBody>
+          <a:bodyPr wrap="none">
+            <a:spAutoFit/>
+          </a:bodyPr>
+          <a:lstStyle/>
+          <a:p>
+            <a:pPr algn="l"/>
+            <a:r>
+              <a:rPr sz="1100" b="1">
+                <a:solidFill>
+                  <a:srgbClr val="FFFFFF"/>
+                </a:solidFill>
+                <a:latin typeface="Calibri"/>
+              </a:rPr>
+              <a:t>CLOSING</a:t>
+            </a:r>
+          </a:p>
+        </p:txBody>
+      </p:sp>
+      <p:sp>
+        <p:nvSpPr>
           <p:cNvPr id="6" name="TextBox 5"/>
           <p:cNvSpPr txBox="1"/>
           <p:nvPr/>
         </p:nvSpPr>
         <p:spPr>
           <a:xfrm>
-            <a:off x="548640" y="1280160"/>
-            <a:ext cx="10972800" cy="5029200"/>
+            <a:off x="548640" y="640080"/>
+            <a:ext cx="10972800" cy="548640"/>
+          </a:xfrm>
+          <a:prstGeom prst="rect">
+            <a:avLst/>
+          </a:prstGeom>
+          <a:noFill/>
+        </p:spPr>
+        <p:txBody>
+          <a:bodyPr wrap="none">
+            <a:spAutoFit/>
+          </a:bodyPr>
+          <a:lstStyle/>
+          <a:p>
+            <a:r>
+              <a:rPr sz="2600" b="1">
+                <a:solidFill>
+                  <a:srgbClr val="1A1A1A"/>
+                </a:solidFill>
+                <a:latin typeface="Calibri"/>
+              </a:rPr>
+              <a:t>One concrete next step</a:t>
+            </a:r>
+          </a:p>
+        </p:txBody>
+      </p:sp>
+      <p:sp>
+        <p:nvSpPr>
+          <p:cNvPr id="7" name="Rectangle 6"/>
+          <p:cNvSpPr/>
+          <p:nvPr/>
+        </p:nvSpPr>
+        <p:spPr>
+          <a:xfrm>
+            <a:off x="548640" y="1234440"/>
+            <a:ext cx="1828800" cy="45720"/>
+          </a:xfrm>
+          <a:prstGeom prst="rect">
+            <a:avLst/>
+          </a:prstGeom>
+          <a:solidFill>
+            <a:srgbClr val="EE0000"/>
+          </a:solidFill>
+          <a:ln>
+            <a:noFill/>
+          </a:ln>
+        </p:spPr>
+        <p:style>
+          <a:lnRef idx="1">
+            <a:schemeClr val="accent1"/>
+          </a:lnRef>
+          <a:fillRef idx="3">
+            <a:schemeClr val="accent1"/>
+          </a:fillRef>
+          <a:effectRef idx="2">
+            <a:schemeClr val="accent1"/>
+          </a:effectRef>
+          <a:fontRef idx="minor">
+            <a:schemeClr val="lt1"/>
+          </a:fontRef>
+        </p:style>
+        <p:txBody>
+          <a:bodyPr rtlCol="0" anchor="ctr"/>
+          <a:lstStyle/>
+          <a:p>
+            <a:pPr algn="ctr"/>
+          </a:p>
+        </p:txBody>
+      </p:sp>
+      <p:sp>
+        <p:nvSpPr>
+          <p:cNvPr id="8" name="TextBox 7"/>
+          <p:cNvSpPr txBox="1"/>
+          <p:nvPr/>
+        </p:nvSpPr>
+        <p:spPr>
+          <a:xfrm>
+            <a:off x="548640" y="1463040"/>
+            <a:ext cx="10972800" cy="4572000"/>
           </a:xfrm>
           <a:prstGeom prst="rect">
             <a:avLst/>
@@ -4095,97 +4297,83 @@
           <a:p>
             <a:pPr>
               <a:spcAft>
-                <a:spcPts val="1000"/>
+                <a:spcPts val="900"/>
               </a:spcAft>
             </a:pPr>
             <a:r>
-              <a:rPr sz="2000" b="0">
+              <a:rPr sz="1800" b="0">
                 <a:solidFill>
                   <a:srgbClr val="1A1A1A"/>
                 </a:solidFill>
                 <a:latin typeface="Calibri"/>
               </a:rPr>
-              <a:t>•  This month: pilot gold image on non-prod web nodes</a:t>
+              <a:t>•  Approve a non-prod pilot: launch web nodes from the gold AMI / Azure image</a:t>
             </a:r>
           </a:p>
           <a:p>
             <a:pPr>
               <a:spcAft>
-                <a:spcPts val="1000"/>
+                <a:spcPts val="900"/>
               </a:spcAft>
             </a:pPr>
             <a:r>
-              <a:rPr sz="2000" b="0">
+              <a:rPr sz="1800" b="0">
                 <a:solidFill>
                   <a:srgbClr val="1A1A1A"/>
                 </a:solidFill>
                 <a:latin typeface="Calibri"/>
               </a:rPr>
-              <a:t>•  Adopt Launch Template / scale set for new capacity</a:t>
+              <a:t>•  Use Launch Template / scale set for new capacity; keep Git as change control</a:t>
             </a:r>
           </a:p>
           <a:p>
             <a:pPr>
               <a:spcAft>
-                <a:spcPts val="1000"/>
+                <a:spcPts val="900"/>
               </a:spcAft>
             </a:pPr>
             <a:r>
-              <a:rPr sz="2000" b="0">
+              <a:rPr sz="1800" b="0">
                 <a:solidFill>
                   <a:srgbClr val="1A1A1A"/>
                 </a:solidFill>
                 <a:latin typeface="Calibri"/>
               </a:rPr>
-              <a:t>•  Keep Git blueprint as the change-control source of truth</a:t>
-            </a:r>
-          </a:p>
-          <a:p>
-            <a:pPr>
-              <a:spcAft>
-                <a:spcPts val="1000"/>
-              </a:spcAft>
-            </a:pPr>
-            <a:r>
-              <a:rPr sz="2000" b="0">
-                <a:solidFill>
-                  <a:srgbClr val="1A1A1A"/>
-                </a:solidFill>
-                <a:latin typeface="Calibri"/>
-              </a:rPr>
-              <a:t>•  Next: wave-replace selected prod pools</a:t>
-            </a:r>
-          </a:p>
-          <a:p>
-            <a:pPr>
-              <a:spcAft>
-                <a:spcPts val="1000"/>
-              </a:spcAft>
-            </a:pPr>
-            <a:r>
-              <a:rPr sz="2000" b="0">
-                <a:solidFill>
-                  <a:srgbClr val="1A1A1A"/>
-                </a:solidFill>
-                <a:latin typeface="Calibri"/>
-              </a:rPr>
-              <a:t>•  Optional: OpenSCAP CIS · Kickstart / Image Mode alternates in repo</a:t>
-            </a:r>
-          </a:p>
-          <a:p>
-            <a:pPr>
-              <a:spcAft>
-                <a:spcPts val="1000"/>
-              </a:spcAft>
-            </a:pPr>
-            <a:r>
-              <a:rPr sz="2000" b="0">
-                <a:solidFill>
-                  <a:srgbClr val="1A1A1A"/>
-                </a:solidFill>
-                <a:latin typeface="Calibri"/>
-              </a:rPr>
-              <a:t>•  Ask: Approve non-prod pilot as the web OS standard</a:t>
+              <a:t>•  After pilot: wave-replace selected prod pools</a:t>
+            </a:r>
+          </a:p>
+        </p:txBody>
+      </p:sp>
+      <p:sp>
+        <p:nvSpPr>
+          <p:cNvPr id="9" name="TextBox 8"/>
+          <p:cNvSpPr txBox="1"/>
+          <p:nvPr/>
+        </p:nvSpPr>
+        <p:spPr>
+          <a:xfrm>
+            <a:off x="548640" y="6263640"/>
+            <a:ext cx="10972800" cy="365760"/>
+          </a:xfrm>
+          <a:prstGeom prst="rect">
+            <a:avLst/>
+          </a:prstGeom>
+          <a:noFill/>
+        </p:spPr>
+        <p:txBody>
+          <a:bodyPr wrap="none">
+            <a:spAutoFit/>
+          </a:bodyPr>
+          <a:lstStyle/>
+          <a:p>
+            <a:r>
+              <a:rPr sz="1300" b="0">
+                <a:solidFill>
+                  <a:srgbClr val="666666"/>
+                </a:solidFill>
+                <a:latin typeface="Calibri"/>
+              </a:rPr>
+              <a:t>Ask: green-light non-prod pilot as the web OS standard</a:t>
             </a:r>
           </a:p>
         </p:txBody>
@@ -4302,8 +4490,8 @@
         </p:nvSpPr>
         <p:spPr>
           <a:xfrm>
-            <a:off x="731520" y="1828800"/>
-            <a:ext cx="10515600" cy="914400"/>
+            <a:off x="731520" y="1920240"/>
+            <a:ext cx="10515600" cy="1097280"/>
           </a:xfrm>
           <a:prstGeom prst="rect">
             <a:avLst/>
@@ -4336,7 +4524,7 @@
         </p:nvSpPr>
         <p:spPr>
           <a:xfrm>
-            <a:off x="731520" y="3108960"/>
+            <a:off x="731520" y="3200400"/>
             <a:ext cx="10515600" cy="411480"/>
           </a:xfrm>
           <a:prstGeom prst="rect">
@@ -4357,7 +4545,7 @@
                 </a:solidFill>
                 <a:latin typeface="Calibri"/>
               </a:rPr>
-              <a:t>Repository: github.com/ydandge-oss/fedora-lane-core-pack-faster</a:t>
+              <a:t>Git source of truth: github.com/ydandge-oss/fedora-lane-core-pack-faster</a:t>
             </a:r>
           </a:p>
         </p:txBody>
@@ -4370,7 +4558,7 @@
         </p:nvSpPr>
         <p:spPr>
           <a:xfrm>
-            <a:off x="731520" y="3566160"/>
+            <a:off x="731520" y="3611880"/>
             <a:ext cx="10515600" cy="411480"/>
           </a:xfrm>
           <a:prstGeom prst="rect">
@@ -4391,7 +4579,7 @@
                 </a:solidFill>
                 <a:latin typeface="Calibri"/>
               </a:rPr>
-              <a:t>Branch: expansion-tdp-solution</a:t>
+              <a:t>Branch: expansion-tdp-solution  ·  README + runbooks + verify checklist</a:t>
             </a:r>
           </a:p>
         </p:txBody>
@@ -4425,7 +4613,7 @@
                 </a:solidFill>
                 <a:latin typeface="Calibri"/>
               </a:rPr>
-              <a:t>Docs: solution-overview · AWS/Azure runbooks · launch CLI/console · verify checklist</a:t>
+              <a:t>Spoken script: docs/presentation-script-part1-video.md</a:t>
             </a:r>
           </a:p>
         </p:txBody>
@@ -4536,50 +4724,16 @@
       </p:sp>
       <p:sp>
         <p:nvSpPr>
-          <p:cNvPr id="4" name="TextBox 3"/>
-          <p:cNvSpPr txBox="1"/>
-          <p:nvPr/>
-        </p:nvSpPr>
-        <p:spPr>
-          <a:xfrm>
-            <a:off x="548640" y="320040"/>
-            <a:ext cx="10972800" cy="640080"/>
-          </a:xfrm>
-          <a:prstGeom prst="rect">
-            <a:avLst/>
-          </a:prstGeom>
-          <a:noFill/>
-        </p:spPr>
-        <p:txBody>
-          <a:bodyPr wrap="none">
-            <a:spAutoFit/>
-          </a:bodyPr>
-          <a:lstStyle/>
-          <a:p>
-            <a:r>
-              <a:rPr sz="2800" b="1">
-                <a:solidFill>
-                  <a:srgbClr val="1A1A1A"/>
-                </a:solidFill>
-                <a:latin typeface="Calibri"/>
-              </a:rPr>
-              <a:t>Agenda</a:t>
-            </a:r>
-          </a:p>
-        </p:txBody>
-      </p:sp>
-      <p:sp>
-        <p:nvSpPr>
-          <p:cNvPr id="5" name="Rectangle 4"/>
+          <p:cNvPr id="4" name="Rounded Rectangle 3"/>
           <p:cNvSpPr/>
           <p:nvPr/>
         </p:nvSpPr>
         <p:spPr>
           <a:xfrm>
-            <a:off x="548640" y="960120"/>
-            <a:ext cx="2011680" cy="54864"/>
-          </a:xfrm>
-          <a:prstGeom prst="rect">
+            <a:off x="548640" y="228600"/>
+            <a:ext cx="2194560" cy="320040"/>
+          </a:xfrm>
+          <a:prstGeom prst="roundRect">
             <a:avLst/>
           </a:prstGeom>
           <a:solidFill>
@@ -4613,14 +4767,126 @@
       </p:sp>
       <p:sp>
         <p:nvSpPr>
+          <p:cNvPr id="5" name="TextBox 4"/>
+          <p:cNvSpPr txBox="1"/>
+          <p:nvPr/>
+        </p:nvSpPr>
+        <p:spPr>
+          <a:xfrm>
+            <a:off x="548640" y="256032"/>
+            <a:ext cx="2194560" cy="292608"/>
+          </a:xfrm>
+          <a:prstGeom prst="rect">
+            <a:avLst/>
+          </a:prstGeom>
+          <a:noFill/>
+        </p:spPr>
+        <p:txBody>
+          <a:bodyPr wrap="none">
+            <a:spAutoFit/>
+          </a:bodyPr>
+          <a:lstStyle/>
+          <a:p>
+            <a:pPr algn="l"/>
+            <a:r>
+              <a:rPr sz="1100" b="1">
+                <a:solidFill>
+                  <a:srgbClr val="FFFFFF"/>
+                </a:solidFill>
+                <a:latin typeface="Calibri"/>
+              </a:rPr>
+              <a:t>OPENING · 1–2 min</a:t>
+            </a:r>
+          </a:p>
+        </p:txBody>
+      </p:sp>
+      <p:sp>
+        <p:nvSpPr>
           <p:cNvPr id="6" name="TextBox 5"/>
           <p:cNvSpPr txBox="1"/>
           <p:nvPr/>
         </p:nvSpPr>
         <p:spPr>
           <a:xfrm>
-            <a:off x="548640" y="1280160"/>
-            <a:ext cx="10972800" cy="5029200"/>
+            <a:off x="548640" y="640080"/>
+            <a:ext cx="10972800" cy="548640"/>
+          </a:xfrm>
+          <a:prstGeom prst="rect">
+            <a:avLst/>
+          </a:prstGeom>
+          <a:noFill/>
+        </p:spPr>
+        <p:txBody>
+          <a:bodyPr wrap="none">
+            <a:spAutoFit/>
+          </a:bodyPr>
+          <a:lstStyle/>
+          <a:p>
+            <a:r>
+              <a:rPr sz="2600" b="1">
+                <a:solidFill>
+                  <a:srgbClr val="1A1A1A"/>
+                </a:solidFill>
+                <a:latin typeface="Calibri"/>
+              </a:rPr>
+              <a:t>Why we are here</a:t>
+            </a:r>
+          </a:p>
+        </p:txBody>
+      </p:sp>
+      <p:sp>
+        <p:nvSpPr>
+          <p:cNvPr id="7" name="Rectangle 6"/>
+          <p:cNvSpPr/>
+          <p:nvPr/>
+        </p:nvSpPr>
+        <p:spPr>
+          <a:xfrm>
+            <a:off x="548640" y="1234440"/>
+            <a:ext cx="1828800" cy="45720"/>
+          </a:xfrm>
+          <a:prstGeom prst="rect">
+            <a:avLst/>
+          </a:prstGeom>
+          <a:solidFill>
+            <a:srgbClr val="EE0000"/>
+          </a:solidFill>
+          <a:ln>
+            <a:noFill/>
+          </a:ln>
+        </p:spPr>
+        <p:style>
+          <a:lnRef idx="1">
+            <a:schemeClr val="accent1"/>
+          </a:lnRef>
+          <a:fillRef idx="3">
+            <a:schemeClr val="accent1"/>
+          </a:fillRef>
+          <a:effectRef idx="2">
+            <a:schemeClr val="accent1"/>
+          </a:effectRef>
+          <a:fontRef idx="minor">
+            <a:schemeClr val="lt1"/>
+          </a:fontRef>
+        </p:style>
+        <p:txBody>
+          <a:bodyPr rtlCol="0" anchor="ctr"/>
+          <a:lstStyle/>
+          <a:p>
+            <a:pPr algn="ctr"/>
+          </a:p>
+        </p:txBody>
+      </p:sp>
+      <p:sp>
+        <p:nvSpPr>
+          <p:cNvPr id="8" name="TextBox 7"/>
+          <p:cNvSpPr txBox="1"/>
+          <p:nvPr/>
+        </p:nvSpPr>
+        <p:spPr>
+          <a:xfrm>
+            <a:off x="548640" y="1463040"/>
+            <a:ext cx="10972800" cy="4572000"/>
           </a:xfrm>
           <a:prstGeom prst="rect">
             <a:avLst/>
@@ -4635,113 +4901,65 @@
           <a:p>
             <a:pPr>
               <a:spcAft>
-                <a:spcPts val="1000"/>
+                <a:spcPts val="900"/>
               </a:spcAft>
             </a:pPr>
             <a:r>
-              <a:rPr sz="2000" b="0">
+              <a:rPr sz="1800" b="0">
                 <a:solidFill>
                   <a:srgbClr val="1A1A1A"/>
                 </a:solidFill>
                 <a:latin typeface="Calibri"/>
               </a:rPr>
-              <a:t>•  Your challenges — confirm understanding</a:t>
+              <a:t>•  Team: Junior Consultant(s) — FASTER Server/Cloud OS TDP</a:t>
             </a:r>
           </a:p>
           <a:p>
             <a:pPr>
               <a:spcAft>
-                <a:spcPts val="1000"/>
+                <a:spcPts val="900"/>
               </a:spcAft>
             </a:pPr>
             <a:r>
-              <a:rPr sz="2000" b="0">
+              <a:rPr sz="1800" b="0">
                 <a:solidFill>
                   <a:srgbClr val="1A1A1A"/>
                 </a:solidFill>
                 <a:latin typeface="Calibri"/>
               </a:rPr>
-              <a:t>•  What we built — gold image solution</a:t>
+              <a:t>•  Fedora Lane asked for a secure, repeatable RHEL web baseline for cloud</a:t>
             </a:r>
           </a:p>
           <a:p>
             <a:pPr>
               <a:spcAft>
-                <a:spcPts val="1000"/>
+                <a:spcPts val="900"/>
               </a:spcAft>
             </a:pPr>
             <a:r>
-              <a:rPr sz="2000" b="0">
+              <a:rPr sz="1800" b="0">
                 <a:solidFill>
                   <a:srgbClr val="1A1A1A"/>
                 </a:solidFill>
                 <a:latin typeface="Calibri"/>
               </a:rPr>
-              <a:t>•  How it works — blueprint → image → VM</a:t>
+              <a:t>•  Today we show a working gold-image solution built with Red Hat technology</a:t>
             </a:r>
           </a:p>
           <a:p>
             <a:pPr>
               <a:spcAft>
-                <a:spcPts val="1000"/>
+                <a:spcPts val="900"/>
               </a:spcAft>
             </a:pPr>
             <a:r>
-              <a:rPr sz="2000" b="0">
+              <a:rPr sz="1800" b="0">
                 <a:solidFill>
                   <a:srgbClr val="1A1A1A"/>
                 </a:solidFill>
                 <a:latin typeface="Calibri"/>
               </a:rPr>
-              <a:t>•  Security &amp; Expansion Pack controls</a:t>
-            </a:r>
-          </a:p>
-          <a:p>
-            <a:pPr>
-              <a:spcAft>
-                <a:spcPts val="1000"/>
-              </a:spcAft>
-            </a:pPr>
-            <a:r>
-              <a:rPr sz="2000" b="0">
-                <a:solidFill>
-                  <a:srgbClr val="1A1A1A"/>
-                </a:solidFill>
-                <a:latin typeface="Calibri"/>
-              </a:rPr>
-              <a:t>•  How you operate it — Console and CLI</a:t>
-            </a:r>
-          </a:p>
-          <a:p>
-            <a:pPr>
-              <a:spcAft>
-                <a:spcPts val="1000"/>
-              </a:spcAft>
-            </a:pPr>
-            <a:r>
-              <a:rPr sz="2000" b="0">
-                <a:solidFill>
-                  <a:srgbClr val="1A1A1A"/>
-                </a:solidFill>
-                <a:latin typeface="Calibri"/>
-              </a:rPr>
-              <a:t>•  Scaling toward ~1,600 servers</a:t>
-            </a:r>
-          </a:p>
-          <a:p>
-            <a:pPr>
-              <a:spcAft>
-                <a:spcPts val="1000"/>
-              </a:spcAft>
-            </a:pPr>
-            <a:r>
-              <a:rPr sz="2000" b="0">
-                <a:solidFill>
-                  <a:srgbClr val="1A1A1A"/>
-                </a:solidFill>
-                <a:latin typeface="Calibri"/>
-              </a:rPr>
-              <a:t>•  Recommendations and next phase</a:t>
+              <a:t>•  Objective: confirm challenges → walk the live implementation → agree next step</a:t>
             </a:r>
           </a:p>
         </p:txBody>
@@ -4852,50 +5070,16 @@
       </p:sp>
       <p:sp>
         <p:nvSpPr>
-          <p:cNvPr id="4" name="TextBox 3"/>
-          <p:cNvSpPr txBox="1"/>
-          <p:nvPr/>
-        </p:nvSpPr>
-        <p:spPr>
-          <a:xfrm>
-            <a:off x="548640" y="320040"/>
-            <a:ext cx="10972800" cy="640080"/>
-          </a:xfrm>
-          <a:prstGeom prst="rect">
-            <a:avLst/>
-          </a:prstGeom>
-          <a:noFill/>
-        </p:spPr>
-        <p:txBody>
-          <a:bodyPr wrap="none">
-            <a:spAutoFit/>
-          </a:bodyPr>
-          <a:lstStyle/>
-          <a:p>
-            <a:r>
-              <a:rPr sz="2800" b="1">
-                <a:solidFill>
-                  <a:srgbClr val="1A1A1A"/>
-                </a:solidFill>
-                <a:latin typeface="Calibri"/>
-              </a:rPr>
-              <a:t>Challenges we heard</a:t>
-            </a:r>
-          </a:p>
-        </p:txBody>
-      </p:sp>
-      <p:sp>
-        <p:nvSpPr>
-          <p:cNvPr id="5" name="Rectangle 4"/>
+          <p:cNvPr id="4" name="Rounded Rectangle 3"/>
           <p:cNvSpPr/>
           <p:nvPr/>
         </p:nvSpPr>
         <p:spPr>
           <a:xfrm>
-            <a:off x="548640" y="960120"/>
-            <a:ext cx="2011680" cy="54864"/>
-          </a:xfrm>
-          <a:prstGeom prst="rect">
+            <a:off x="548640" y="228600"/>
+            <a:ext cx="2194560" cy="320040"/>
+          </a:xfrm>
+          <a:prstGeom prst="roundRect">
             <a:avLst/>
           </a:prstGeom>
           <a:solidFill>
@@ -4929,14 +5113,126 @@
       </p:sp>
       <p:sp>
         <p:nvSpPr>
+          <p:cNvPr id="5" name="TextBox 4"/>
+          <p:cNvSpPr txBox="1"/>
+          <p:nvPr/>
+        </p:nvSpPr>
+        <p:spPr>
+          <a:xfrm>
+            <a:off x="548640" y="256032"/>
+            <a:ext cx="2194560" cy="292608"/>
+          </a:xfrm>
+          <a:prstGeom prst="rect">
+            <a:avLst/>
+          </a:prstGeom>
+          <a:noFill/>
+        </p:spPr>
+        <p:txBody>
+          <a:bodyPr wrap="none">
+            <a:spAutoFit/>
+          </a:bodyPr>
+          <a:lstStyle/>
+          <a:p>
+            <a:pPr algn="l"/>
+            <a:r>
+              <a:rPr sz="1100" b="1">
+                <a:solidFill>
+                  <a:srgbClr val="FFFFFF"/>
+                </a:solidFill>
+                <a:latin typeface="Calibri"/>
+              </a:rPr>
+              <a:t>OPENING</a:t>
+            </a:r>
+          </a:p>
+        </p:txBody>
+      </p:sp>
+      <p:sp>
+        <p:nvSpPr>
           <p:cNvPr id="6" name="TextBox 5"/>
           <p:cNvSpPr txBox="1"/>
           <p:nvPr/>
         </p:nvSpPr>
         <p:spPr>
           <a:xfrm>
-            <a:off x="548640" y="1280160"/>
-            <a:ext cx="10972800" cy="5029200"/>
+            <a:off x="548640" y="640080"/>
+            <a:ext cx="10972800" cy="548640"/>
+          </a:xfrm>
+          <a:prstGeom prst="rect">
+            <a:avLst/>
+          </a:prstGeom>
+          <a:noFill/>
+        </p:spPr>
+        <p:txBody>
+          <a:bodyPr wrap="none">
+            <a:spAutoFit/>
+          </a:bodyPr>
+          <a:lstStyle/>
+          <a:p>
+            <a:r>
+              <a:rPr sz="2600" b="1">
+                <a:solidFill>
+                  <a:srgbClr val="1A1A1A"/>
+                </a:solidFill>
+                <a:latin typeface="Calibri"/>
+              </a:rPr>
+              <a:t>Challenges we confirm with you</a:t>
+            </a:r>
+          </a:p>
+        </p:txBody>
+      </p:sp>
+      <p:sp>
+        <p:nvSpPr>
+          <p:cNvPr id="7" name="Rectangle 6"/>
+          <p:cNvSpPr/>
+          <p:nvPr/>
+        </p:nvSpPr>
+        <p:spPr>
+          <a:xfrm>
+            <a:off x="548640" y="1234440"/>
+            <a:ext cx="1828800" cy="45720"/>
+          </a:xfrm>
+          <a:prstGeom prst="rect">
+            <a:avLst/>
+          </a:prstGeom>
+          <a:solidFill>
+            <a:srgbClr val="EE0000"/>
+          </a:solidFill>
+          <a:ln>
+            <a:noFill/>
+          </a:ln>
+        </p:spPr>
+        <p:style>
+          <a:lnRef idx="1">
+            <a:schemeClr val="accent1"/>
+          </a:lnRef>
+          <a:fillRef idx="3">
+            <a:schemeClr val="accent1"/>
+          </a:fillRef>
+          <a:effectRef idx="2">
+            <a:schemeClr val="accent1"/>
+          </a:effectRef>
+          <a:fontRef idx="minor">
+            <a:schemeClr val="lt1"/>
+          </a:fontRef>
+        </p:style>
+        <p:txBody>
+          <a:bodyPr rtlCol="0" anchor="ctr"/>
+          <a:lstStyle/>
+          <a:p>
+            <a:pPr algn="ctr"/>
+          </a:p>
+        </p:txBody>
+      </p:sp>
+      <p:sp>
+        <p:nvSpPr>
+          <p:cNvPr id="8" name="TextBox 7"/>
+          <p:cNvSpPr txBox="1"/>
+          <p:nvPr/>
+        </p:nvSpPr>
+        <p:spPr>
+          <a:xfrm>
+            <a:off x="548640" y="1463040"/>
+            <a:ext cx="10972800" cy="4572000"/>
           </a:xfrm>
           <a:prstGeom prst="rect">
             <a:avLst/>
@@ -4951,65 +5247,99 @@
           <a:p>
             <a:pPr>
               <a:spcAft>
-                <a:spcPts val="1000"/>
+                <a:spcPts val="900"/>
               </a:spcAft>
             </a:pPr>
             <a:r>
-              <a:rPr sz="2000" b="0">
+              <a:rPr sz="1800" b="0">
                 <a:solidFill>
                   <a:srgbClr val="1A1A1A"/>
                 </a:solidFill>
                 <a:latin typeface="Calibri"/>
               </a:rPr>
-              <a:t>•  Inconsistent estate — ~1,600 servers; Rocky, Ubuntu, CentOS Stream, Amazon Linux</a:t>
+              <a:t>•  Inconsistent estate — ~1,600 servers; mixed Rocky, Ubuntu, CentOS Stream, Amazon Linux</a:t>
             </a:r>
           </a:p>
           <a:p>
             <a:pPr>
               <a:spcAft>
-                <a:spcPts val="1000"/>
+                <a:spcPts val="900"/>
               </a:spcAft>
             </a:pPr>
             <a:r>
-              <a:rPr sz="2000" b="0">
+              <a:rPr sz="1800" b="0">
                 <a:solidFill>
                   <a:srgbClr val="1A1A1A"/>
                 </a:solidFill>
                 <a:latin typeface="Calibri"/>
               </a:rPr>
-              <a:t>•  Risky / untraceable change — drift and ad-hoc updates create long outages</a:t>
+              <a:t>•  Risky / untraceable change — drift and ad-hoc updates drive long outages</a:t>
             </a:r>
           </a:p>
           <a:p>
             <a:pPr>
               <a:spcAft>
-                <a:spcPts val="1000"/>
+                <a:spcPts val="900"/>
               </a:spcAft>
             </a:pPr>
             <a:r>
-              <a:rPr sz="2000" b="0">
+              <a:rPr sz="1800" b="0">
                 <a:solidFill>
                   <a:srgbClr val="1A1A1A"/>
                 </a:solidFill>
                 <a:latin typeface="Calibri"/>
               </a:rPr>
-              <a:t>•  Container skills gap — need a clear, repeatable way to run services on RHEL</a:t>
+              <a:t>•  Container skills gap — ops need a clear, repeatable container path on RHEL</a:t>
             </a:r>
           </a:p>
           <a:p>
             <a:pPr>
               <a:spcAft>
-                <a:spcPts val="1000"/>
+                <a:spcPts val="900"/>
               </a:spcAft>
             </a:pPr>
             <a:r>
-              <a:rPr sz="2000" b="0">
+              <a:rPr sz="1800" b="0">
                 <a:solidFill>
                   <a:srgbClr val="1A1A1A"/>
                 </a:solidFill>
                 <a:latin typeface="Calibri"/>
               </a:rPr>
-              <a:t>•  Want: one secure RHEL baseline for AWS and Azure, rebuildable from Git</a:t>
+              <a:t>•  Expansion Pack want: manual/local Image Builder gold image for AWS and Azure</a:t>
+            </a:r>
+          </a:p>
+        </p:txBody>
+      </p:sp>
+      <p:sp>
+        <p:nvSpPr>
+          <p:cNvPr id="9" name="TextBox 8"/>
+          <p:cNvSpPr txBox="1"/>
+          <p:nvPr/>
+        </p:nvSpPr>
+        <p:spPr>
+          <a:xfrm>
+            <a:off x="548640" y="6263640"/>
+            <a:ext cx="10972800" cy="365760"/>
+          </a:xfrm>
+          <a:prstGeom prst="rect">
+            <a:avLst/>
+          </a:prstGeom>
+          <a:noFill/>
+        </p:spPr>
+        <p:txBody>
+          <a:bodyPr wrap="none">
+            <a:spAutoFit/>
+          </a:bodyPr>
+          <a:lstStyle/>
+          <a:p>
+            <a:r>
+              <a:rPr sz="1300" b="0">
+                <a:solidFill>
+                  <a:srgbClr val="666666"/>
+                </a:solidFill>
+                <a:latin typeface="Calibri"/>
+              </a:rPr>
+              <a:t>Confirming understanding before we walk the solution</a:t>
             </a:r>
           </a:p>
         </p:txBody>
@@ -5120,50 +5450,16 @@
       </p:sp>
       <p:sp>
         <p:nvSpPr>
-          <p:cNvPr id="4" name="TextBox 3"/>
-          <p:cNvSpPr txBox="1"/>
-          <p:nvPr/>
-        </p:nvSpPr>
-        <p:spPr>
-          <a:xfrm>
-            <a:off x="548640" y="320040"/>
-            <a:ext cx="10972800" cy="640080"/>
-          </a:xfrm>
-          <a:prstGeom prst="rect">
-            <a:avLst/>
-          </a:prstGeom>
-          <a:noFill/>
-        </p:spPr>
-        <p:txBody>
-          <a:bodyPr wrap="none">
-            <a:spAutoFit/>
-          </a:bodyPr>
-          <a:lstStyle/>
-          <a:p>
-            <a:r>
-              <a:rPr sz="2800" b="1">
-                <a:solidFill>
-                  <a:srgbClr val="1A1A1A"/>
-                </a:solidFill>
-                <a:latin typeface="Calibri"/>
-              </a:rPr>
-              <a:t>Solution in one sentence</a:t>
-            </a:r>
-          </a:p>
-        </p:txBody>
-      </p:sp>
-      <p:sp>
-        <p:nvSpPr>
-          <p:cNvPr id="5" name="Rectangle 4"/>
+          <p:cNvPr id="4" name="Rounded Rectangle 3"/>
           <p:cNvSpPr/>
           <p:nvPr/>
         </p:nvSpPr>
         <p:spPr>
           <a:xfrm>
-            <a:off x="548640" y="960120"/>
-            <a:ext cx="2011680" cy="54864"/>
-          </a:xfrm>
-          <a:prstGeom prst="rect">
+            <a:off x="548640" y="228600"/>
+            <a:ext cx="2194560" cy="320040"/>
+          </a:xfrm>
+          <a:prstGeom prst="roundRect">
             <a:avLst/>
           </a:prstGeom>
           <a:solidFill>
@@ -5197,14 +5493,126 @@
       </p:sp>
       <p:sp>
         <p:nvSpPr>
+          <p:cNvPr id="5" name="TextBox 4"/>
+          <p:cNvSpPr txBox="1"/>
+          <p:nvPr/>
+        </p:nvSpPr>
+        <p:spPr>
+          <a:xfrm>
+            <a:off x="548640" y="256032"/>
+            <a:ext cx="2194560" cy="292608"/>
+          </a:xfrm>
+          <a:prstGeom prst="rect">
+            <a:avLst/>
+          </a:prstGeom>
+          <a:noFill/>
+        </p:spPr>
+        <p:txBody>
+          <a:bodyPr wrap="none">
+            <a:spAutoFit/>
+          </a:bodyPr>
+          <a:lstStyle/>
+          <a:p>
+            <a:pPr algn="l"/>
+            <a:r>
+              <a:rPr sz="1100" b="1">
+                <a:solidFill>
+                  <a:srgbClr val="FFFFFF"/>
+                </a:solidFill>
+                <a:latin typeface="Calibri"/>
+              </a:rPr>
+              <a:t>OPENING</a:t>
+            </a:r>
+          </a:p>
+        </p:txBody>
+      </p:sp>
+      <p:sp>
+        <p:nvSpPr>
           <p:cNvPr id="6" name="TextBox 5"/>
           <p:cNvSpPr txBox="1"/>
           <p:nvPr/>
         </p:nvSpPr>
         <p:spPr>
           <a:xfrm>
-            <a:off x="548640" y="1280160"/>
-            <a:ext cx="10972800" cy="5029200"/>
+            <a:off x="548640" y="640080"/>
+            <a:ext cx="10972800" cy="548640"/>
+          </a:xfrm>
+          <a:prstGeom prst="rect">
+            <a:avLst/>
+          </a:prstGeom>
+          <a:noFill/>
+        </p:spPr>
+        <p:txBody>
+          <a:bodyPr wrap="none">
+            <a:spAutoFit/>
+          </a:bodyPr>
+          <a:lstStyle/>
+          <a:p>
+            <a:r>
+              <a:rPr sz="2600" b="1">
+                <a:solidFill>
+                  <a:srgbClr val="1A1A1A"/>
+                </a:solidFill>
+                <a:latin typeface="Calibri"/>
+              </a:rPr>
+              <a:t>Agenda</a:t>
+            </a:r>
+          </a:p>
+        </p:txBody>
+      </p:sp>
+      <p:sp>
+        <p:nvSpPr>
+          <p:cNvPr id="7" name="Rectangle 6"/>
+          <p:cNvSpPr/>
+          <p:nvPr/>
+        </p:nvSpPr>
+        <p:spPr>
+          <a:xfrm>
+            <a:off x="548640" y="1234440"/>
+            <a:ext cx="1828800" cy="45720"/>
+          </a:xfrm>
+          <a:prstGeom prst="rect">
+            <a:avLst/>
+          </a:prstGeom>
+          <a:solidFill>
+            <a:srgbClr val="EE0000"/>
+          </a:solidFill>
+          <a:ln>
+            <a:noFill/>
+          </a:ln>
+        </p:spPr>
+        <p:style>
+          <a:lnRef idx="1">
+            <a:schemeClr val="accent1"/>
+          </a:lnRef>
+          <a:fillRef idx="3">
+            <a:schemeClr val="accent1"/>
+          </a:fillRef>
+          <a:effectRef idx="2">
+            <a:schemeClr val="accent1"/>
+          </a:effectRef>
+          <a:fontRef idx="minor">
+            <a:schemeClr val="lt1"/>
+          </a:fontRef>
+        </p:style>
+        <p:txBody>
+          <a:bodyPr rtlCol="0" anchor="ctr"/>
+          <a:lstStyle/>
+          <a:p>
+            <a:pPr algn="ctr"/>
+          </a:p>
+        </p:txBody>
+      </p:sp>
+      <p:sp>
+        <p:nvSpPr>
+          <p:cNvPr id="8" name="TextBox 7"/>
+          <p:cNvSpPr txBox="1"/>
+          <p:nvPr/>
+        </p:nvSpPr>
+        <p:spPr>
+          <a:xfrm>
+            <a:off x="548640" y="1463040"/>
+            <a:ext cx="10972800" cy="4572000"/>
           </a:xfrm>
           <a:prstGeom prst="rect">
             <a:avLst/>
@@ -5219,65 +5627,99 @@
           <a:p>
             <a:pPr>
               <a:spcAft>
-                <a:spcPts val="1000"/>
+                <a:spcPts val="900"/>
               </a:spcAft>
             </a:pPr>
             <a:r>
-              <a:rPr sz="2000" b="0">
+              <a:rPr sz="1800" b="0">
                 <a:solidFill>
                   <a:srgbClr val="1A1A1A"/>
                 </a:solidFill>
                 <a:latin typeface="Calibri"/>
               </a:rPr>
-              <a:t>•  Gold RHEL image from a versioned Image Builder blueprint in Git</a:t>
+              <a:t>•  Opening — team, challenges, objective (now)</a:t>
             </a:r>
           </a:p>
           <a:p>
             <a:pPr>
               <a:spcAft>
-                <a:spcPts val="1000"/>
+                <a:spcPts val="900"/>
               </a:spcAft>
             </a:pPr>
             <a:r>
-              <a:rPr sz="2000" b="0">
+              <a:rPr sz="1800" b="0">
                 <a:solidFill>
                   <a:srgbClr val="1A1A1A"/>
                 </a:solidFill>
                 <a:latin typeface="Calibri"/>
               </a:rPr>
-              <a:t>•  Compose once to AMI (AWS) and VHD (Azure)</a:t>
+              <a:t>•  Live walkthrough — end-user path: gold image → VM → prove controls (5–10 min)</a:t>
             </a:r>
           </a:p>
           <a:p>
             <a:pPr>
               <a:spcAft>
-                <a:spcPts val="1000"/>
+                <a:spcPts val="900"/>
               </a:spcAft>
             </a:pPr>
             <a:r>
-              <a:rPr sz="2000" b="0">
+              <a:rPr sz="1800" b="0">
                 <a:solidFill>
                   <a:srgbClr val="1A1A1A"/>
                 </a:solidFill>
                 <a:latin typeface="Calibri"/>
               </a:rPr>
-              <a:t>•  Launch VMs from that image — same controls every time</a:t>
+              <a:t>•  Value summary — how this solves Fedora Lane’s challenges (2–5 min)</a:t>
             </a:r>
           </a:p>
           <a:p>
             <a:pPr>
               <a:spcAft>
-                <a:spcPts val="1000"/>
+                <a:spcPts val="900"/>
               </a:spcAft>
             </a:pPr>
             <a:r>
-              <a:rPr sz="2000" b="0">
+              <a:rPr sz="1800" b="0">
                 <a:solidFill>
                   <a:srgbClr val="1A1A1A"/>
                 </a:solidFill>
                 <a:latin typeface="Calibri"/>
               </a:rPr>
-              <a:t>•  Local Image Builder (not hosted console.redhat.com)</a:t>
+              <a:t>•  Closing — one concrete next step (1–2 min)</a:t>
+            </a:r>
+          </a:p>
+        </p:txBody>
+      </p:sp>
+      <p:sp>
+        <p:nvSpPr>
+          <p:cNvPr id="9" name="TextBox 8"/>
+          <p:cNvSpPr txBox="1"/>
+          <p:nvPr/>
+        </p:nvSpPr>
+        <p:spPr>
+          <a:xfrm>
+            <a:off x="548640" y="6263640"/>
+            <a:ext cx="10972800" cy="365760"/>
+          </a:xfrm>
+          <a:prstGeom prst="rect">
+            <a:avLst/>
+          </a:prstGeom>
+          <a:noFill/>
+        </p:spPr>
+        <p:txBody>
+          <a:bodyPr wrap="none">
+            <a:spAutoFit/>
+          </a:bodyPr>
+          <a:lstStyle/>
+          <a:p>
+            <a:r>
+              <a:rPr sz="1300" b="0">
+                <a:solidFill>
+                  <a:srgbClr val="666666"/>
+                </a:solidFill>
+                <a:latin typeface="Calibri"/>
+              </a:rPr>
+              <a:t>Transition → live walkthrough</a:t>
             </a:r>
           </a:p>
         </p:txBody>
@@ -5388,50 +5830,16 @@
       </p:sp>
       <p:sp>
         <p:nvSpPr>
-          <p:cNvPr id="4" name="TextBox 3"/>
-          <p:cNvSpPr txBox="1"/>
-          <p:nvPr/>
-        </p:nvSpPr>
-        <p:spPr>
-          <a:xfrm>
-            <a:off x="548640" y="320040"/>
-            <a:ext cx="10972800" cy="640080"/>
-          </a:xfrm>
-          <a:prstGeom prst="rect">
-            <a:avLst/>
-          </a:prstGeom>
-          <a:noFill/>
-        </p:spPr>
-        <p:txBody>
-          <a:bodyPr wrap="none">
-            <a:spAutoFit/>
-          </a:bodyPr>
-          <a:lstStyle/>
-          <a:p>
-            <a:r>
-              <a:rPr sz="2800" b="1">
-                <a:solidFill>
-                  <a:srgbClr val="1A1A1A"/>
-                </a:solidFill>
-                <a:latin typeface="Calibri"/>
-              </a:rPr>
-              <a:t>Architecture</a:t>
-            </a:r>
-          </a:p>
-        </p:txBody>
-      </p:sp>
-      <p:sp>
-        <p:nvSpPr>
-          <p:cNvPr id="5" name="Rectangle 4"/>
+          <p:cNvPr id="4" name="Rounded Rectangle 3"/>
           <p:cNvSpPr/>
           <p:nvPr/>
         </p:nvSpPr>
         <p:spPr>
           <a:xfrm>
-            <a:off x="548640" y="960120"/>
-            <a:ext cx="2011680" cy="54864"/>
-          </a:xfrm>
-          <a:prstGeom prst="rect">
+            <a:off x="548640" y="228600"/>
+            <a:ext cx="2194560" cy="320040"/>
+          </a:xfrm>
+          <a:prstGeom prst="roundRect">
             <a:avLst/>
           </a:prstGeom>
           <a:solidFill>
@@ -5465,14 +5873,126 @@
       </p:sp>
       <p:sp>
         <p:nvSpPr>
+          <p:cNvPr id="5" name="TextBox 4"/>
+          <p:cNvSpPr txBox="1"/>
+          <p:nvPr/>
+        </p:nvSpPr>
+        <p:spPr>
+          <a:xfrm>
+            <a:off x="548640" y="256032"/>
+            <a:ext cx="2194560" cy="292608"/>
+          </a:xfrm>
+          <a:prstGeom prst="rect">
+            <a:avLst/>
+          </a:prstGeom>
+          <a:noFill/>
+        </p:spPr>
+        <p:txBody>
+          <a:bodyPr wrap="none">
+            <a:spAutoFit/>
+          </a:bodyPr>
+          <a:lstStyle/>
+          <a:p>
+            <a:pPr algn="l"/>
+            <a:r>
+              <a:rPr sz="1100" b="1">
+                <a:solidFill>
+                  <a:srgbClr val="FFFFFF"/>
+                </a:solidFill>
+                <a:latin typeface="Calibri"/>
+              </a:rPr>
+              <a:t>WALKTHROUGH · 5–10 min</a:t>
+            </a:r>
+          </a:p>
+        </p:txBody>
+      </p:sp>
+      <p:sp>
+        <p:nvSpPr>
           <p:cNvPr id="6" name="TextBox 5"/>
           <p:cNvSpPr txBox="1"/>
           <p:nvPr/>
         </p:nvSpPr>
         <p:spPr>
           <a:xfrm>
-            <a:off x="548640" y="1280160"/>
-            <a:ext cx="10972800" cy="5029200"/>
+            <a:off x="548640" y="640080"/>
+            <a:ext cx="10972800" cy="548640"/>
+          </a:xfrm>
+          <a:prstGeom prst="rect">
+            <a:avLst/>
+          </a:prstGeom>
+          <a:noFill/>
+        </p:spPr>
+        <p:txBody>
+          <a:bodyPr wrap="none">
+            <a:spAutoFit/>
+          </a:bodyPr>
+          <a:lstStyle/>
+          <a:p>
+            <a:r>
+              <a:rPr sz="2600" b="1">
+                <a:solidFill>
+                  <a:srgbClr val="1A1A1A"/>
+                </a:solidFill>
+                <a:latin typeface="Calibri"/>
+              </a:rPr>
+              <a:t>What we implemented</a:t>
+            </a:r>
+          </a:p>
+        </p:txBody>
+      </p:sp>
+      <p:sp>
+        <p:nvSpPr>
+          <p:cNvPr id="7" name="Rectangle 6"/>
+          <p:cNvSpPr/>
+          <p:nvPr/>
+        </p:nvSpPr>
+        <p:spPr>
+          <a:xfrm>
+            <a:off x="548640" y="1234440"/>
+            <a:ext cx="1828800" cy="45720"/>
+          </a:xfrm>
+          <a:prstGeom prst="rect">
+            <a:avLst/>
+          </a:prstGeom>
+          <a:solidFill>
+            <a:srgbClr val="EE0000"/>
+          </a:solidFill>
+          <a:ln>
+            <a:noFill/>
+          </a:ln>
+        </p:spPr>
+        <p:style>
+          <a:lnRef idx="1">
+            <a:schemeClr val="accent1"/>
+          </a:lnRef>
+          <a:fillRef idx="3">
+            <a:schemeClr val="accent1"/>
+          </a:fillRef>
+          <a:effectRef idx="2">
+            <a:schemeClr val="accent1"/>
+          </a:effectRef>
+          <a:fontRef idx="minor">
+            <a:schemeClr val="lt1"/>
+          </a:fontRef>
+        </p:style>
+        <p:txBody>
+          <a:bodyPr rtlCol="0" anchor="ctr"/>
+          <a:lstStyle/>
+          <a:p>
+            <a:pPr algn="ctr"/>
+          </a:p>
+        </p:txBody>
+      </p:sp>
+      <p:sp>
+        <p:nvSpPr>
+          <p:cNvPr id="8" name="TextBox 7"/>
+          <p:cNvSpPr txBox="1"/>
+          <p:nvPr/>
+        </p:nvSpPr>
+        <p:spPr>
+          <a:xfrm>
+            <a:off x="548640" y="1463040"/>
+            <a:ext cx="10972800" cy="4572000"/>
           </a:xfrm>
           <a:prstGeom prst="rect">
             <a:avLst/>
@@ -5487,99 +6007,81 @@
           <a:p>
             <a:pPr>
               <a:spcAft>
-                <a:spcPts val="1000"/>
+                <a:spcPts val="900"/>
               </a:spcAft>
             </a:pPr>
             <a:r>
-              <a:rPr sz="2000" b="0">
+              <a:rPr sz="1800" b="0">
                 <a:solidFill>
                   <a:srgbClr val="1A1A1A"/>
                 </a:solidFill>
                 <a:latin typeface="Calibri"/>
               </a:rPr>
-              <a:t>•  Expansion Pack controls live in the blueprint (Git)</a:t>
+              <a:t>•  Versioned Image Builder blueprint in Git (source of truth)</a:t>
             </a:r>
           </a:p>
           <a:p>
             <a:pPr>
               <a:spcAft>
-                <a:spcPts val="1000"/>
+                <a:spcPts val="900"/>
               </a:spcAft>
             </a:pPr>
             <a:r>
-              <a:rPr sz="2000" b="0">
+              <a:rPr sz="1800" b="0">
                 <a:solidFill>
                   <a:srgbClr val="1A1A1A"/>
                 </a:solidFill>
                 <a:latin typeface="Calibri"/>
               </a:rPr>
-              <a:t>•  Local RHEL Image Builder composes the gold image</a:t>
+              <a:t>•  Local RHEL Image Builder compose → gold AMI (AWS) and gold VHD (Azure)</a:t>
             </a:r>
           </a:p>
           <a:p>
             <a:pPr>
               <a:spcAft>
-                <a:spcPts val="1000"/>
+                <a:spcPts val="900"/>
               </a:spcAft>
             </a:pPr>
             <a:r>
-              <a:rPr sz="2000" b="0">
+              <a:rPr sz="1800" b="0">
                 <a:solidFill>
                   <a:srgbClr val="1A1A1A"/>
                 </a:solidFill>
                 <a:latin typeface="Calibri"/>
               </a:rPr>
-              <a:t>•  Outputs: AWS gold AMI  and  Azure gold VHD → managed image</a:t>
+              <a:t>•  Launch gold VMs from that image — not stock Marketplace OS</a:t>
             </a:r>
           </a:p>
           <a:p>
             <a:pPr>
               <a:spcAft>
-                <a:spcPts val="1000"/>
+                <a:spcPts val="900"/>
               </a:spcAft>
             </a:pPr>
             <a:r>
-              <a:rPr sz="2000" b="0">
+              <a:rPr sz="1800" b="0">
                 <a:solidFill>
                   <a:srgbClr val="1A1A1A"/>
                 </a:solidFill>
                 <a:latin typeface="Calibri"/>
               </a:rPr>
-              <a:t>•  Launch gold VMs — verify + reboot proven on both clouds</a:t>
-            </a:r>
-          </a:p>
-        </p:txBody>
-      </p:sp>
-      <p:sp>
-        <p:nvSpPr>
-          <p:cNvPr id="7" name="TextBox 6"/>
-          <p:cNvSpPr txBox="1"/>
-          <p:nvPr/>
-        </p:nvSpPr>
-        <p:spPr>
-          <a:xfrm>
-            <a:off x="548640" y="6263640"/>
-            <a:ext cx="10972800" cy="365760"/>
-          </a:xfrm>
-          <a:prstGeom prst="rect">
-            <a:avLst/>
-          </a:prstGeom>
-          <a:noFill/>
-        </p:spPr>
-        <p:txBody>
-          <a:bodyPr wrap="none">
-            <a:spAutoFit/>
-          </a:bodyPr>
-          <a:lstStyle/>
-          <a:p>
-            <a:r>
-              <a:rPr sz="1400" b="0">
-                <a:solidFill>
-                  <a:srgbClr val="666666"/>
-                </a:solidFill>
-                <a:latin typeface="Calibri"/>
-              </a:rPr>
-              <a:t>Blueprint → Compose → AMI/VHD → Launch → Gold web node</a:t>
+              <a:t>•  Expansion Pack controls baked in; httpd runs as a container on port 35443</a:t>
+            </a:r>
+          </a:p>
+          <a:p>
+            <a:pPr>
+              <a:spcAft>
+                <a:spcPts val="900"/>
+              </a:spcAft>
+            </a:pPr>
+            <a:r>
+              <a:rPr sz="1800" b="0">
+                <a:solidFill>
+                  <a:srgbClr val="1A1A1A"/>
+                </a:solidFill>
+                <a:latin typeface="Calibri"/>
+              </a:rPr>
+              <a:t>•  Working deployment you can verify live (SSH 2222 + curl 35443)</a:t>
             </a:r>
           </a:p>
         </p:txBody>
@@ -5690,50 +6192,16 @@
       </p:sp>
       <p:sp>
         <p:nvSpPr>
-          <p:cNvPr id="4" name="TextBox 3"/>
-          <p:cNvSpPr txBox="1"/>
-          <p:nvPr/>
-        </p:nvSpPr>
-        <p:spPr>
-          <a:xfrm>
-            <a:off x="548640" y="320040"/>
-            <a:ext cx="10972800" cy="640080"/>
-          </a:xfrm>
-          <a:prstGeom prst="rect">
-            <a:avLst/>
-          </a:prstGeom>
-          <a:noFill/>
-        </p:spPr>
-        <p:txBody>
-          <a:bodyPr wrap="none">
-            <a:spAutoFit/>
-          </a:bodyPr>
-          <a:lstStyle/>
-          <a:p>
-            <a:r>
-              <a:rPr sz="2800" b="1">
-                <a:solidFill>
-                  <a:srgbClr val="1A1A1A"/>
-                </a:solidFill>
-                <a:latin typeface="Calibri"/>
-              </a:rPr>
-              <a:t>Path: blueprint → running VM</a:t>
-            </a:r>
-          </a:p>
-        </p:txBody>
-      </p:sp>
-      <p:sp>
-        <p:nvSpPr>
-          <p:cNvPr id="5" name="Rectangle 4"/>
+          <p:cNvPr id="4" name="Rounded Rectangle 3"/>
           <p:cNvSpPr/>
           <p:nvPr/>
         </p:nvSpPr>
         <p:spPr>
           <a:xfrm>
-            <a:off x="548640" y="960120"/>
-            <a:ext cx="2011680" cy="54864"/>
-          </a:xfrm>
-          <a:prstGeom prst="rect">
+            <a:off x="548640" y="228600"/>
+            <a:ext cx="2194560" cy="320040"/>
+          </a:xfrm>
+          <a:prstGeom prst="roundRect">
             <a:avLst/>
           </a:prstGeom>
           <a:solidFill>
@@ -5767,14 +6235,126 @@
       </p:sp>
       <p:sp>
         <p:nvSpPr>
+          <p:cNvPr id="5" name="TextBox 4"/>
+          <p:cNvSpPr txBox="1"/>
+          <p:nvPr/>
+        </p:nvSpPr>
+        <p:spPr>
+          <a:xfrm>
+            <a:off x="548640" y="256032"/>
+            <a:ext cx="2194560" cy="292608"/>
+          </a:xfrm>
+          <a:prstGeom prst="rect">
+            <a:avLst/>
+          </a:prstGeom>
+          <a:noFill/>
+        </p:spPr>
+        <p:txBody>
+          <a:bodyPr wrap="none">
+            <a:spAutoFit/>
+          </a:bodyPr>
+          <a:lstStyle/>
+          <a:p>
+            <a:pPr algn="l"/>
+            <a:r>
+              <a:rPr sz="1100" b="1">
+                <a:solidFill>
+                  <a:srgbClr val="FFFFFF"/>
+                </a:solidFill>
+                <a:latin typeface="Calibri"/>
+              </a:rPr>
+              <a:t>WALKTHROUGH</a:t>
+            </a:r>
+          </a:p>
+        </p:txBody>
+      </p:sp>
+      <p:sp>
+        <p:nvSpPr>
           <p:cNvPr id="6" name="TextBox 5"/>
           <p:cNvSpPr txBox="1"/>
           <p:nvPr/>
         </p:nvSpPr>
         <p:spPr>
           <a:xfrm>
-            <a:off x="548640" y="1280160"/>
-            <a:ext cx="10972800" cy="5029200"/>
+            <a:off x="548640" y="640080"/>
+            <a:ext cx="10972800" cy="548640"/>
+          </a:xfrm>
+          <a:prstGeom prst="rect">
+            <a:avLst/>
+          </a:prstGeom>
+          <a:noFill/>
+        </p:spPr>
+        <p:txBody>
+          <a:bodyPr wrap="none">
+            <a:spAutoFit/>
+          </a:bodyPr>
+          <a:lstStyle/>
+          <a:p>
+            <a:r>
+              <a:rPr sz="2600" b="1">
+                <a:solidFill>
+                  <a:srgbClr val="1A1A1A"/>
+                </a:solidFill>
+                <a:latin typeface="Calibri"/>
+              </a:rPr>
+              <a:t>Critical decisions — and why</a:t>
+            </a:r>
+          </a:p>
+        </p:txBody>
+      </p:sp>
+      <p:sp>
+        <p:nvSpPr>
+          <p:cNvPr id="7" name="Rectangle 6"/>
+          <p:cNvSpPr/>
+          <p:nvPr/>
+        </p:nvSpPr>
+        <p:spPr>
+          <a:xfrm>
+            <a:off x="548640" y="1234440"/>
+            <a:ext cx="1828800" cy="45720"/>
+          </a:xfrm>
+          <a:prstGeom prst="rect">
+            <a:avLst/>
+          </a:prstGeom>
+          <a:solidFill>
+            <a:srgbClr val="EE0000"/>
+          </a:solidFill>
+          <a:ln>
+            <a:noFill/>
+          </a:ln>
+        </p:spPr>
+        <p:style>
+          <a:lnRef idx="1">
+            <a:schemeClr val="accent1"/>
+          </a:lnRef>
+          <a:fillRef idx="3">
+            <a:schemeClr val="accent1"/>
+          </a:fillRef>
+          <a:effectRef idx="2">
+            <a:schemeClr val="accent1"/>
+          </a:effectRef>
+          <a:fontRef idx="minor">
+            <a:schemeClr val="lt1"/>
+          </a:fontRef>
+        </p:style>
+        <p:txBody>
+          <a:bodyPr rtlCol="0" anchor="ctr"/>
+          <a:lstStyle/>
+          <a:p>
+            <a:pPr algn="ctr"/>
+          </a:p>
+        </p:txBody>
+      </p:sp>
+      <p:sp>
+        <p:nvSpPr>
+          <p:cNvPr id="8" name="TextBox 7"/>
+          <p:cNvSpPr txBox="1"/>
+          <p:nvPr/>
+        </p:nvSpPr>
+        <p:spPr>
+          <a:xfrm>
+            <a:off x="548640" y="1463040"/>
+            <a:ext cx="10972800" cy="4572000"/>
           </a:xfrm>
           <a:prstGeom prst="rect">
             <a:avLst/>
@@ -5789,131 +6369,81 @@
           <a:p>
             <a:pPr>
               <a:spcAft>
-                <a:spcPts val="1000"/>
+                <a:spcPts val="900"/>
               </a:spcAft>
             </a:pPr>
             <a:r>
-              <a:rPr sz="2000" b="0">
+              <a:rPr sz="1800" b="0">
                 <a:solidFill>
                   <a:srgbClr val="1A1A1A"/>
                 </a:solidFill>
                 <a:latin typeface="Calibri"/>
               </a:rPr>
-              <a:t>•  1. Blueprint — mounts, users, ports, packages (Git)</a:t>
+              <a:t>•  Local Image Builder (not hosted console.redhat.com) — matches Expansion Pack manual compose</a:t>
             </a:r>
           </a:p>
           <a:p>
             <a:pPr>
               <a:spcAft>
-                <a:spcPts val="1000"/>
+                <a:spcPts val="900"/>
               </a:spcAft>
             </a:pPr>
             <a:r>
-              <a:rPr sz="2000" b="0">
+              <a:rPr sz="1800" b="0">
                 <a:solidFill>
                   <a:srgbClr val="1A1A1A"/>
                 </a:solidFill>
                 <a:latin typeface="Calibri"/>
               </a:rPr>
-              <a:t>•  2. Compose — Image Builder builds AMI or VHD (RHSM builder)</a:t>
+              <a:t>•  One blueprint → two cloud artifacts — same controls on AWS and Azure</a:t>
             </a:r>
           </a:p>
           <a:p>
             <a:pPr>
               <a:spcAft>
-                <a:spcPts val="1000"/>
+                <a:spcPts val="900"/>
               </a:spcAft>
             </a:pPr>
             <a:r>
-              <a:rPr sz="2000" b="0">
+              <a:rPr sz="1800" b="0">
                 <a:solidFill>
                   <a:srgbClr val="1A1A1A"/>
                 </a:solidFill>
                 <a:latin typeface="Calibri"/>
               </a:rPr>
-              <a:t>•  3. Register — AMI in AWS / managed image in Azure</a:t>
+              <a:t>•  Replace from gold image in waves — not rebuild 1,600×, not in-place root swap</a:t>
             </a:r>
           </a:p>
           <a:p>
             <a:pPr>
               <a:spcAft>
-                <a:spcPts val="1000"/>
+                <a:spcPts val="900"/>
               </a:spcAft>
             </a:pPr>
             <a:r>
-              <a:rPr sz="2000" b="0">
+              <a:rPr sz="1800" b="0">
                 <a:solidFill>
                   <a:srgbClr val="1A1A1A"/>
                 </a:solidFill>
                 <a:latin typeface="Calibri"/>
               </a:rPr>
-              <a:t>•  4. Launch — new VM from gold image (not stock Marketplace)</a:t>
+              <a:t>•  Firstboot / User data starts httpd — image has the tooling; launch completes the service</a:t>
             </a:r>
           </a:p>
           <a:p>
             <a:pPr>
               <a:spcAft>
-                <a:spcPts val="1000"/>
+                <a:spcPts val="900"/>
               </a:spcAft>
             </a:pPr>
             <a:r>
-              <a:rPr sz="2000" b="0">
+              <a:rPr sz="1800" b="0">
                 <a:solidFill>
                   <a:srgbClr val="1A1A1A"/>
                 </a:solidFill>
                 <a:latin typeface="Calibri"/>
               </a:rPr>
-              <a:t>•  5. Firstboot — starts httpd container on port 35443</a:t>
-            </a:r>
-          </a:p>
-          <a:p>
-            <a:pPr>
-              <a:spcAft>
-                <a:spcPts val="1000"/>
-              </a:spcAft>
-            </a:pPr>
-            <a:r>
-              <a:rPr sz="2000" b="0">
-                <a:solidFill>
-                  <a:srgbClr val="1A1A1A"/>
-                </a:solidFill>
-                <a:latin typeface="Calibri"/>
-              </a:rPr>
-              <a:t>•  6. Verify — SELinux, mounts, ports, curl, reboot</a:t>
-            </a:r>
-          </a:p>
-        </p:txBody>
-      </p:sp>
-      <p:sp>
-        <p:nvSpPr>
-          <p:cNvPr id="7" name="TextBox 6"/>
-          <p:cNvSpPr txBox="1"/>
-          <p:nvPr/>
-        </p:nvSpPr>
-        <p:spPr>
-          <a:xfrm>
-            <a:off x="548640" y="6263640"/>
-            <a:ext cx="10972800" cy="365760"/>
-          </a:xfrm>
-          <a:prstGeom prst="rect">
-            <a:avLst/>
-          </a:prstGeom>
-          <a:noFill/>
-        </p:spPr>
-        <p:txBody>
-          <a:bodyPr wrap="none">
-            <a:spAutoFit/>
-          </a:bodyPr>
-          <a:lstStyle/>
-          <a:p>
-            <a:r>
-              <a:rPr sz="1400" b="0">
-                <a:solidFill>
-                  <a:srgbClr val="666666"/>
-                </a:solidFill>
-                <a:latin typeface="Calibri"/>
-              </a:rPr>
-              <a:t>SG/NSG opens ports 2222 &amp; 35443 · Firstboot / User data starts httpd</a:t>
+              <a:t>•  SG/NSG separate from image — network policy stays in cloud controls</a:t>
             </a:r>
           </a:p>
         </p:txBody>
@@ -6024,50 +6554,16 @@
       </p:sp>
       <p:sp>
         <p:nvSpPr>
-          <p:cNvPr id="4" name="TextBox 3"/>
-          <p:cNvSpPr txBox="1"/>
-          <p:nvPr/>
-        </p:nvSpPr>
-        <p:spPr>
-          <a:xfrm>
-            <a:off x="548640" y="320040"/>
-            <a:ext cx="10972800" cy="640080"/>
-          </a:xfrm>
-          <a:prstGeom prst="rect">
-            <a:avLst/>
-          </a:prstGeom>
-          <a:noFill/>
-        </p:spPr>
-        <p:txBody>
-          <a:bodyPr wrap="none">
-            <a:spAutoFit/>
-          </a:bodyPr>
-          <a:lstStyle/>
-          <a:p>
-            <a:r>
-              <a:rPr sz="2800" b="1">
-                <a:solidFill>
-                  <a:srgbClr val="1A1A1A"/>
-                </a:solidFill>
-                <a:latin typeface="Calibri"/>
-              </a:rPr>
-              <a:t>Expansion Pack controls (baked in)</a:t>
-            </a:r>
-          </a:p>
-        </p:txBody>
-      </p:sp>
-      <p:sp>
-        <p:nvSpPr>
-          <p:cNvPr id="5" name="Rectangle 4"/>
+          <p:cNvPr id="4" name="Rounded Rectangle 3"/>
           <p:cNvSpPr/>
           <p:nvPr/>
         </p:nvSpPr>
         <p:spPr>
           <a:xfrm>
-            <a:off x="548640" y="960120"/>
-            <a:ext cx="2011680" cy="54864"/>
-          </a:xfrm>
-          <a:prstGeom prst="rect">
+            <a:off x="548640" y="228600"/>
+            <a:ext cx="2194560" cy="320040"/>
+          </a:xfrm>
+          <a:prstGeom prst="roundRect">
             <a:avLst/>
           </a:prstGeom>
           <a:solidFill>
@@ -6101,14 +6597,126 @@
       </p:sp>
       <p:sp>
         <p:nvSpPr>
+          <p:cNvPr id="5" name="TextBox 4"/>
+          <p:cNvSpPr txBox="1"/>
+          <p:nvPr/>
+        </p:nvSpPr>
+        <p:spPr>
+          <a:xfrm>
+            <a:off x="548640" y="256032"/>
+            <a:ext cx="2194560" cy="292608"/>
+          </a:xfrm>
+          <a:prstGeom prst="rect">
+            <a:avLst/>
+          </a:prstGeom>
+          <a:noFill/>
+        </p:spPr>
+        <p:txBody>
+          <a:bodyPr wrap="none">
+            <a:spAutoFit/>
+          </a:bodyPr>
+          <a:lstStyle/>
+          <a:p>
+            <a:pPr algn="l"/>
+            <a:r>
+              <a:rPr sz="1100" b="1">
+                <a:solidFill>
+                  <a:srgbClr val="FFFFFF"/>
+                </a:solidFill>
+                <a:latin typeface="Calibri"/>
+              </a:rPr>
+              <a:t>WALKTHROUGH</a:t>
+            </a:r>
+          </a:p>
+        </p:txBody>
+      </p:sp>
+      <p:sp>
+        <p:nvSpPr>
           <p:cNvPr id="6" name="TextBox 5"/>
           <p:cNvSpPr txBox="1"/>
           <p:nvPr/>
         </p:nvSpPr>
         <p:spPr>
           <a:xfrm>
-            <a:off x="548640" y="1280160"/>
-            <a:ext cx="10972800" cy="5029200"/>
+            <a:off x="548640" y="640080"/>
+            <a:ext cx="10972800" cy="548640"/>
+          </a:xfrm>
+          <a:prstGeom prst="rect">
+            <a:avLst/>
+          </a:prstGeom>
+          <a:noFill/>
+        </p:spPr>
+        <p:txBody>
+          <a:bodyPr wrap="none">
+            <a:spAutoFit/>
+          </a:bodyPr>
+          <a:lstStyle/>
+          <a:p>
+            <a:r>
+              <a:rPr sz="2600" b="1">
+                <a:solidFill>
+                  <a:srgbClr val="1A1A1A"/>
+                </a:solidFill>
+                <a:latin typeface="Calibri"/>
+              </a:rPr>
+              <a:t>Live path (end-user view)</a:t>
+            </a:r>
+          </a:p>
+        </p:txBody>
+      </p:sp>
+      <p:sp>
+        <p:nvSpPr>
+          <p:cNvPr id="7" name="Rectangle 6"/>
+          <p:cNvSpPr/>
+          <p:nvPr/>
+        </p:nvSpPr>
+        <p:spPr>
+          <a:xfrm>
+            <a:off x="548640" y="1234440"/>
+            <a:ext cx="1828800" cy="45720"/>
+          </a:xfrm>
+          <a:prstGeom prst="rect">
+            <a:avLst/>
+          </a:prstGeom>
+          <a:solidFill>
+            <a:srgbClr val="EE0000"/>
+          </a:solidFill>
+          <a:ln>
+            <a:noFill/>
+          </a:ln>
+        </p:spPr>
+        <p:style>
+          <a:lnRef idx="1">
+            <a:schemeClr val="accent1"/>
+          </a:lnRef>
+          <a:fillRef idx="3">
+            <a:schemeClr val="accent1"/>
+          </a:fillRef>
+          <a:effectRef idx="2">
+            <a:schemeClr val="accent1"/>
+          </a:effectRef>
+          <a:fontRef idx="minor">
+            <a:schemeClr val="lt1"/>
+          </a:fontRef>
+        </p:style>
+        <p:txBody>
+          <a:bodyPr rtlCol="0" anchor="ctr"/>
+          <a:lstStyle/>
+          <a:p>
+            <a:pPr algn="ctr"/>
+          </a:p>
+        </p:txBody>
+      </p:sp>
+      <p:sp>
+        <p:nvSpPr>
+          <p:cNvPr id="8" name="TextBox 7"/>
+          <p:cNvSpPr txBox="1"/>
+          <p:nvPr/>
+        </p:nvSpPr>
+        <p:spPr>
+          <a:xfrm>
+            <a:off x="548640" y="1463040"/>
+            <a:ext cx="10972800" cy="4572000"/>
           </a:xfrm>
           <a:prstGeom prst="rect">
             <a:avLst/>
@@ -6123,97 +6731,131 @@
           <a:p>
             <a:pPr>
               <a:spcAft>
-                <a:spcPts val="1000"/>
+                <a:spcPts val="900"/>
               </a:spcAft>
             </a:pPr>
             <a:r>
-              <a:rPr sz="2000" b="0">
+              <a:rPr sz="1800" b="0">
                 <a:solidFill>
                   <a:srgbClr val="1A1A1A"/>
                 </a:solidFill>
                 <a:latin typeface="Calibri"/>
               </a:rPr>
-              <a:t>•  Separate filesystems: /var/log, /home, /tmp, /var/tmp</a:t>
+              <a:t>•  1. Blueprint in Git — recipe for mounts, SSH, fladmins, ports</a:t>
             </a:r>
           </a:p>
           <a:p>
             <a:pPr>
               <a:spcAft>
-                <a:spcPts val="1000"/>
+                <a:spcPts val="900"/>
               </a:spcAft>
             </a:pPr>
             <a:r>
-              <a:rPr sz="2000" b="0">
+              <a:rPr sz="1800" b="0">
                 <a:solidFill>
                   <a:srgbClr val="1A1A1A"/>
                 </a:solidFill>
                 <a:latin typeface="Calibri"/>
               </a:rPr>
-              <a:t>•  /tmp mounted noexec · SELinux enforcing</a:t>
+              <a:t>•  2. Compose on subscribed RHEL builder → AMI or VHD</a:t>
             </a:r>
           </a:p>
           <a:p>
             <a:pPr>
               <a:spcAft>
-                <a:spcPts val="1000"/>
+                <a:spcPts val="900"/>
               </a:spcAft>
             </a:pPr>
             <a:r>
-              <a:rPr sz="2000" b="0">
+              <a:rPr sz="1800" b="0">
                 <a:solidFill>
                   <a:srgbClr val="1A1A1A"/>
                 </a:solidFill>
                 <a:latin typeface="Calibri"/>
               </a:rPr>
-              <a:t>•  SSH on port 2222 — key-only, no root SSH</a:t>
+              <a:t>•  3. Register gold image in AWS / Azure</a:t>
             </a:r>
           </a:p>
           <a:p>
             <a:pPr>
               <a:spcAft>
-                <a:spcPts val="1000"/>
+                <a:spcPts val="900"/>
               </a:spcAft>
             </a:pPr>
             <a:r>
-              <a:rPr sz="2000" b="0">
+              <a:rPr sz="1800" b="0">
                 <a:solidFill>
                   <a:srgbClr val="1A1A1A"/>
                 </a:solidFill>
                 <a:latin typeface="Calibri"/>
               </a:rPr>
-              <a:t>•  Admins: fladmins group · fladmin1 / fladmin2</a:t>
+              <a:t>•  4. Launch VM from gold image (Console or CLI)</a:t>
             </a:r>
           </a:p>
           <a:p>
             <a:pPr>
               <a:spcAft>
-                <a:spcPts val="1000"/>
+                <a:spcPts val="900"/>
               </a:spcAft>
             </a:pPr>
             <a:r>
-              <a:rPr sz="2000" b="0">
+              <a:rPr sz="1800" b="0">
                 <a:solidFill>
                   <a:srgbClr val="1A1A1A"/>
                 </a:solidFill>
                 <a:latin typeface="Calibri"/>
               </a:rPr>
-              <a:t>•  httpd in a container on port 35443</a:t>
+              <a:t>•  5. Firstboot starts httpd container on 35443</a:t>
             </a:r>
           </a:p>
           <a:p>
             <a:pPr>
               <a:spcAft>
-                <a:spcPts val="1000"/>
+                <a:spcPts val="900"/>
               </a:spcAft>
             </a:pPr>
             <a:r>
-              <a:rPr sz="2000" b="0">
+              <a:rPr sz="1800" b="0">
                 <a:solidFill>
                   <a:srgbClr val="1A1A1A"/>
                 </a:solidFill>
                 <a:latin typeface="Calibri"/>
               </a:rPr>
-              <a:t>•  Firewall limited to SSH + httpd · Proven after reboot</a:t>
+              <a:t>•  6. Verify live: SELinux, mounts, ports, curl, reboot</a:t>
+            </a:r>
+          </a:p>
+        </p:txBody>
+      </p:sp>
+      <p:sp>
+        <p:nvSpPr>
+          <p:cNvPr id="9" name="TextBox 8"/>
+          <p:cNvSpPr txBox="1"/>
+          <p:nvPr/>
+        </p:nvSpPr>
+        <p:spPr>
+          <a:xfrm>
+            <a:off x="548640" y="6263640"/>
+            <a:ext cx="10972800" cy="365760"/>
+          </a:xfrm>
+          <a:prstGeom prst="rect">
+            <a:avLst/>
+          </a:prstGeom>
+          <a:noFill/>
+        </p:spPr>
+        <p:txBody>
+          <a:bodyPr wrap="none">
+            <a:spAutoFit/>
+          </a:bodyPr>
+          <a:lstStyle/>
+          <a:p>
+            <a:r>
+              <a:rPr sz="1300" b="0">
+                <a:solidFill>
+                  <a:srgbClr val="666666"/>
+                </a:solidFill>
+                <a:latin typeface="Calibri"/>
+              </a:rPr>
+              <a:t>Demo now: open gold VM + verify commands (see presentation script)</a:t>
             </a:r>
           </a:p>
         </p:txBody>
@@ -6324,50 +6966,16 @@
       </p:sp>
       <p:sp>
         <p:nvSpPr>
-          <p:cNvPr id="4" name="TextBox 3"/>
-          <p:cNvSpPr txBox="1"/>
-          <p:nvPr/>
-        </p:nvSpPr>
-        <p:spPr>
-          <a:xfrm>
-            <a:off x="548640" y="320040"/>
-            <a:ext cx="10972800" cy="640080"/>
-          </a:xfrm>
-          <a:prstGeom prst="rect">
-            <a:avLst/>
-          </a:prstGeom>
-          <a:noFill/>
-        </p:spPr>
-        <p:txBody>
-          <a:bodyPr wrap="none">
-            <a:spAutoFit/>
-          </a:bodyPr>
-          <a:lstStyle/>
-          <a:p>
-            <a:r>
-              <a:rPr sz="2800" b="1">
-                <a:solidFill>
-                  <a:srgbClr val="1A1A1A"/>
-                </a:solidFill>
-                <a:latin typeface="Calibri"/>
-              </a:rPr>
-              <a:t>Operate with Console or CLI</a:t>
-            </a:r>
-          </a:p>
-        </p:txBody>
-      </p:sp>
-      <p:sp>
-        <p:nvSpPr>
-          <p:cNvPr id="5" name="Rectangle 4"/>
+          <p:cNvPr id="4" name="Rounded Rectangle 3"/>
           <p:cNvSpPr/>
           <p:nvPr/>
         </p:nvSpPr>
         <p:spPr>
           <a:xfrm>
-            <a:off x="548640" y="960120"/>
-            <a:ext cx="2011680" cy="54864"/>
-          </a:xfrm>
-          <a:prstGeom prst="rect">
+            <a:off x="548640" y="228600"/>
+            <a:ext cx="2194560" cy="320040"/>
+          </a:xfrm>
+          <a:prstGeom prst="roundRect">
             <a:avLst/>
           </a:prstGeom>
           <a:solidFill>
@@ -6401,14 +7009,83 @@
       </p:sp>
       <p:sp>
         <p:nvSpPr>
-          <p:cNvPr id="6" name="Rounded Rectangle 5"/>
+          <p:cNvPr id="5" name="TextBox 4"/>
+          <p:cNvSpPr txBox="1"/>
+          <p:nvPr/>
+        </p:nvSpPr>
+        <p:spPr>
+          <a:xfrm>
+            <a:off x="548640" y="256032"/>
+            <a:ext cx="2194560" cy="292608"/>
+          </a:xfrm>
+          <a:prstGeom prst="rect">
+            <a:avLst/>
+          </a:prstGeom>
+          <a:noFill/>
+        </p:spPr>
+        <p:txBody>
+          <a:bodyPr wrap="none">
+            <a:spAutoFit/>
+          </a:bodyPr>
+          <a:lstStyle/>
+          <a:p>
+            <a:pPr algn="l"/>
+            <a:r>
+              <a:rPr sz="1100" b="1">
+                <a:solidFill>
+                  <a:srgbClr val="FFFFFF"/>
+                </a:solidFill>
+                <a:latin typeface="Calibri"/>
+              </a:rPr>
+              <a:t>WALKTHROUGH</a:t>
+            </a:r>
+          </a:p>
+        </p:txBody>
+      </p:sp>
+      <p:sp>
+        <p:nvSpPr>
+          <p:cNvPr id="6" name="TextBox 5"/>
+          <p:cNvSpPr txBox="1"/>
+          <p:nvPr/>
+        </p:nvSpPr>
+        <p:spPr>
+          <a:xfrm>
+            <a:off x="548640" y="640080"/>
+            <a:ext cx="10972800" cy="502920"/>
+          </a:xfrm>
+          <a:prstGeom prst="rect">
+            <a:avLst/>
+          </a:prstGeom>
+          <a:noFill/>
+        </p:spPr>
+        <p:txBody>
+          <a:bodyPr wrap="none">
+            <a:spAutoFit/>
+          </a:bodyPr>
+          <a:lstStyle/>
+          <a:p>
+            <a:r>
+              <a:rPr sz="2400" b="1">
+                <a:solidFill>
+                  <a:srgbClr val="1A1A1A"/>
+                </a:solidFill>
+                <a:latin typeface="Calibri"/>
+              </a:rPr>
+              <a:t>What we prove on the live VM</a:t>
+            </a:r>
+          </a:p>
+        </p:txBody>
+      </p:sp>
+      <p:sp>
+        <p:nvSpPr>
+          <p:cNvPr id="7" name="Rounded Rectangle 6"/>
           <p:cNvSpPr/>
           <p:nvPr/>
         </p:nvSpPr>
         <p:spPr>
           <a:xfrm>
-            <a:off x="548640" y="1280160"/>
-            <a:ext cx="5120640" cy="4754880"/>
+            <a:off x="548640" y="1371600"/>
+            <a:ext cx="5120640" cy="4663440"/>
           </a:xfrm>
           <a:prstGeom prst="roundRect">
             <a:avLst/>
@@ -6446,14 +7123,14 @@
       </p:sp>
       <p:sp>
         <p:nvSpPr>
-          <p:cNvPr id="7" name="TextBox 6"/>
+          <p:cNvPr id="8" name="TextBox 7"/>
           <p:cNvSpPr txBox="1"/>
           <p:nvPr/>
         </p:nvSpPr>
         <p:spPr>
           <a:xfrm>
-            <a:off x="822959" y="1463040"/>
-            <a:ext cx="4572000" cy="457200"/>
+            <a:off x="822959" y="1554480"/>
+            <a:ext cx="4572000" cy="411480"/>
           </a:xfrm>
           <a:prstGeom prst="rect">
             <a:avLst/>
@@ -6467,26 +7144,26 @@
           <a:lstStyle/>
           <a:p>
             <a:r>
-              <a:rPr sz="1800" b="1">
+              <a:rPr sz="1600" b="1">
                 <a:solidFill>
                   <a:srgbClr val="EE0000"/>
                 </a:solidFill>
                 <a:latin typeface="Calibri"/>
               </a:rPr>
-              <a:t>AWS</a:t>
-            </a:r>
-          </a:p>
-        </p:txBody>
-      </p:sp>
-      <p:sp>
-        <p:nvSpPr>
-          <p:cNvPr id="8" name="TextBox 7"/>
+              <a:t>Expansion Pack controls</a:t>
+            </a:r>
+          </a:p>
+        </p:txBody>
+      </p:sp>
+      <p:sp>
+        <p:nvSpPr>
+          <p:cNvPr id="9" name="TextBox 8"/>
           <p:cNvSpPr txBox="1"/>
           <p:nvPr/>
         </p:nvSpPr>
         <p:spPr>
           <a:xfrm>
-            <a:off x="822959" y="2011680"/>
+            <a:off x="822959" y="2103120"/>
             <a:ext cx="4572000" cy="3657600"/>
           </a:xfrm>
           <a:prstGeom prst="rect">
@@ -6502,111 +7179,111 @@
           <a:p>
             <a:pPr>
               <a:spcAft>
-                <a:spcPts val="800"/>
+                <a:spcPts val="700"/>
               </a:spcAft>
             </a:pPr>
             <a:r>
-              <a:rPr sz="1600" b="0">
+              <a:rPr sz="1500" b="0">
                 <a:solidFill>
                   <a:srgbClr val="1A1A1A"/>
                 </a:solidFill>
                 <a:latin typeface="Calibri"/>
               </a:rPr>
-              <a:t>•  Region: us-east-2 (Ohio)</a:t>
+              <a:t>•  SELinux Enforcing</a:t>
             </a:r>
           </a:p>
           <a:p>
             <a:pPr>
               <a:spcAft>
-                <a:spcPts val="800"/>
+                <a:spcPts val="700"/>
               </a:spcAft>
             </a:pPr>
             <a:r>
-              <a:rPr sz="1600" b="0">
+              <a:rPr sz="1500" b="0">
                 <a:solidFill>
                   <a:srgbClr val="1A1A1A"/>
                 </a:solidFill>
                 <a:latin typeface="Calibri"/>
               </a:rPr>
-              <a:t>•  Launch from AMI fl-rhel-gold</a:t>
+              <a:t>•  Separate /var/log /home /tmp /var/tmp</a:t>
             </a:r>
           </a:p>
           <a:p>
             <a:pPr>
               <a:spcAft>
-                <a:spcPts val="800"/>
+                <a:spcPts val="700"/>
               </a:spcAft>
             </a:pPr>
             <a:r>
-              <a:rPr sz="1600" b="0">
+              <a:rPr sz="1500" b="0">
                 <a:solidFill>
                   <a:srgbClr val="1A1A1A"/>
                 </a:solidFill>
                 <a:latin typeface="Calibri"/>
               </a:rPr>
-              <a:t>•  SG: TCP 2222 + 35443</a:t>
+              <a:t>•  /tmp noexec</a:t>
             </a:r>
           </a:p>
           <a:p>
             <a:pPr>
               <a:spcAft>
-                <a:spcPts val="800"/>
+                <a:spcPts val="700"/>
               </a:spcAft>
             </a:pPr>
             <a:r>
-              <a:rPr sz="1600" b="0">
+              <a:rPr sz="1500" b="0">
                 <a:solidFill>
                   <a:srgbClr val="1A1A1A"/>
                 </a:solidFill>
                 <a:latin typeface="Calibri"/>
               </a:rPr>
-              <a:t>•  User data re-runs firstboot</a:t>
+              <a:t>•  SSH 2222 key-only · no root SSH</a:t>
             </a:r>
           </a:p>
           <a:p>
             <a:pPr>
               <a:spcAft>
-                <a:spcPts val="800"/>
+                <a:spcPts val="700"/>
               </a:spcAft>
             </a:pPr>
             <a:r>
-              <a:rPr sz="1600" b="0">
+              <a:rPr sz="1500" b="0">
                 <a:solidFill>
                   <a:srgbClr val="1A1A1A"/>
                 </a:solidFill>
                 <a:latin typeface="Calibri"/>
               </a:rPr>
-              <a:t>•  SSH: fladmin1 @ port 2222</a:t>
+              <a:t>•  fladmins · fladmin1 / fladmin2</a:t>
             </a:r>
           </a:p>
           <a:p>
             <a:pPr>
               <a:spcAft>
-                <a:spcPts val="800"/>
+                <a:spcPts val="700"/>
               </a:spcAft>
             </a:pPr>
             <a:r>
-              <a:rPr sz="1600" b="0">
+              <a:rPr sz="1500" b="0">
                 <a:solidFill>
                   <a:srgbClr val="1A1A1A"/>
                 </a:solidFill>
                 <a:latin typeface="Calibri"/>
               </a:rPr>
-              <a:t>•  curl http://&lt;ip&gt;:35443/</a:t>
-            </a:r>
-          </a:p>
-        </p:txBody>
-      </p:sp>
-      <p:sp>
-        <p:nvSpPr>
-          <p:cNvPr id="9" name="Rounded Rectangle 8"/>
+              <a:t>•  Firewall: 2222 + 35443 only</a:t>
+            </a:r>
+          </a:p>
+        </p:txBody>
+      </p:sp>
+      <p:sp>
+        <p:nvSpPr>
+          <p:cNvPr id="10" name="Rounded Rectangle 9"/>
           <p:cNvSpPr/>
           <p:nvPr/>
         </p:nvSpPr>
         <p:spPr>
           <a:xfrm>
-            <a:off x="6400800" y="1280160"/>
-            <a:ext cx="5120640" cy="4754880"/>
+            <a:off x="6400800" y="1371600"/>
+            <a:ext cx="5120640" cy="4663440"/>
           </a:xfrm>
           <a:prstGeom prst="roundRect">
             <a:avLst/>
@@ -6644,14 +7321,14 @@
       </p:sp>
       <p:sp>
         <p:nvSpPr>
-          <p:cNvPr id="10" name="TextBox 9"/>
+          <p:cNvPr id="11" name="TextBox 10"/>
           <p:cNvSpPr txBox="1"/>
           <p:nvPr/>
         </p:nvSpPr>
         <p:spPr>
           <a:xfrm>
-            <a:off x="6675120" y="1463040"/>
-            <a:ext cx="4572000" cy="457200"/>
+            <a:off x="6675120" y="1554480"/>
+            <a:ext cx="4572000" cy="411480"/>
           </a:xfrm>
           <a:prstGeom prst="rect">
             <a:avLst/>
@@ -6665,26 +7342,26 @@
           <a:lstStyle/>
           <a:p>
             <a:r>
-              <a:rPr sz="1800" b="1">
+              <a:rPr sz="1600" b="1">
                 <a:solidFill>
                   <a:srgbClr val="EE0000"/>
                 </a:solidFill>
                 <a:latin typeface="Calibri"/>
               </a:rPr>
-              <a:t>Azure</a:t>
-            </a:r>
-          </a:p>
-        </p:txBody>
-      </p:sp>
-      <p:sp>
-        <p:nvSpPr>
-          <p:cNvPr id="11" name="TextBox 10"/>
+              <a:t>Service in action</a:t>
+            </a:r>
+          </a:p>
+        </p:txBody>
+      </p:sp>
+      <p:sp>
+        <p:nvSpPr>
+          <p:cNvPr id="12" name="TextBox 11"/>
           <p:cNvSpPr txBox="1"/>
           <p:nvPr/>
         </p:nvSpPr>
         <p:spPr>
           <a:xfrm>
-            <a:off x="6675120" y="2011680"/>
+            <a:off x="6675120" y="2103120"/>
             <a:ext cx="4572000" cy="3657600"/>
           </a:xfrm>
           <a:prstGeom prst="rect">
@@ -6700,81 +7377,81 @@
           <a:p>
             <a:pPr>
               <a:spcAft>
-                <a:spcPts val="800"/>
+                <a:spcPts val="700"/>
               </a:spcAft>
             </a:pPr>
             <a:r>
-              <a:rPr sz="1600" b="0">
+              <a:rPr sz="1500" b="0">
                 <a:solidFill>
                   <a:srgbClr val="1A1A1A"/>
                 </a:solidFill>
                 <a:latin typeface="Calibri"/>
               </a:rPr>
-              <a:t>•  Create VM from image fl-rhel-gold</a:t>
+              <a:t>•  httpd container listening on 35443</a:t>
             </a:r>
           </a:p>
           <a:p>
             <a:pPr>
               <a:spcAft>
-                <a:spcPts val="800"/>
+                <a:spcPts val="700"/>
               </a:spcAft>
             </a:pPr>
             <a:r>
-              <a:rPr sz="1600" b="0">
+              <a:rPr sz="1500" b="0">
                 <a:solidFill>
                   <a:srgbClr val="1A1A1A"/>
                 </a:solidFill>
                 <a:latin typeface="Calibri"/>
               </a:rPr>
-              <a:t>•  NSG: TCP 2222 + 35443</a:t>
+              <a:t>•  Fedora Lane index page via curl</a:t>
             </a:r>
           </a:p>
           <a:p>
             <a:pPr>
               <a:spcAft>
-                <a:spcPts val="800"/>
+                <a:spcPts val="700"/>
               </a:spcAft>
             </a:pPr>
             <a:r>
-              <a:rPr sz="1600" b="0">
+              <a:rPr sz="1500" b="0">
                 <a:solidFill>
                   <a:srgbClr val="1A1A1A"/>
                 </a:solidFill>
                 <a:latin typeface="Calibri"/>
               </a:rPr>
-              <a:t>•  SSH fladmin1 on port 2222</a:t>
+              <a:t>•  Same checklist after reboot</a:t>
             </a:r>
           </a:p>
           <a:p>
             <a:pPr>
               <a:spcAft>
-                <a:spcPts val="800"/>
+                <a:spcPts val="700"/>
               </a:spcAft>
             </a:pPr>
             <a:r>
-              <a:rPr sz="1600" b="0">
+              <a:rPr sz="1500" b="0">
                 <a:solidFill>
                   <a:srgbClr val="1A1A1A"/>
                 </a:solidFill>
                 <a:latin typeface="Calibri"/>
               </a:rPr>
-              <a:t>•  Same verify checklist</a:t>
+              <a:t>•  Proven on AWS and Azure</a:t>
             </a:r>
           </a:p>
           <a:p>
             <a:pPr>
               <a:spcAft>
-                <a:spcPts val="800"/>
+                <a:spcPts val="700"/>
               </a:spcAft>
             </a:pPr>
             <a:r>
-              <a:rPr sz="1600" b="0">
+              <a:rPr sz="1500" b="0">
                 <a:solidFill>
                   <a:srgbClr val="1A1A1A"/>
                 </a:solidFill>
                 <a:latin typeface="Calibri"/>
               </a:rPr>
-              <a:t>•  Docs in Git for step-by-step</a:t>
+              <a:t>•  Repeatable from README + runbooks</a:t>
             </a:r>
           </a:p>
         </p:txBody>
@@ -6885,50 +7562,16 @@
       </p:sp>
       <p:sp>
         <p:nvSpPr>
-          <p:cNvPr id="4" name="TextBox 3"/>
-          <p:cNvSpPr txBox="1"/>
-          <p:nvPr/>
-        </p:nvSpPr>
-        <p:spPr>
-          <a:xfrm>
-            <a:off x="548640" y="320040"/>
-            <a:ext cx="10972800" cy="640080"/>
-          </a:xfrm>
-          <a:prstGeom prst="rect">
-            <a:avLst/>
-          </a:prstGeom>
-          <a:noFill/>
-        </p:spPr>
-        <p:txBody>
-          <a:bodyPr wrap="none">
-            <a:spAutoFit/>
-          </a:bodyPr>
-          <a:lstStyle/>
-          <a:p>
-            <a:r>
-              <a:rPr sz="2800" b="1">
-                <a:solidFill>
-                  <a:srgbClr val="1A1A1A"/>
-                </a:solidFill>
-                <a:latin typeface="Calibri"/>
-              </a:rPr>
-              <a:t>Live evidence — what we demo</a:t>
-            </a:r>
-          </a:p>
-        </p:txBody>
-      </p:sp>
-      <p:sp>
-        <p:nvSpPr>
-          <p:cNvPr id="5" name="Rectangle 4"/>
+          <p:cNvPr id="4" name="Rounded Rectangle 3"/>
           <p:cNvSpPr/>
           <p:nvPr/>
         </p:nvSpPr>
         <p:spPr>
           <a:xfrm>
-            <a:off x="548640" y="960120"/>
-            <a:ext cx="2011680" cy="54864"/>
-          </a:xfrm>
-          <a:prstGeom prst="rect">
+            <a:off x="548640" y="228600"/>
+            <a:ext cx="2194560" cy="320040"/>
+          </a:xfrm>
+          <a:prstGeom prst="roundRect">
             <a:avLst/>
           </a:prstGeom>
           <a:solidFill>
@@ -6962,14 +7605,126 @@
       </p:sp>
       <p:sp>
         <p:nvSpPr>
+          <p:cNvPr id="5" name="TextBox 4"/>
+          <p:cNvSpPr txBox="1"/>
+          <p:nvPr/>
+        </p:nvSpPr>
+        <p:spPr>
+          <a:xfrm>
+            <a:off x="548640" y="256032"/>
+            <a:ext cx="2194560" cy="292608"/>
+          </a:xfrm>
+          <a:prstGeom prst="rect">
+            <a:avLst/>
+          </a:prstGeom>
+          <a:noFill/>
+        </p:spPr>
+        <p:txBody>
+          <a:bodyPr wrap="none">
+            <a:spAutoFit/>
+          </a:bodyPr>
+          <a:lstStyle/>
+          <a:p>
+            <a:pPr algn="l"/>
+            <a:r>
+              <a:rPr sz="1100" b="1">
+                <a:solidFill>
+                  <a:srgbClr val="FFFFFF"/>
+                </a:solidFill>
+                <a:latin typeface="Calibri"/>
+              </a:rPr>
+              <a:t>VALUE · 2–5 min</a:t>
+            </a:r>
+          </a:p>
+        </p:txBody>
+      </p:sp>
+      <p:sp>
+        <p:nvSpPr>
           <p:cNvPr id="6" name="TextBox 5"/>
           <p:cNvSpPr txBox="1"/>
           <p:nvPr/>
         </p:nvSpPr>
         <p:spPr>
           <a:xfrm>
-            <a:off x="548640" y="1280160"/>
-            <a:ext cx="10972800" cy="5029200"/>
+            <a:off x="548640" y="640080"/>
+            <a:ext cx="10972800" cy="548640"/>
+          </a:xfrm>
+          <a:prstGeom prst="rect">
+            <a:avLst/>
+          </a:prstGeom>
+          <a:noFill/>
+        </p:spPr>
+        <p:txBody>
+          <a:bodyPr wrap="none">
+            <a:spAutoFit/>
+          </a:bodyPr>
+          <a:lstStyle/>
+          <a:p>
+            <a:r>
+              <a:rPr sz="2600" b="1">
+                <a:solidFill>
+                  <a:srgbClr val="1A1A1A"/>
+                </a:solidFill>
+                <a:latin typeface="Calibri"/>
+              </a:rPr>
+              <a:t>How this addresses Fedora Lane’s challenges</a:t>
+            </a:r>
+          </a:p>
+        </p:txBody>
+      </p:sp>
+      <p:sp>
+        <p:nvSpPr>
+          <p:cNvPr id="7" name="Rectangle 6"/>
+          <p:cNvSpPr/>
+          <p:nvPr/>
+        </p:nvSpPr>
+        <p:spPr>
+          <a:xfrm>
+            <a:off x="548640" y="1234440"/>
+            <a:ext cx="1828800" cy="45720"/>
+          </a:xfrm>
+          <a:prstGeom prst="rect">
+            <a:avLst/>
+          </a:prstGeom>
+          <a:solidFill>
+            <a:srgbClr val="EE0000"/>
+          </a:solidFill>
+          <a:ln>
+            <a:noFill/>
+          </a:ln>
+        </p:spPr>
+        <p:style>
+          <a:lnRef idx="1">
+            <a:schemeClr val="accent1"/>
+          </a:lnRef>
+          <a:fillRef idx="3">
+            <a:schemeClr val="accent1"/>
+          </a:fillRef>
+          <a:effectRef idx="2">
+            <a:schemeClr val="accent1"/>
+          </a:effectRef>
+          <a:fontRef idx="minor">
+            <a:schemeClr val="lt1"/>
+          </a:fontRef>
+        </p:style>
+        <p:txBody>
+          <a:bodyPr rtlCol="0" anchor="ctr"/>
+          <a:lstStyle/>
+          <a:p>
+            <a:pPr algn="ctr"/>
+          </a:p>
+        </p:txBody>
+      </p:sp>
+      <p:sp>
+        <p:nvSpPr>
+          <p:cNvPr id="8" name="TextBox 7"/>
+          <p:cNvSpPr txBox="1"/>
+          <p:nvPr/>
+        </p:nvSpPr>
+        <p:spPr>
+          <a:xfrm>
+            <a:off x="548640" y="1463040"/>
+            <a:ext cx="10972800" cy="4572000"/>
           </a:xfrm>
           <a:prstGeom prst="rect">
             <a:avLst/>
@@ -6984,97 +7739,65 @@
           <a:p>
             <a:pPr>
               <a:spcAft>
-                <a:spcPts val="1000"/>
+                <a:spcPts val="900"/>
               </a:spcAft>
             </a:pPr>
             <a:r>
-              <a:rPr sz="2000" b="0">
+              <a:rPr sz="1800" b="0">
                 <a:solidFill>
                   <a:srgbClr val="1A1A1A"/>
                 </a:solidFill>
                 <a:latin typeface="Calibri"/>
               </a:rPr>
-              <a:t>•  SELinux Enforcing · separate mounts · /tmp noexec</a:t>
+              <a:t>•  Inconsistency → one Git blueprint → identical gold baselines on AWS and Azure</a:t>
             </a:r>
           </a:p>
           <a:p>
             <a:pPr>
               <a:spcAft>
-                <a:spcPts val="1000"/>
+                <a:spcPts val="900"/>
               </a:spcAft>
             </a:pPr>
             <a:r>
-              <a:rPr sz="2000" b="0">
+              <a:rPr sz="1800" b="0">
                 <a:solidFill>
                   <a:srgbClr val="1A1A1A"/>
                 </a:solidFill>
                 <a:latin typeface="Calibri"/>
               </a:rPr>
-              <a:t>•  Listeners on 2222 and 35443</a:t>
+              <a:t>•  Risky change → hardened SSH/sudo baked in; rebuild anytime from source of truth</a:t>
             </a:r>
           </a:p>
           <a:p>
             <a:pPr>
               <a:spcAft>
-                <a:spcPts val="1000"/>
+                <a:spcPts val="900"/>
               </a:spcAft>
             </a:pPr>
             <a:r>
-              <a:rPr sz="2000" b="0">
+              <a:rPr sz="1800" b="0">
                 <a:solidFill>
                   <a:srgbClr val="1A1A1A"/>
                 </a:solidFill>
                 <a:latin typeface="Calibri"/>
               </a:rPr>
-              <a:t>•  Fedora Lane index page from the httpd container</a:t>
+              <a:t>•  Container skills gap → httpd runs as a container on every gold web VM</a:t>
             </a:r>
           </a:p>
           <a:p>
             <a:pPr>
               <a:spcAft>
-                <a:spcPts val="1000"/>
+                <a:spcPts val="900"/>
               </a:spcAft>
             </a:pPr>
             <a:r>
-              <a:rPr sz="2000" b="0">
+              <a:rPr sz="1800" b="0">
                 <a:solidFill>
                   <a:srgbClr val="1A1A1A"/>
                 </a:solidFill>
                 <a:latin typeface="Calibri"/>
               </a:rPr>
-              <a:t>•  fladmins / fladmin1 present</a:t>
-            </a:r>
-          </a:p>
-          <a:p>
-            <a:pPr>
-              <a:spcAft>
-                <a:spcPts val="1000"/>
-              </a:spcAft>
-            </a:pPr>
-            <a:r>
-              <a:rPr sz="2000" b="0">
-                <a:solidFill>
-                  <a:srgbClr val="1A1A1A"/>
-                </a:solidFill>
-                <a:latin typeface="Calibri"/>
-              </a:rPr>
-              <a:t>•  Root SSH rejected · password SSH rejected</a:t>
-            </a:r>
-          </a:p>
-          <a:p>
-            <a:pPr>
-              <a:spcAft>
-                <a:spcPts val="1000"/>
-              </a:spcAft>
-            </a:pPr>
-            <a:r>
-              <a:rPr sz="2000" b="0">
-                <a:solidFill>
-                  <a:srgbClr val="1A1A1A"/>
-                </a:solidFill>
-                <a:latin typeface="Calibri"/>
-              </a:rPr>
-              <a:t>•  Survives reboot — same checklist on AWS and Azure</a:t>
+              <a:t>•  Dual-cloud reality → proven AMI path and VHD path with the same recipe</a:t>
             </a:r>
           </a:p>
         </p:txBody>

--- a/docs/Fedora-Lane-Expansion-Pack-Technical-Solution.pptx
+++ b/docs/Fedora-Lane-Expansion-Pack-Technical-Solution.pptx
@@ -18,6 +18,7 @@
     <p:sldId id="266" r:id="rId17"/>
     <p:sldId id="267" r:id="rId18"/>
     <p:sldId id="268" r:id="rId19"/>
+    <p:sldId id="269" r:id="rId20"/>
   </p:sldIdLst>
   <p:sldSz cx="12191695" cy="6858000" type="screen4x3"/>
   <p:notesSz cx="6858000" cy="9144000"/>
@@ -3435,7 +3436,7 @@
         <p:spPr>
           <a:xfrm>
             <a:off x="548640" y="228600"/>
-            <a:ext cx="2194560" cy="320040"/>
+            <a:ext cx="2377440" cy="320040"/>
           </a:xfrm>
           <a:prstGeom prst="roundRect">
             <a:avLst/>
@@ -3478,7 +3479,7 @@
         <p:spPr>
           <a:xfrm>
             <a:off x="548640" y="256032"/>
-            <a:ext cx="2194560" cy="292608"/>
+            <a:ext cx="2377440" cy="292608"/>
           </a:xfrm>
           <a:prstGeom prst="rect">
             <a:avLst/>
@@ -3491,7 +3492,7 @@
           </a:bodyPr>
           <a:lstStyle/>
           <a:p>
-            <a:pPr algn="l"/>
+            <a:pPr algn="ctr"/>
             <a:r>
               <a:rPr sz="1100" b="1">
                 <a:solidFill>
@@ -3499,7 +3500,7 @@
                 </a:solidFill>
                 <a:latin typeface="Calibri"/>
               </a:rPr>
-              <a:t>VALUE</a:t>
+              <a:t>VALUE · 2–5 min</a:t>
             </a:r>
           </a:p>
         </p:txBody>
@@ -3533,7 +3534,7 @@
                 </a:solidFill>
                 <a:latin typeface="Calibri"/>
               </a:rPr>
-              <a:t>What this leaves open for the future</a:t>
+              <a:t>How this addresses Fedora Lane’s challenges</a:t>
             </a:r>
           </a:p>
         </p:txBody>
@@ -3615,7 +3616,7 @@
                 </a:solidFill>
                 <a:latin typeface="Calibri"/>
               </a:rPr>
-              <a:t>•  Scale: Launch Templates / ASG (AWS) and Scale Sets / Shared Image Gallery (Azure)</a:t>
+              <a:t>•  Inconsistency → one Git blueprint → identical gold baselines on AWS and Azure</a:t>
             </a:r>
           </a:p>
           <a:p>
@@ -3631,7 +3632,7 @@
                 </a:solidFill>
                 <a:latin typeface="Calibri"/>
               </a:rPr>
-              <a:t>•  Day-2: change blueprint → recompose new gold version → roll replace waves</a:t>
+              <a:t>•  Risky change → hardened SSH/sudo baked in; rebuild anytime from source of truth</a:t>
             </a:r>
           </a:p>
           <a:p>
@@ -3647,7 +3648,7 @@
                 </a:solidFill>
                 <a:latin typeface="Calibri"/>
               </a:rPr>
-              <a:t>•  Security: add OpenSCAP / CIS profile to the same Image Builder factory</a:t>
+              <a:t>•  Container skills gap → httpd runs as a container on every gold web VM</a:t>
             </a:r>
           </a:p>
           <a:p>
@@ -3663,23 +3664,7 @@
                 </a:solidFill>
                 <a:latin typeface="Calibri"/>
               </a:rPr>
-              <a:t>•  Alternates already in repo: Kickstart and Image Mode if you prefer those factories</a:t>
-            </a:r>
-          </a:p>
-          <a:p>
-            <a:pPr>
-              <a:spcAft>
-                <a:spcPts val="900"/>
-              </a:spcAft>
-            </a:pPr>
-            <a:r>
-              <a:rPr sz="1800" b="0">
-                <a:solidFill>
-                  <a:srgbClr val="1A1A1A"/>
-                </a:solidFill>
-                <a:latin typeface="Calibri"/>
-              </a:rPr>
-              <a:t>•  Integration: feed gold images into existing CI/CD, IaC, and change-control processes</a:t>
+              <a:t>•  Dual-cloud reality → proven AMI path and VHD path with the same recipe</a:t>
             </a:r>
           </a:p>
         </p:txBody>
@@ -3797,7 +3782,7 @@
         <p:spPr>
           <a:xfrm>
             <a:off x="548640" y="228600"/>
-            <a:ext cx="2194560" cy="320040"/>
+            <a:ext cx="2377440" cy="320040"/>
           </a:xfrm>
           <a:prstGeom prst="roundRect">
             <a:avLst/>
@@ -3840,7 +3825,7 @@
         <p:spPr>
           <a:xfrm>
             <a:off x="548640" y="256032"/>
-            <a:ext cx="2194560" cy="292608"/>
+            <a:ext cx="2377440" cy="292608"/>
           </a:xfrm>
           <a:prstGeom prst="rect">
             <a:avLst/>
@@ -3853,7 +3838,7 @@
           </a:bodyPr>
           <a:lstStyle/>
           <a:p>
-            <a:pPr algn="l"/>
+            <a:pPr algn="ctr"/>
             <a:r>
               <a:rPr sz="1100" b="1">
                 <a:solidFill>
@@ -3861,7 +3846,7 @@
                 </a:solidFill>
                 <a:latin typeface="Calibri"/>
               </a:rPr>
-              <a:t>CLOSING · 1–2 min</a:t>
+              <a:t>VALUE</a:t>
             </a:r>
           </a:p>
         </p:txBody>
@@ -3895,7 +3880,7 @@
                 </a:solidFill>
                 <a:latin typeface="Calibri"/>
               </a:rPr>
-              <a:t>Core message</a:t>
+              <a:t>What this leaves open for the future</a:t>
             </a:r>
           </a:p>
         </p:txBody>
@@ -3977,7 +3962,7 @@
                 </a:solidFill>
                 <a:latin typeface="Calibri"/>
               </a:rPr>
-              <a:t>•  Fedora Lane can standardize the e-commerce web OS with a repeatable RHEL gold image</a:t>
+              <a:t>•  Scale: Launch Templates / ASG (AWS) and Scale Sets / Shared Image Gallery (Azure)</a:t>
             </a:r>
           </a:p>
           <a:p>
@@ -3993,7 +3978,7 @@
                 </a:solidFill>
                 <a:latin typeface="Calibri"/>
               </a:rPr>
-              <a:t>•  Built with Red Hat Image Builder, versioned in Git, proven on AWS and Azure</a:t>
+              <a:t>•  Day-2: change blueprint → recompose new gold version → roll replace waves</a:t>
             </a:r>
           </a:p>
           <a:p>
@@ -4009,7 +3994,39 @@
                 </a:solidFill>
                 <a:latin typeface="Calibri"/>
               </a:rPr>
-              <a:t>•  Technical value today: Expansion Pack controls + containerized httpd + dual-cloud deploy</a:t>
+              <a:t>•  Security: add OpenSCAP / CIS profile to the same Image Builder factory</a:t>
+            </a:r>
+          </a:p>
+          <a:p>
+            <a:pPr>
+              <a:spcAft>
+                <a:spcPts val="900"/>
+              </a:spcAft>
+            </a:pPr>
+            <a:r>
+              <a:rPr sz="1800" b="0">
+                <a:solidFill>
+                  <a:srgbClr val="1A1A1A"/>
+                </a:solidFill>
+                <a:latin typeface="Calibri"/>
+              </a:rPr>
+              <a:t>•  App hosting: deploy onto httpd volume without rebuilding the AMI</a:t>
+            </a:r>
+          </a:p>
+          <a:p>
+            <a:pPr>
+              <a:spcAft>
+                <a:spcPts val="900"/>
+              </a:spcAft>
+            </a:pPr>
+            <a:r>
+              <a:rPr sz="1800" b="0">
+                <a:solidFill>
+                  <a:srgbClr val="1A1A1A"/>
+                </a:solidFill>
+                <a:latin typeface="Calibri"/>
+              </a:rPr>
+              <a:t>•  Integration: feed gold images into existing CI/CD and change-control</a:t>
             </a:r>
           </a:p>
         </p:txBody>
@@ -4127,7 +4144,7 @@
         <p:spPr>
           <a:xfrm>
             <a:off x="548640" y="228600"/>
-            <a:ext cx="2194560" cy="320040"/>
+            <a:ext cx="2377440" cy="320040"/>
           </a:xfrm>
           <a:prstGeom prst="roundRect">
             <a:avLst/>
@@ -4170,7 +4187,7 @@
         <p:spPr>
           <a:xfrm>
             <a:off x="548640" y="256032"/>
-            <a:ext cx="2194560" cy="292608"/>
+            <a:ext cx="2377440" cy="292608"/>
           </a:xfrm>
           <a:prstGeom prst="rect">
             <a:avLst/>
@@ -4183,7 +4200,7 @@
           </a:bodyPr>
           <a:lstStyle/>
           <a:p>
-            <a:pPr algn="l"/>
+            <a:pPr algn="ctr"/>
             <a:r>
               <a:rPr sz="1100" b="1">
                 <a:solidFill>
@@ -4191,7 +4208,7 @@
                 </a:solidFill>
                 <a:latin typeface="Calibri"/>
               </a:rPr>
-              <a:t>CLOSING</a:t>
+              <a:t>CLOSING · 1–2 min</a:t>
             </a:r>
           </a:p>
         </p:txBody>
@@ -4225,7 +4242,7 @@
                 </a:solidFill>
                 <a:latin typeface="Calibri"/>
               </a:rPr>
-              <a:t>One concrete next step</a:t>
+              <a:t>Core message</a:t>
             </a:r>
           </a:p>
         </p:txBody>
@@ -4307,7 +4324,7 @@
                 </a:solidFill>
                 <a:latin typeface="Calibri"/>
               </a:rPr>
-              <a:t>•  Approve a non-prod pilot: launch web nodes from the gold AMI / Azure image</a:t>
+              <a:t>•  Fedora Lane can standardize the e-commerce web OS with a repeatable RHEL gold image</a:t>
             </a:r>
           </a:p>
           <a:p>
@@ -4323,7 +4340,7 @@
                 </a:solidFill>
                 <a:latin typeface="Calibri"/>
               </a:rPr>
-              <a:t>•  Use Launch Template / scale set for new capacity; keep Git as change control</a:t>
+              <a:t>•  Built with Red Hat Image Builder, versioned in Git, proven on AWS and Azure</a:t>
             </a:r>
           </a:p>
           <a:p>
@@ -4339,41 +4356,7 @@
                 </a:solidFill>
                 <a:latin typeface="Calibri"/>
               </a:rPr>
-              <a:t>•  After pilot: wave-replace selected prod pools</a:t>
-            </a:r>
-          </a:p>
-        </p:txBody>
-      </p:sp>
-      <p:sp>
-        <p:nvSpPr>
-          <p:cNvPr id="9" name="TextBox 8"/>
-          <p:cNvSpPr txBox="1"/>
-          <p:nvPr/>
-        </p:nvSpPr>
-        <p:spPr>
-          <a:xfrm>
-            <a:off x="548640" y="6263640"/>
-            <a:ext cx="10972800" cy="365760"/>
-          </a:xfrm>
-          <a:prstGeom prst="rect">
-            <a:avLst/>
-          </a:prstGeom>
-          <a:noFill/>
-        </p:spPr>
-        <p:txBody>
-          <a:bodyPr wrap="none">
-            <a:spAutoFit/>
-          </a:bodyPr>
-          <a:lstStyle/>
-          <a:p>
-            <a:r>
-              <a:rPr sz="1300" b="0">
-                <a:solidFill>
-                  <a:srgbClr val="666666"/>
-                </a:solidFill>
-                <a:latin typeface="Calibri"/>
-              </a:rPr>
-              <a:t>Ask: green-light non-prod pilot as the web OS standard</a:t>
+              <a:t>•  Technical value today: Expansion Pack controls + containerized httpd + dual-cloud deploy</a:t>
             </a:r>
           </a:p>
         </p:txBody>
@@ -4411,7 +4394,7 @@
             <a:avLst/>
           </a:prstGeom>
           <a:solidFill>
-            <a:srgbClr val="1A1A1A"/>
+            <a:srgbClr val="F5F5F5"/>
           </a:solidFill>
           <a:ln>
             <a:noFill/>
@@ -4448,7 +4431,7 @@
         <p:spPr>
           <a:xfrm>
             <a:off x="0" y="0"/>
-            <a:ext cx="12191695" cy="137160"/>
+            <a:ext cx="109728" cy="6858000"/>
           </a:xfrm>
           <a:prstGeom prst="rect">
             <a:avLst/>
@@ -4484,14 +4467,57 @@
       </p:sp>
       <p:sp>
         <p:nvSpPr>
-          <p:cNvPr id="4" name="TextBox 3"/>
+          <p:cNvPr id="4" name="Rounded Rectangle 3"/>
+          <p:cNvSpPr/>
+          <p:nvPr/>
+        </p:nvSpPr>
+        <p:spPr>
+          <a:xfrm>
+            <a:off x="548640" y="228600"/>
+            <a:ext cx="2377440" cy="320040"/>
+          </a:xfrm>
+          <a:prstGeom prst="roundRect">
+            <a:avLst/>
+          </a:prstGeom>
+          <a:solidFill>
+            <a:srgbClr val="EE0000"/>
+          </a:solidFill>
+          <a:ln>
+            <a:noFill/>
+          </a:ln>
+        </p:spPr>
+        <p:style>
+          <a:lnRef idx="1">
+            <a:schemeClr val="accent1"/>
+          </a:lnRef>
+          <a:fillRef idx="3">
+            <a:schemeClr val="accent1"/>
+          </a:fillRef>
+          <a:effectRef idx="2">
+            <a:schemeClr val="accent1"/>
+          </a:effectRef>
+          <a:fontRef idx="minor">
+            <a:schemeClr val="lt1"/>
+          </a:fontRef>
+        </p:style>
+        <p:txBody>
+          <a:bodyPr rtlCol="0" anchor="ctr"/>
+          <a:lstStyle/>
+          <a:p>
+            <a:pPr algn="ctr"/>
+          </a:p>
+        </p:txBody>
+      </p:sp>
+      <p:sp>
+        <p:nvSpPr>
+          <p:cNvPr id="5" name="TextBox 4"/>
           <p:cNvSpPr txBox="1"/>
           <p:nvPr/>
         </p:nvSpPr>
         <p:spPr>
           <a:xfrm>
-            <a:off x="731520" y="1920240"/>
-            <a:ext cx="10515600" cy="1097280"/>
+            <a:off x="548640" y="256032"/>
+            <a:ext cx="2377440" cy="292608"/>
           </a:xfrm>
           <a:prstGeom prst="rect">
             <a:avLst/>
@@ -4504,28 +4530,29 @@
           </a:bodyPr>
           <a:lstStyle/>
           <a:p>
-            <a:r>
-              <a:rPr sz="3600" b="1">
+            <a:pPr algn="ctr"/>
+            <a:r>
+              <a:rPr sz="1100" b="1">
                 <a:solidFill>
                   <a:srgbClr val="FFFFFF"/>
                 </a:solidFill>
                 <a:latin typeface="Calibri"/>
               </a:rPr>
-              <a:t>Thank you — questions welcome</a:t>
-            </a:r>
-          </a:p>
-        </p:txBody>
-      </p:sp>
-      <p:sp>
-        <p:nvSpPr>
-          <p:cNvPr id="5" name="TextBox 4"/>
+              <a:t>CLOSING</a:t>
+            </a:r>
+          </a:p>
+        </p:txBody>
+      </p:sp>
+      <p:sp>
+        <p:nvSpPr>
+          <p:cNvPr id="6" name="TextBox 5"/>
           <p:cNvSpPr txBox="1"/>
           <p:nvPr/>
         </p:nvSpPr>
         <p:spPr>
           <a:xfrm>
-            <a:off x="731520" y="3200400"/>
-            <a:ext cx="10515600" cy="411480"/>
+            <a:off x="548640" y="640080"/>
+            <a:ext cx="10972800" cy="548640"/>
           </a:xfrm>
           <a:prstGeom prst="rect">
             <a:avLst/>
@@ -4539,27 +4566,141 @@
           <a:lstStyle/>
           <a:p>
             <a:r>
+              <a:rPr sz="2600" b="1">
+                <a:solidFill>
+                  <a:srgbClr val="1A1A1A"/>
+                </a:solidFill>
+                <a:latin typeface="Calibri"/>
+              </a:rPr>
+              <a:t>One concrete next step</a:t>
+            </a:r>
+          </a:p>
+        </p:txBody>
+      </p:sp>
+      <p:sp>
+        <p:nvSpPr>
+          <p:cNvPr id="7" name="Rectangle 6"/>
+          <p:cNvSpPr/>
+          <p:nvPr/>
+        </p:nvSpPr>
+        <p:spPr>
+          <a:xfrm>
+            <a:off x="548640" y="1234440"/>
+            <a:ext cx="1828800" cy="45720"/>
+          </a:xfrm>
+          <a:prstGeom prst="rect">
+            <a:avLst/>
+          </a:prstGeom>
+          <a:solidFill>
+            <a:srgbClr val="EE0000"/>
+          </a:solidFill>
+          <a:ln>
+            <a:noFill/>
+          </a:ln>
+        </p:spPr>
+        <p:style>
+          <a:lnRef idx="1">
+            <a:schemeClr val="accent1"/>
+          </a:lnRef>
+          <a:fillRef idx="3">
+            <a:schemeClr val="accent1"/>
+          </a:fillRef>
+          <a:effectRef idx="2">
+            <a:schemeClr val="accent1"/>
+          </a:effectRef>
+          <a:fontRef idx="minor">
+            <a:schemeClr val="lt1"/>
+          </a:fontRef>
+        </p:style>
+        <p:txBody>
+          <a:bodyPr rtlCol="0" anchor="ctr"/>
+          <a:lstStyle/>
+          <a:p>
+            <a:pPr algn="ctr"/>
+          </a:p>
+        </p:txBody>
+      </p:sp>
+      <p:sp>
+        <p:nvSpPr>
+          <p:cNvPr id="8" name="TextBox 7"/>
+          <p:cNvSpPr txBox="1"/>
+          <p:nvPr/>
+        </p:nvSpPr>
+        <p:spPr>
+          <a:xfrm>
+            <a:off x="548640" y="1463040"/>
+            <a:ext cx="10972800" cy="4572000"/>
+          </a:xfrm>
+          <a:prstGeom prst="rect">
+            <a:avLst/>
+          </a:prstGeom>
+          <a:noFill/>
+        </p:spPr>
+        <p:txBody>
+          <a:bodyPr wrap="square">
+            <a:spAutoFit/>
+          </a:bodyPr>
+          <a:lstStyle/>
+          <a:p>
+            <a:pPr>
+              <a:spcAft>
+                <a:spcPts val="900"/>
+              </a:spcAft>
+            </a:pPr>
+            <a:r>
               <a:rPr sz="1800" b="0">
                 <a:solidFill>
-                  <a:srgbClr val="CCCCCC"/>
-                </a:solidFill>
-                <a:latin typeface="Calibri"/>
-              </a:rPr>
-              <a:t>Git source of truth: github.com/ydandge-oss/fedora-lane-core-pack-faster</a:t>
-            </a:r>
-          </a:p>
-        </p:txBody>
-      </p:sp>
-      <p:sp>
-        <p:nvSpPr>
-          <p:cNvPr id="6" name="TextBox 5"/>
+                  <a:srgbClr val="1A1A1A"/>
+                </a:solidFill>
+                <a:latin typeface="Calibri"/>
+              </a:rPr>
+              <a:t>•  Approve a non-prod pilot: launch web nodes from the gold AMI / Azure image</a:t>
+            </a:r>
+          </a:p>
+          <a:p>
+            <a:pPr>
+              <a:spcAft>
+                <a:spcPts val="900"/>
+              </a:spcAft>
+            </a:pPr>
+            <a:r>
+              <a:rPr sz="1800" b="0">
+                <a:solidFill>
+                  <a:srgbClr val="1A1A1A"/>
+                </a:solidFill>
+                <a:latin typeface="Calibri"/>
+              </a:rPr>
+              <a:t>•  Use Launch Template / scale set for new capacity; keep Git as change control</a:t>
+            </a:r>
+          </a:p>
+          <a:p>
+            <a:pPr>
+              <a:spcAft>
+                <a:spcPts val="900"/>
+              </a:spcAft>
+            </a:pPr>
+            <a:r>
+              <a:rPr sz="1800" b="0">
+                <a:solidFill>
+                  <a:srgbClr val="1A1A1A"/>
+                </a:solidFill>
+                <a:latin typeface="Calibri"/>
+              </a:rPr>
+              <a:t>•  After pilot: wave-replace selected prod pools</a:t>
+            </a:r>
+          </a:p>
+        </p:txBody>
+      </p:sp>
+      <p:sp>
+        <p:nvSpPr>
+          <p:cNvPr id="9" name="TextBox 8"/>
           <p:cNvSpPr txBox="1"/>
           <p:nvPr/>
         </p:nvSpPr>
         <p:spPr>
           <a:xfrm>
-            <a:off x="731520" y="3611880"/>
-            <a:ext cx="10515600" cy="411480"/>
+            <a:off x="548640" y="6263640"/>
+            <a:ext cx="10972800" cy="365760"/>
           </a:xfrm>
           <a:prstGeom prst="rect">
             <a:avLst/>
@@ -4573,27 +4714,131 @@
           <a:lstStyle/>
           <a:p>
             <a:r>
-              <a:rPr sz="1800" b="0">
-                <a:solidFill>
-                  <a:srgbClr val="CCCCCC"/>
-                </a:solidFill>
-                <a:latin typeface="Calibri"/>
-              </a:rPr>
-              <a:t>Branch: expansion-tdp-solution  ·  README + runbooks + verify checklist</a:t>
-            </a:r>
-          </a:p>
-        </p:txBody>
-      </p:sp>
-      <p:sp>
-        <p:nvSpPr>
-          <p:cNvPr id="7" name="TextBox 6"/>
+              <a:rPr sz="1300" b="0">
+                <a:solidFill>
+                  <a:srgbClr val="666666"/>
+                </a:solidFill>
+                <a:latin typeface="Calibri"/>
+              </a:rPr>
+              <a:t>Ask: green-light non-prod pilot as the web OS standard</a:t>
+            </a:r>
+          </a:p>
+        </p:txBody>
+      </p:sp>
+    </p:spTree>
+  </p:cSld>
+  <p:clrMapOvr>
+    <a:masterClrMapping/>
+  </p:clrMapOvr>
+</p:sld>
+</file>
+
+<file path=ppt/slides/slide14.xml><?xml version="1.0" encoding="utf-8"?>
+<p:sld xmlns:a="http://schemas.openxmlformats.org/drawingml/2006/main" xmlns:p="http://schemas.openxmlformats.org/presentationml/2006/main" xmlns:r="http://schemas.openxmlformats.org/officeDocument/2006/relationships">
+  <p:cSld>
+    <p:spTree>
+      <p:nvGrpSpPr>
+        <p:cNvPr id="1" name=""/>
+        <p:cNvGrpSpPr/>
+        <p:nvPr/>
+      </p:nvGrpSpPr>
+      <p:grpSpPr/>
+      <p:sp>
+        <p:nvSpPr>
+          <p:cNvPr id="2" name="Rectangle 1"/>
+          <p:cNvSpPr/>
+          <p:nvPr/>
+        </p:nvSpPr>
+        <p:spPr>
+          <a:xfrm>
+            <a:off x="0" y="0"/>
+            <a:ext cx="12191695" cy="6858000"/>
+          </a:xfrm>
+          <a:prstGeom prst="rect">
+            <a:avLst/>
+          </a:prstGeom>
+          <a:solidFill>
+            <a:srgbClr val="1A1A1A"/>
+          </a:solidFill>
+          <a:ln>
+            <a:noFill/>
+          </a:ln>
+        </p:spPr>
+        <p:style>
+          <a:lnRef idx="1">
+            <a:schemeClr val="accent1"/>
+          </a:lnRef>
+          <a:fillRef idx="3">
+            <a:schemeClr val="accent1"/>
+          </a:fillRef>
+          <a:effectRef idx="2">
+            <a:schemeClr val="accent1"/>
+          </a:effectRef>
+          <a:fontRef idx="minor">
+            <a:schemeClr val="lt1"/>
+          </a:fontRef>
+        </p:style>
+        <p:txBody>
+          <a:bodyPr rtlCol="0" anchor="ctr"/>
+          <a:lstStyle/>
+          <a:p>
+            <a:pPr algn="ctr"/>
+          </a:p>
+        </p:txBody>
+      </p:sp>
+      <p:sp>
+        <p:nvSpPr>
+          <p:cNvPr id="3" name="Rectangle 2"/>
+          <p:cNvSpPr/>
+          <p:nvPr/>
+        </p:nvSpPr>
+        <p:spPr>
+          <a:xfrm>
+            <a:off x="0" y="0"/>
+            <a:ext cx="12191695" cy="137160"/>
+          </a:xfrm>
+          <a:prstGeom prst="rect">
+            <a:avLst/>
+          </a:prstGeom>
+          <a:solidFill>
+            <a:srgbClr val="EE0000"/>
+          </a:solidFill>
+          <a:ln>
+            <a:noFill/>
+          </a:ln>
+        </p:spPr>
+        <p:style>
+          <a:lnRef idx="1">
+            <a:schemeClr val="accent1"/>
+          </a:lnRef>
+          <a:fillRef idx="3">
+            <a:schemeClr val="accent1"/>
+          </a:fillRef>
+          <a:effectRef idx="2">
+            <a:schemeClr val="accent1"/>
+          </a:effectRef>
+          <a:fontRef idx="minor">
+            <a:schemeClr val="lt1"/>
+          </a:fontRef>
+        </p:style>
+        <p:txBody>
+          <a:bodyPr rtlCol="0" anchor="ctr"/>
+          <a:lstStyle/>
+          <a:p>
+            <a:pPr algn="ctr"/>
+          </a:p>
+        </p:txBody>
+      </p:sp>
+      <p:sp>
+        <p:nvSpPr>
+          <p:cNvPr id="4" name="TextBox 3"/>
           <p:cNvSpPr txBox="1"/>
           <p:nvPr/>
         </p:nvSpPr>
         <p:spPr>
           <a:xfrm>
-            <a:off x="731520" y="4023360"/>
-            <a:ext cx="10515600" cy="411480"/>
+            <a:off x="731520" y="1920240"/>
+            <a:ext cx="10515600" cy="1097280"/>
           </a:xfrm>
           <a:prstGeom prst="rect">
             <a:avLst/>
@@ -4607,13 +4852,115 @@
           <a:lstStyle/>
           <a:p>
             <a:r>
+              <a:rPr sz="3600" b="1">
+                <a:solidFill>
+                  <a:srgbClr val="FFFFFF"/>
+                </a:solidFill>
+                <a:latin typeface="Calibri"/>
+              </a:rPr>
+              <a:t>Thank you — questions welcome</a:t>
+            </a:r>
+          </a:p>
+        </p:txBody>
+      </p:sp>
+      <p:sp>
+        <p:nvSpPr>
+          <p:cNvPr id="5" name="TextBox 4"/>
+          <p:cNvSpPr txBox="1"/>
+          <p:nvPr/>
+        </p:nvSpPr>
+        <p:spPr>
+          <a:xfrm>
+            <a:off x="731520" y="3200400"/>
+            <a:ext cx="10515600" cy="411480"/>
+          </a:xfrm>
+          <a:prstGeom prst="rect">
+            <a:avLst/>
+          </a:prstGeom>
+          <a:noFill/>
+        </p:spPr>
+        <p:txBody>
+          <a:bodyPr wrap="none">
+            <a:spAutoFit/>
+          </a:bodyPr>
+          <a:lstStyle/>
+          <a:p>
+            <a:r>
               <a:rPr sz="1800" b="0">
                 <a:solidFill>
                   <a:srgbClr val="CCCCCC"/>
                 </a:solidFill>
                 <a:latin typeface="Calibri"/>
               </a:rPr>
-              <a:t>Spoken script: docs/presentation-script-part1-video.md</a:t>
+              <a:t>Git: github.com/ydandge-oss/fedora-lane-core-pack-faster  ·  branch expansion-tdp-solution</a:t>
+            </a:r>
+          </a:p>
+        </p:txBody>
+      </p:sp>
+      <p:sp>
+        <p:nvSpPr>
+          <p:cNvPr id="6" name="TextBox 5"/>
+          <p:cNvSpPr txBox="1"/>
+          <p:nvPr/>
+        </p:nvSpPr>
+        <p:spPr>
+          <a:xfrm>
+            <a:off x="731520" y="3611880"/>
+            <a:ext cx="10515600" cy="411480"/>
+          </a:xfrm>
+          <a:prstGeom prst="rect">
+            <a:avLst/>
+          </a:prstGeom>
+          <a:noFill/>
+        </p:spPr>
+        <p:txBody>
+          <a:bodyPr wrap="none">
+            <a:spAutoFit/>
+          </a:bodyPr>
+          <a:lstStyle/>
+          <a:p>
+            <a:r>
+              <a:rPr sz="1800" b="0">
+                <a:solidFill>
+                  <a:srgbClr val="CCCCCC"/>
+                </a:solidFill>
+                <a:latin typeface="Calibri"/>
+              </a:rPr>
+              <a:t>How to build and run: docs/how-to-build-and-run.md</a:t>
+            </a:r>
+          </a:p>
+        </p:txBody>
+      </p:sp>
+      <p:sp>
+        <p:nvSpPr>
+          <p:cNvPr id="7" name="TextBox 6"/>
+          <p:cNvSpPr txBox="1"/>
+          <p:nvPr/>
+        </p:nvSpPr>
+        <p:spPr>
+          <a:xfrm>
+            <a:off x="731520" y="4023360"/>
+            <a:ext cx="10515600" cy="411480"/>
+          </a:xfrm>
+          <a:prstGeom prst="rect">
+            <a:avLst/>
+          </a:prstGeom>
+          <a:noFill/>
+        </p:spPr>
+        <p:txBody>
+          <a:bodyPr wrap="none">
+            <a:spAutoFit/>
+          </a:bodyPr>
+          <a:lstStyle/>
+          <a:p>
+            <a:r>
+              <a:rPr sz="1800" b="0">
+                <a:solidFill>
+                  <a:srgbClr val="CCCCCC"/>
+                </a:solidFill>
+                <a:latin typeface="Calibri"/>
+              </a:rPr>
+              <a:t>AWS create AMI steps: docs/aws-gold-ami-poc-runbook.md</a:t>
             </a:r>
           </a:p>
         </p:txBody>
@@ -4731,7 +5078,7 @@
         <p:spPr>
           <a:xfrm>
             <a:off x="548640" y="228600"/>
-            <a:ext cx="2194560" cy="320040"/>
+            <a:ext cx="2377440" cy="320040"/>
           </a:xfrm>
           <a:prstGeom prst="roundRect">
             <a:avLst/>
@@ -4774,7 +5121,7 @@
         <p:spPr>
           <a:xfrm>
             <a:off x="548640" y="256032"/>
-            <a:ext cx="2194560" cy="292608"/>
+            <a:ext cx="2377440" cy="292608"/>
           </a:xfrm>
           <a:prstGeom prst="rect">
             <a:avLst/>
@@ -4787,7 +5134,7 @@
           </a:bodyPr>
           <a:lstStyle/>
           <a:p>
-            <a:pPr algn="l"/>
+            <a:pPr algn="ctr"/>
             <a:r>
               <a:rPr sz="1100" b="1">
                 <a:solidFill>
@@ -5077,7 +5424,7 @@
         <p:spPr>
           <a:xfrm>
             <a:off x="548640" y="228600"/>
-            <a:ext cx="2194560" cy="320040"/>
+            <a:ext cx="2377440" cy="320040"/>
           </a:xfrm>
           <a:prstGeom prst="roundRect">
             <a:avLst/>
@@ -5120,7 +5467,7 @@
         <p:spPr>
           <a:xfrm>
             <a:off x="548640" y="256032"/>
-            <a:ext cx="2194560" cy="292608"/>
+            <a:ext cx="2377440" cy="292608"/>
           </a:xfrm>
           <a:prstGeom prst="rect">
             <a:avLst/>
@@ -5133,7 +5480,7 @@
           </a:bodyPr>
           <a:lstStyle/>
           <a:p>
-            <a:pPr algn="l"/>
+            <a:pPr algn="ctr"/>
             <a:r>
               <a:rPr sz="1100" b="1">
                 <a:solidFill>
@@ -5273,7 +5620,7 @@
                 </a:solidFill>
                 <a:latin typeface="Calibri"/>
               </a:rPr>
-              <a:t>•  Risky / untraceable change — drift and ad-hoc updates drive long outages</a:t>
+              <a:t>•  Risky / untraceable change — drift and ad-hoc updates create long outages</a:t>
             </a:r>
           </a:p>
           <a:p>
@@ -5289,7 +5636,7 @@
                 </a:solidFill>
                 <a:latin typeface="Calibri"/>
               </a:rPr>
-              <a:t>•  Container skills gap — ops need a clear, repeatable container path on RHEL</a:t>
+              <a:t>•  Container skills gap — need a clear, repeatable container path on RHEL</a:t>
             </a:r>
           </a:p>
           <a:p>
@@ -5457,7 +5804,7 @@
         <p:spPr>
           <a:xfrm>
             <a:off x="548640" y="228600"/>
-            <a:ext cx="2194560" cy="320040"/>
+            <a:ext cx="2377440" cy="320040"/>
           </a:xfrm>
           <a:prstGeom prst="roundRect">
             <a:avLst/>
@@ -5500,7 +5847,7 @@
         <p:spPr>
           <a:xfrm>
             <a:off x="548640" y="256032"/>
-            <a:ext cx="2194560" cy="292608"/>
+            <a:ext cx="2377440" cy="292608"/>
           </a:xfrm>
           <a:prstGeom prst="rect">
             <a:avLst/>
@@ -5513,7 +5860,7 @@
           </a:bodyPr>
           <a:lstStyle/>
           <a:p>
-            <a:pPr algn="l"/>
+            <a:pPr algn="ctr"/>
             <a:r>
               <a:rPr sz="1100" b="1">
                 <a:solidFill>
@@ -5653,7 +6000,7 @@
                 </a:solidFill>
                 <a:latin typeface="Calibri"/>
               </a:rPr>
-              <a:t>•  Live walkthrough — end-user path: gold image → VM → prove controls (5–10 min)</a:t>
+              <a:t>•  Live walkthrough — architecture → build steps → gold VM prove (5–10 min)</a:t>
             </a:r>
           </a:p>
           <a:p>
@@ -5837,7 +6184,7 @@
         <p:spPr>
           <a:xfrm>
             <a:off x="548640" y="228600"/>
-            <a:ext cx="2194560" cy="320040"/>
+            <a:ext cx="2377440" cy="320040"/>
           </a:xfrm>
           <a:prstGeom prst="roundRect">
             <a:avLst/>
@@ -5880,7 +6227,7 @@
         <p:spPr>
           <a:xfrm>
             <a:off x="548640" y="256032"/>
-            <a:ext cx="2194560" cy="292608"/>
+            <a:ext cx="2377440" cy="292608"/>
           </a:xfrm>
           <a:prstGeom prst="rect">
             <a:avLst/>
@@ -5893,7 +6240,7 @@
           </a:bodyPr>
           <a:lstStyle/>
           <a:p>
-            <a:pPr algn="l"/>
+            <a:pPr algn="ctr"/>
             <a:r>
               <a:rPr sz="1100" b="1">
                 <a:solidFill>
@@ -6199,7 +6546,7 @@
         <p:spPr>
           <a:xfrm>
             <a:off x="548640" y="228600"/>
-            <a:ext cx="2194560" cy="320040"/>
+            <a:ext cx="2377440" cy="320040"/>
           </a:xfrm>
           <a:prstGeom prst="roundRect">
             <a:avLst/>
@@ -6242,7 +6589,7 @@
         <p:spPr>
           <a:xfrm>
             <a:off x="548640" y="256032"/>
-            <a:ext cx="2194560" cy="292608"/>
+            <a:ext cx="2377440" cy="292608"/>
           </a:xfrm>
           <a:prstGeom prst="rect">
             <a:avLst/>
@@ -6255,7 +6602,7 @@
           </a:bodyPr>
           <a:lstStyle/>
           <a:p>
-            <a:pPr algn="l"/>
+            <a:pPr algn="ctr"/>
             <a:r>
               <a:rPr sz="1100" b="1">
                 <a:solidFill>
@@ -6277,7 +6624,7 @@
         <p:spPr>
           <a:xfrm>
             <a:off x="548640" y="640080"/>
-            <a:ext cx="10972800" cy="548640"/>
+            <a:ext cx="10972800" cy="457200"/>
           </a:xfrm>
           <a:prstGeom prst="rect">
             <a:avLst/>
@@ -6291,29 +6638,143 @@
           <a:lstStyle/>
           <a:p>
             <a:r>
-              <a:rPr sz="2600" b="1">
+              <a:rPr sz="2800" b="1">
                 <a:solidFill>
                   <a:srgbClr val="1A1A1A"/>
                 </a:solidFill>
                 <a:latin typeface="Calibri"/>
               </a:rPr>
-              <a:t>Critical decisions — and why</a:t>
-            </a:r>
-          </a:p>
-        </p:txBody>
-      </p:sp>
-      <p:sp>
-        <p:nvSpPr>
-          <p:cNvPr id="7" name="Rectangle 6"/>
+              <a:t>Solution architecture</a:t>
+            </a:r>
+          </a:p>
+        </p:txBody>
+      </p:sp>
+      <p:sp>
+        <p:nvSpPr>
+          <p:cNvPr id="7" name="Rounded Rectangle 6"/>
           <p:cNvSpPr/>
           <p:nvPr/>
         </p:nvSpPr>
         <p:spPr>
           <a:xfrm>
-            <a:off x="548640" y="1234440"/>
-            <a:ext cx="1828800" cy="45720"/>
-          </a:xfrm>
-          <a:prstGeom prst="rect">
+            <a:off x="502920" y="1417320"/>
+            <a:ext cx="1737360" cy="1234440"/>
+          </a:xfrm>
+          <a:prstGeom prst="roundRect">
+            <a:avLst/>
+          </a:prstGeom>
+          <a:solidFill>
+            <a:srgbClr val="2A2A2A"/>
+          </a:solidFill>
+          <a:ln>
+            <a:noFill/>
+          </a:ln>
+        </p:spPr>
+        <p:style>
+          <a:lnRef idx="1">
+            <a:schemeClr val="accent1"/>
+          </a:lnRef>
+          <a:fillRef idx="3">
+            <a:schemeClr val="accent1"/>
+          </a:fillRef>
+          <a:effectRef idx="2">
+            <a:schemeClr val="accent1"/>
+          </a:effectRef>
+          <a:fontRef idx="minor">
+            <a:schemeClr val="lt1"/>
+          </a:fontRef>
+        </p:style>
+        <p:txBody>
+          <a:bodyPr rtlCol="0" anchor="ctr"/>
+          <a:lstStyle/>
+          <a:p>
+            <a:pPr algn="ctr"/>
+          </a:p>
+        </p:txBody>
+      </p:sp>
+      <p:sp>
+        <p:nvSpPr>
+          <p:cNvPr id="8" name="TextBox 7"/>
+          <p:cNvSpPr txBox="1"/>
+          <p:nvPr/>
+        </p:nvSpPr>
+        <p:spPr>
+          <a:xfrm>
+            <a:off x="576072" y="1645920"/>
+            <a:ext cx="1591056" cy="868680"/>
+          </a:xfrm>
+          <a:prstGeom prst="rect">
+            <a:avLst/>
+          </a:prstGeom>
+          <a:noFill/>
+        </p:spPr>
+        <p:txBody>
+          <a:bodyPr wrap="square">
+            <a:spAutoFit/>
+          </a:bodyPr>
+          <a:lstStyle/>
+          <a:p>
+            <a:pPr algn="ctr"/>
+            <a:r>
+              <a:rPr sz="1400" b="1">
+                <a:solidFill>
+                  <a:srgbClr val="FFFFFF"/>
+                </a:solidFill>
+                <a:latin typeface="Calibri"/>
+              </a:rPr>
+              <a:t>TOML
+distro=rhel-10.x</a:t>
+            </a:r>
+          </a:p>
+        </p:txBody>
+      </p:sp>
+      <p:sp>
+        <p:nvSpPr>
+          <p:cNvPr id="9" name="TextBox 8"/>
+          <p:cNvSpPr txBox="1"/>
+          <p:nvPr/>
+        </p:nvSpPr>
+        <p:spPr>
+          <a:xfrm>
+            <a:off x="502920" y="2724912"/>
+            <a:ext cx="1737360" cy="320040"/>
+          </a:xfrm>
+          <a:prstGeom prst="rect">
+            <a:avLst/>
+          </a:prstGeom>
+          <a:noFill/>
+        </p:spPr>
+        <p:txBody>
+          <a:bodyPr wrap="none">
+            <a:spAutoFit/>
+          </a:bodyPr>
+          <a:lstStyle/>
+          <a:p>
+            <a:pPr algn="ctr"/>
+            <a:r>
+              <a:rPr sz="1100" b="0">
+                <a:solidFill>
+                  <a:srgbClr val="666666"/>
+                </a:solidFill>
+                <a:latin typeface="Calibri"/>
+              </a:rPr>
+              <a:t>Source of truth</a:t>
+            </a:r>
+          </a:p>
+        </p:txBody>
+      </p:sp>
+      <p:sp>
+        <p:nvSpPr>
+          <p:cNvPr id="10" name="Right Arrow 9"/>
+          <p:cNvSpPr/>
+          <p:nvPr/>
+        </p:nvSpPr>
+        <p:spPr>
+          <a:xfrm>
+            <a:off x="2286000" y="1874520"/>
+            <a:ext cx="301752" cy="320040"/>
+          </a:xfrm>
+          <a:prstGeom prst="rightArrow">
             <a:avLst/>
           </a:prstGeom>
           <a:solidFill>
@@ -6347,14 +6808,57 @@
       </p:sp>
       <p:sp>
         <p:nvSpPr>
-          <p:cNvPr id="8" name="TextBox 7"/>
+          <p:cNvPr id="11" name="Rounded Rectangle 10"/>
+          <p:cNvSpPr/>
+          <p:nvPr/>
+        </p:nvSpPr>
+        <p:spPr>
+          <a:xfrm>
+            <a:off x="2816352" y="1417320"/>
+            <a:ext cx="1737360" cy="1234440"/>
+          </a:xfrm>
+          <a:prstGeom prst="roundRect">
+            <a:avLst/>
+          </a:prstGeom>
+          <a:solidFill>
+            <a:srgbClr val="2A2A2A"/>
+          </a:solidFill>
+          <a:ln>
+            <a:noFill/>
+          </a:ln>
+        </p:spPr>
+        <p:style>
+          <a:lnRef idx="1">
+            <a:schemeClr val="accent1"/>
+          </a:lnRef>
+          <a:fillRef idx="3">
+            <a:schemeClr val="accent1"/>
+          </a:fillRef>
+          <a:effectRef idx="2">
+            <a:schemeClr val="accent1"/>
+          </a:effectRef>
+          <a:fontRef idx="minor">
+            <a:schemeClr val="lt1"/>
+          </a:fontRef>
+        </p:style>
+        <p:txBody>
+          <a:bodyPr rtlCol="0" anchor="ctr"/>
+          <a:lstStyle/>
+          <a:p>
+            <a:pPr algn="ctr"/>
+          </a:p>
+        </p:txBody>
+      </p:sp>
+      <p:sp>
+        <p:nvSpPr>
+          <p:cNvPr id="12" name="TextBox 11"/>
           <p:cNvSpPr txBox="1"/>
           <p:nvPr/>
         </p:nvSpPr>
         <p:spPr>
           <a:xfrm>
-            <a:off x="548640" y="1463040"/>
-            <a:ext cx="10972800" cy="4572000"/>
+            <a:off x="2889504" y="1645920"/>
+            <a:ext cx="1591056" cy="868680"/>
           </a:xfrm>
           <a:prstGeom prst="rect">
             <a:avLst/>
@@ -6367,83 +6871,916 @@
           </a:bodyPr>
           <a:lstStyle/>
           <a:p>
+            <a:pPr algn="ctr"/>
+            <a:r>
+              <a:rPr sz="1400" b="1">
+                <a:solidFill>
+                  <a:srgbClr val="FFFFFF"/>
+                </a:solidFill>
+                <a:latin typeface="Calibri"/>
+              </a:rPr>
+              <a:t>Local Image
+Builder</a:t>
+            </a:r>
+          </a:p>
+        </p:txBody>
+      </p:sp>
+      <p:sp>
+        <p:nvSpPr>
+          <p:cNvPr id="13" name="TextBox 12"/>
+          <p:cNvSpPr txBox="1"/>
+          <p:nvPr/>
+        </p:nvSpPr>
+        <p:spPr>
+          <a:xfrm>
+            <a:off x="2816352" y="2724912"/>
+            <a:ext cx="1737360" cy="320040"/>
+          </a:xfrm>
+          <a:prstGeom prst="rect">
+            <a:avLst/>
+          </a:prstGeom>
+          <a:noFill/>
+        </p:spPr>
+        <p:txBody>
+          <a:bodyPr wrap="none">
+            <a:spAutoFit/>
+          </a:bodyPr>
+          <a:lstStyle/>
+          <a:p>
+            <a:pPr algn="ctr"/>
+            <a:r>
+              <a:rPr sz="1100" b="0">
+                <a:solidFill>
+                  <a:srgbClr val="666666"/>
+                </a:solidFill>
+                <a:latin typeface="Calibri"/>
+              </a:rPr>
+              <a:t>On RHEL 10 host</a:t>
+            </a:r>
+          </a:p>
+        </p:txBody>
+      </p:sp>
+      <p:sp>
+        <p:nvSpPr>
+          <p:cNvPr id="14" name="Right Arrow 13"/>
+          <p:cNvSpPr/>
+          <p:nvPr/>
+        </p:nvSpPr>
+        <p:spPr>
+          <a:xfrm>
+            <a:off x="4599432" y="1874520"/>
+            <a:ext cx="301752" cy="320040"/>
+          </a:xfrm>
+          <a:prstGeom prst="rightArrow">
+            <a:avLst/>
+          </a:prstGeom>
+          <a:solidFill>
+            <a:srgbClr val="EE0000"/>
+          </a:solidFill>
+          <a:ln>
+            <a:noFill/>
+          </a:ln>
+        </p:spPr>
+        <p:style>
+          <a:lnRef idx="1">
+            <a:schemeClr val="accent1"/>
+          </a:lnRef>
+          <a:fillRef idx="3">
+            <a:schemeClr val="accent1"/>
+          </a:fillRef>
+          <a:effectRef idx="2">
+            <a:schemeClr val="accent1"/>
+          </a:effectRef>
+          <a:fontRef idx="minor">
+            <a:schemeClr val="lt1"/>
+          </a:fontRef>
+        </p:style>
+        <p:txBody>
+          <a:bodyPr rtlCol="0" anchor="ctr"/>
+          <a:lstStyle/>
+          <a:p>
+            <a:pPr algn="ctr"/>
+          </a:p>
+        </p:txBody>
+      </p:sp>
+      <p:sp>
+        <p:nvSpPr>
+          <p:cNvPr id="15" name="Rounded Rectangle 14"/>
+          <p:cNvSpPr/>
+          <p:nvPr/>
+        </p:nvSpPr>
+        <p:spPr>
+          <a:xfrm>
+            <a:off x="5129784" y="1417320"/>
+            <a:ext cx="1737360" cy="1234440"/>
+          </a:xfrm>
+          <a:prstGeom prst="roundRect">
+            <a:avLst/>
+          </a:prstGeom>
+          <a:solidFill>
+            <a:srgbClr val="2A2A2A"/>
+          </a:solidFill>
+          <a:ln>
+            <a:noFill/>
+          </a:ln>
+        </p:spPr>
+        <p:style>
+          <a:lnRef idx="1">
+            <a:schemeClr val="accent1"/>
+          </a:lnRef>
+          <a:fillRef idx="3">
+            <a:schemeClr val="accent1"/>
+          </a:fillRef>
+          <a:effectRef idx="2">
+            <a:schemeClr val="accent1"/>
+          </a:effectRef>
+          <a:fontRef idx="minor">
+            <a:schemeClr val="lt1"/>
+          </a:fontRef>
+        </p:style>
+        <p:txBody>
+          <a:bodyPr rtlCol="0" anchor="ctr"/>
+          <a:lstStyle/>
+          <a:p>
+            <a:pPr algn="ctr"/>
+          </a:p>
+        </p:txBody>
+      </p:sp>
+      <p:sp>
+        <p:nvSpPr>
+          <p:cNvPr id="16" name="TextBox 15"/>
+          <p:cNvSpPr txBox="1"/>
+          <p:nvPr/>
+        </p:nvSpPr>
+        <p:spPr>
+          <a:xfrm>
+            <a:off x="5202936" y="1645920"/>
+            <a:ext cx="1591056" cy="868680"/>
+          </a:xfrm>
+          <a:prstGeom prst="rect">
+            <a:avLst/>
+          </a:prstGeom>
+          <a:noFill/>
+        </p:spPr>
+        <p:txBody>
+          <a:bodyPr wrap="square">
+            <a:spAutoFit/>
+          </a:bodyPr>
+          <a:lstStyle/>
+          <a:p>
+            <a:pPr algn="ctr"/>
+            <a:r>
+              <a:rPr sz="1400" b="1">
+                <a:solidFill>
+                  <a:srgbClr val="FFFFFF"/>
+                </a:solidFill>
+                <a:latin typeface="Calibri"/>
+              </a:rPr>
+              <a:t>Gold disk
+(.raw)</a:t>
+            </a:r>
+          </a:p>
+        </p:txBody>
+      </p:sp>
+      <p:sp>
+        <p:nvSpPr>
+          <p:cNvPr id="17" name="TextBox 16"/>
+          <p:cNvSpPr txBox="1"/>
+          <p:nvPr/>
+        </p:nvSpPr>
+        <p:spPr>
+          <a:xfrm>
+            <a:off x="5129784" y="2724912"/>
+            <a:ext cx="1737360" cy="320040"/>
+          </a:xfrm>
+          <a:prstGeom prst="rect">
+            <a:avLst/>
+          </a:prstGeom>
+          <a:noFill/>
+        </p:spPr>
+        <p:txBody>
+          <a:bodyPr wrap="none">
+            <a:spAutoFit/>
+          </a:bodyPr>
+          <a:lstStyle/>
+          <a:p>
+            <a:pPr algn="ctr"/>
+            <a:r>
+              <a:rPr sz="1100" b="0">
+                <a:solidFill>
+                  <a:srgbClr val="666666"/>
+                </a:solidFill>
+                <a:latin typeface="Calibri"/>
+              </a:rPr>
+              <a:t>Hardened RHEL</a:t>
+            </a:r>
+          </a:p>
+        </p:txBody>
+      </p:sp>
+      <p:sp>
+        <p:nvSpPr>
+          <p:cNvPr id="18" name="Right Arrow 17"/>
+          <p:cNvSpPr/>
+          <p:nvPr/>
+        </p:nvSpPr>
+        <p:spPr>
+          <a:xfrm>
+            <a:off x="6912864" y="1874520"/>
+            <a:ext cx="301752" cy="320040"/>
+          </a:xfrm>
+          <a:prstGeom prst="rightArrow">
+            <a:avLst/>
+          </a:prstGeom>
+          <a:solidFill>
+            <a:srgbClr val="EE0000"/>
+          </a:solidFill>
+          <a:ln>
+            <a:noFill/>
+          </a:ln>
+        </p:spPr>
+        <p:style>
+          <a:lnRef idx="1">
+            <a:schemeClr val="accent1"/>
+          </a:lnRef>
+          <a:fillRef idx="3">
+            <a:schemeClr val="accent1"/>
+          </a:fillRef>
+          <a:effectRef idx="2">
+            <a:schemeClr val="accent1"/>
+          </a:effectRef>
+          <a:fontRef idx="minor">
+            <a:schemeClr val="lt1"/>
+          </a:fontRef>
+        </p:style>
+        <p:txBody>
+          <a:bodyPr rtlCol="0" anchor="ctr"/>
+          <a:lstStyle/>
+          <a:p>
+            <a:pPr algn="ctr"/>
+          </a:p>
+        </p:txBody>
+      </p:sp>
+      <p:sp>
+        <p:nvSpPr>
+          <p:cNvPr id="19" name="Rounded Rectangle 18"/>
+          <p:cNvSpPr/>
+          <p:nvPr/>
+        </p:nvSpPr>
+        <p:spPr>
+          <a:xfrm>
+            <a:off x="7443216" y="1417320"/>
+            <a:ext cx="1737360" cy="1234440"/>
+          </a:xfrm>
+          <a:prstGeom prst="roundRect">
+            <a:avLst/>
+          </a:prstGeom>
+          <a:solidFill>
+            <a:srgbClr val="2A2A2A"/>
+          </a:solidFill>
+          <a:ln>
+            <a:noFill/>
+          </a:ln>
+        </p:spPr>
+        <p:style>
+          <a:lnRef idx="1">
+            <a:schemeClr val="accent1"/>
+          </a:lnRef>
+          <a:fillRef idx="3">
+            <a:schemeClr val="accent1"/>
+          </a:fillRef>
+          <a:effectRef idx="2">
+            <a:schemeClr val="accent1"/>
+          </a:effectRef>
+          <a:fontRef idx="minor">
+            <a:schemeClr val="lt1"/>
+          </a:fontRef>
+        </p:style>
+        <p:txBody>
+          <a:bodyPr rtlCol="0" anchor="ctr"/>
+          <a:lstStyle/>
+          <a:p>
+            <a:pPr algn="ctr"/>
+          </a:p>
+        </p:txBody>
+      </p:sp>
+      <p:sp>
+        <p:nvSpPr>
+          <p:cNvPr id="20" name="TextBox 19"/>
+          <p:cNvSpPr txBox="1"/>
+          <p:nvPr/>
+        </p:nvSpPr>
+        <p:spPr>
+          <a:xfrm>
+            <a:off x="7516368" y="1645920"/>
+            <a:ext cx="1591056" cy="868680"/>
+          </a:xfrm>
+          <a:prstGeom prst="rect">
+            <a:avLst/>
+          </a:prstGeom>
+          <a:noFill/>
+        </p:spPr>
+        <p:txBody>
+          <a:bodyPr wrap="square">
+            <a:spAutoFit/>
+          </a:bodyPr>
+          <a:lstStyle/>
+          <a:p>
+            <a:pPr algn="ctr"/>
+            <a:r>
+              <a:rPr sz="1400" b="1">
+                <a:solidFill>
+                  <a:srgbClr val="FFFFFF"/>
+                </a:solidFill>
+                <a:latin typeface="Calibri"/>
+              </a:rPr>
+              <a:t>AWS AMI
+(+ Azure VHD)</a:t>
+            </a:r>
+          </a:p>
+        </p:txBody>
+      </p:sp>
+      <p:sp>
+        <p:nvSpPr>
+          <p:cNvPr id="21" name="TextBox 20"/>
+          <p:cNvSpPr txBox="1"/>
+          <p:nvPr/>
+        </p:nvSpPr>
+        <p:spPr>
+          <a:xfrm>
+            <a:off x="7443216" y="2724912"/>
+            <a:ext cx="1737360" cy="320040"/>
+          </a:xfrm>
+          <a:prstGeom prst="rect">
+            <a:avLst/>
+          </a:prstGeom>
+          <a:noFill/>
+        </p:spPr>
+        <p:txBody>
+          <a:bodyPr wrap="none">
+            <a:spAutoFit/>
+          </a:bodyPr>
+          <a:lstStyle/>
+          <a:p>
+            <a:pPr algn="ctr"/>
+            <a:r>
+              <a:rPr sz="1100" b="0">
+                <a:solidFill>
+                  <a:srgbClr val="666666"/>
+                </a:solidFill>
+                <a:latin typeface="Calibri"/>
+              </a:rPr>
+              <a:t>Catalog entry</a:t>
+            </a:r>
+          </a:p>
+        </p:txBody>
+      </p:sp>
+      <p:sp>
+        <p:nvSpPr>
+          <p:cNvPr id="22" name="Right Arrow 21"/>
+          <p:cNvSpPr/>
+          <p:nvPr/>
+        </p:nvSpPr>
+        <p:spPr>
+          <a:xfrm>
+            <a:off x="9226296" y="1874520"/>
+            <a:ext cx="301752" cy="320040"/>
+          </a:xfrm>
+          <a:prstGeom prst="rightArrow">
+            <a:avLst/>
+          </a:prstGeom>
+          <a:solidFill>
+            <a:srgbClr val="EE0000"/>
+          </a:solidFill>
+          <a:ln>
+            <a:noFill/>
+          </a:ln>
+        </p:spPr>
+        <p:style>
+          <a:lnRef idx="1">
+            <a:schemeClr val="accent1"/>
+          </a:lnRef>
+          <a:fillRef idx="3">
+            <a:schemeClr val="accent1"/>
+          </a:fillRef>
+          <a:effectRef idx="2">
+            <a:schemeClr val="accent1"/>
+          </a:effectRef>
+          <a:fontRef idx="minor">
+            <a:schemeClr val="lt1"/>
+          </a:fontRef>
+        </p:style>
+        <p:txBody>
+          <a:bodyPr rtlCol="0" anchor="ctr"/>
+          <a:lstStyle/>
+          <a:p>
+            <a:pPr algn="ctr"/>
+          </a:p>
+        </p:txBody>
+      </p:sp>
+      <p:sp>
+        <p:nvSpPr>
+          <p:cNvPr id="23" name="Rounded Rectangle 22"/>
+          <p:cNvSpPr/>
+          <p:nvPr/>
+        </p:nvSpPr>
+        <p:spPr>
+          <a:xfrm>
+            <a:off x="9756648" y="1417320"/>
+            <a:ext cx="1737360" cy="1234440"/>
+          </a:xfrm>
+          <a:prstGeom prst="roundRect">
+            <a:avLst/>
+          </a:prstGeom>
+          <a:solidFill>
+            <a:srgbClr val="2A2A2A"/>
+          </a:solidFill>
+          <a:ln>
+            <a:noFill/>
+          </a:ln>
+        </p:spPr>
+        <p:style>
+          <a:lnRef idx="1">
+            <a:schemeClr val="accent1"/>
+          </a:lnRef>
+          <a:fillRef idx="3">
+            <a:schemeClr val="accent1"/>
+          </a:fillRef>
+          <a:effectRef idx="2">
+            <a:schemeClr val="accent1"/>
+          </a:effectRef>
+          <a:fontRef idx="minor">
+            <a:schemeClr val="lt1"/>
+          </a:fontRef>
+        </p:style>
+        <p:txBody>
+          <a:bodyPr rtlCol="0" anchor="ctr"/>
+          <a:lstStyle/>
+          <a:p>
+            <a:pPr algn="ctr"/>
+          </a:p>
+        </p:txBody>
+      </p:sp>
+      <p:sp>
+        <p:nvSpPr>
+          <p:cNvPr id="24" name="TextBox 23"/>
+          <p:cNvSpPr txBox="1"/>
+          <p:nvPr/>
+        </p:nvSpPr>
+        <p:spPr>
+          <a:xfrm>
+            <a:off x="9829800" y="1645920"/>
+            <a:ext cx="1591056" cy="868680"/>
+          </a:xfrm>
+          <a:prstGeom prst="rect">
+            <a:avLst/>
+          </a:prstGeom>
+          <a:noFill/>
+        </p:spPr>
+        <p:txBody>
+          <a:bodyPr wrap="square">
+            <a:spAutoFit/>
+          </a:bodyPr>
+          <a:lstStyle/>
+          <a:p>
+            <a:pPr algn="ctr"/>
+            <a:r>
+              <a:rPr sz="1400" b="1">
+                <a:solidFill>
+                  <a:srgbClr val="FFFFFF"/>
+                </a:solidFill>
+                <a:latin typeface="Calibri"/>
+              </a:rPr>
+              <a:t>Web nodes
+(EC2 / Azure)</a:t>
+            </a:r>
+          </a:p>
+        </p:txBody>
+      </p:sp>
+      <p:sp>
+        <p:nvSpPr>
+          <p:cNvPr id="25" name="TextBox 24"/>
+          <p:cNvSpPr txBox="1"/>
+          <p:nvPr/>
+        </p:nvSpPr>
+        <p:spPr>
+          <a:xfrm>
+            <a:off x="9756648" y="2724912"/>
+            <a:ext cx="1737360" cy="320040"/>
+          </a:xfrm>
+          <a:prstGeom prst="rect">
+            <a:avLst/>
+          </a:prstGeom>
+          <a:noFill/>
+        </p:spPr>
+        <p:txBody>
+          <a:bodyPr wrap="none">
+            <a:spAutoFit/>
+          </a:bodyPr>
+          <a:lstStyle/>
+          <a:p>
+            <a:pPr algn="ctr"/>
+            <a:r>
+              <a:rPr sz="1100" b="0">
+                <a:solidFill>
+                  <a:srgbClr val="666666"/>
+                </a:solidFill>
+                <a:latin typeface="Calibri"/>
+              </a:rPr>
+              <a:t>Identical launches</a:t>
+            </a:r>
+          </a:p>
+        </p:txBody>
+      </p:sp>
+      <p:sp>
+        <p:nvSpPr>
+          <p:cNvPr id="26" name="Rounded Rectangle 25"/>
+          <p:cNvSpPr/>
+          <p:nvPr/>
+        </p:nvSpPr>
+        <p:spPr>
+          <a:xfrm>
+            <a:off x="502920" y="3246120"/>
+            <a:ext cx="11155680" cy="3108960"/>
+          </a:xfrm>
+          <a:prstGeom prst="roundRect">
+            <a:avLst/>
+          </a:prstGeom>
+          <a:solidFill>
+            <a:srgbClr val="EEEEEE"/>
+          </a:solidFill>
+          <a:ln>
+            <a:solidFill>
+              <a:srgbClr val="E0E0E0"/>
+            </a:solidFill>
+          </a:ln>
+        </p:spPr>
+        <p:style>
+          <a:lnRef idx="1">
+            <a:schemeClr val="accent1"/>
+          </a:lnRef>
+          <a:fillRef idx="3">
+            <a:schemeClr val="accent1"/>
+          </a:fillRef>
+          <a:effectRef idx="2">
+            <a:schemeClr val="accent1"/>
+          </a:effectRef>
+          <a:fontRef idx="minor">
+            <a:schemeClr val="lt1"/>
+          </a:fontRef>
+        </p:style>
+        <p:txBody>
+          <a:bodyPr rtlCol="0" anchor="ctr"/>
+          <a:lstStyle/>
+          <a:p>
+            <a:pPr algn="ctr"/>
+          </a:p>
+        </p:txBody>
+      </p:sp>
+      <p:sp>
+        <p:nvSpPr>
+          <p:cNvPr id="27" name="TextBox 26"/>
+          <p:cNvSpPr txBox="1"/>
+          <p:nvPr/>
+        </p:nvSpPr>
+        <p:spPr>
+          <a:xfrm>
+            <a:off x="731520" y="3383280"/>
+            <a:ext cx="10515600" cy="365760"/>
+          </a:xfrm>
+          <a:prstGeom prst="rect">
+            <a:avLst/>
+          </a:prstGeom>
+          <a:noFill/>
+        </p:spPr>
+        <p:txBody>
+          <a:bodyPr wrap="none">
+            <a:spAutoFit/>
+          </a:bodyPr>
+          <a:lstStyle/>
+          <a:p>
+            <a:r>
+              <a:rPr sz="1600" b="1">
+                <a:solidFill>
+                  <a:srgbClr val="1A1A1A"/>
+                </a:solidFill>
+                <a:latin typeface="Calibri"/>
+              </a:rPr>
+              <a:t>On every VM from the gold image</a:t>
+            </a:r>
+          </a:p>
+        </p:txBody>
+      </p:sp>
+      <p:sp>
+        <p:nvSpPr>
+          <p:cNvPr id="28" name="TextBox 27"/>
+          <p:cNvSpPr txBox="1"/>
+          <p:nvPr/>
+        </p:nvSpPr>
+        <p:spPr>
+          <a:xfrm>
+            <a:off x="731520" y="3886200"/>
+            <a:ext cx="3200400" cy="320040"/>
+          </a:xfrm>
+          <a:prstGeom prst="rect">
+            <a:avLst/>
+          </a:prstGeom>
+          <a:noFill/>
+        </p:spPr>
+        <p:txBody>
+          <a:bodyPr wrap="none">
+            <a:spAutoFit/>
+          </a:bodyPr>
+          <a:lstStyle/>
+          <a:p>
+            <a:r>
+              <a:rPr sz="1400" b="1">
+                <a:solidFill>
+                  <a:srgbClr val="EE0000"/>
+                </a:solidFill>
+                <a:latin typeface="Calibri"/>
+              </a:rPr>
+              <a:t>Access</a:t>
+            </a:r>
+          </a:p>
+        </p:txBody>
+      </p:sp>
+      <p:sp>
+        <p:nvSpPr>
+          <p:cNvPr id="29" name="TextBox 28"/>
+          <p:cNvSpPr txBox="1"/>
+          <p:nvPr/>
+        </p:nvSpPr>
+        <p:spPr>
+          <a:xfrm>
+            <a:off x="731520" y="4251960"/>
+            <a:ext cx="3200400" cy="1828800"/>
+          </a:xfrm>
+          <a:prstGeom prst="rect">
+            <a:avLst/>
+          </a:prstGeom>
+          <a:noFill/>
+        </p:spPr>
+        <p:txBody>
+          <a:bodyPr wrap="square">
+            <a:spAutoFit/>
+          </a:bodyPr>
+          <a:lstStyle/>
+          <a:p>
             <a:pPr>
               <a:spcAft>
-                <a:spcPts val="900"/>
+                <a:spcPts val="400"/>
               </a:spcAft>
             </a:pPr>
             <a:r>
-              <a:rPr sz="1800" b="0">
+              <a:rPr sz="1300" b="0">
                 <a:solidFill>
                   <a:srgbClr val="1A1A1A"/>
                 </a:solidFill>
                 <a:latin typeface="Calibri"/>
               </a:rPr>
-              <a:t>•  Local Image Builder (not hosted console.redhat.com) — matches Expansion Pack manual compose</a:t>
+              <a:t>•  SSH :2222</a:t>
             </a:r>
           </a:p>
           <a:p>
             <a:pPr>
               <a:spcAft>
-                <a:spcPts val="900"/>
+                <a:spcPts val="400"/>
               </a:spcAft>
             </a:pPr>
             <a:r>
-              <a:rPr sz="1800" b="0">
+              <a:rPr sz="1300" b="0">
                 <a:solidFill>
                   <a:srgbClr val="1A1A1A"/>
                 </a:solidFill>
                 <a:latin typeface="Calibri"/>
               </a:rPr>
-              <a:t>•  One blueprint → two cloud artifacts — same controls on AWS and Azure</a:t>
+              <a:t>•  Users: fladmin1 / fladmin2</a:t>
             </a:r>
           </a:p>
           <a:p>
             <a:pPr>
               <a:spcAft>
-                <a:spcPts val="900"/>
+                <a:spcPts val="400"/>
               </a:spcAft>
             </a:pPr>
             <a:r>
-              <a:rPr sz="1800" b="0">
+              <a:rPr sz="1300" b="0">
                 <a:solidFill>
                   <a:srgbClr val="1A1A1A"/>
                 </a:solidFill>
                 <a:latin typeface="Calibri"/>
               </a:rPr>
-              <a:t>•  Replace from gold image in waves — not rebuild 1,600×, not in-place root swap</a:t>
-            </a:r>
-          </a:p>
+              <a:t>•  Key-only SSH · fladmins sudo</a:t>
+            </a:r>
+          </a:p>
+        </p:txBody>
+      </p:sp>
+      <p:sp>
+        <p:nvSpPr>
+          <p:cNvPr id="30" name="TextBox 29"/>
+          <p:cNvSpPr txBox="1"/>
+          <p:nvPr/>
+        </p:nvSpPr>
+        <p:spPr>
+          <a:xfrm>
+            <a:off x="4297680" y="3886200"/>
+            <a:ext cx="3200400" cy="320040"/>
+          </a:xfrm>
+          <a:prstGeom prst="rect">
+            <a:avLst/>
+          </a:prstGeom>
+          <a:noFill/>
+        </p:spPr>
+        <p:txBody>
+          <a:bodyPr wrap="none">
+            <a:spAutoFit/>
+          </a:bodyPr>
+          <a:lstStyle/>
+          <a:p>
+            <a:r>
+              <a:rPr sz="1400" b="1">
+                <a:solidFill>
+                  <a:srgbClr val="EE0000"/>
+                </a:solidFill>
+                <a:latin typeface="Calibri"/>
+              </a:rPr>
+              <a:t>Web service</a:t>
+            </a:r>
+          </a:p>
+        </p:txBody>
+      </p:sp>
+      <p:sp>
+        <p:nvSpPr>
+          <p:cNvPr id="31" name="TextBox 30"/>
+          <p:cNvSpPr txBox="1"/>
+          <p:nvPr/>
+        </p:nvSpPr>
+        <p:spPr>
+          <a:xfrm>
+            <a:off x="4297680" y="4251960"/>
+            <a:ext cx="3200400" cy="1828800"/>
+          </a:xfrm>
+          <a:prstGeom prst="rect">
+            <a:avLst/>
+          </a:prstGeom>
+          <a:noFill/>
+        </p:spPr>
+        <p:txBody>
+          <a:bodyPr wrap="square">
+            <a:spAutoFit/>
+          </a:bodyPr>
+          <a:lstStyle/>
           <a:p>
             <a:pPr>
               <a:spcAft>
-                <a:spcPts val="900"/>
+                <a:spcPts val="400"/>
               </a:spcAft>
             </a:pPr>
             <a:r>
-              <a:rPr sz="1800" b="0">
+              <a:rPr sz="1300" b="0">
                 <a:solidFill>
                   <a:srgbClr val="1A1A1A"/>
                 </a:solidFill>
                 <a:latin typeface="Calibri"/>
               </a:rPr>
-              <a:t>•  Firstboot / User data starts httpd — image has the tooling; launch completes the service</a:t>
+              <a:t>•  httpd in Podman :35443</a:t>
             </a:r>
           </a:p>
           <a:p>
             <a:pPr>
               <a:spcAft>
-                <a:spcPts val="900"/>
+                <a:spcPts val="400"/>
               </a:spcAft>
             </a:pPr>
             <a:r>
-              <a:rPr sz="1800" b="0">
+              <a:rPr sz="1300" b="0">
                 <a:solidFill>
                   <a:srgbClr val="1A1A1A"/>
                 </a:solidFill>
                 <a:latin typeface="Calibri"/>
               </a:rPr>
-              <a:t>•  SG/NSG separate from image — network policy stays in cloud controls</a:t>
+              <a:t>•  Dummy boutique app (demo)</a:t>
+            </a:r>
+          </a:p>
+          <a:p>
+            <a:pPr>
+              <a:spcAft>
+                <a:spcPts val="400"/>
+              </a:spcAft>
+            </a:pPr>
+            <a:r>
+              <a:rPr sz="1300" b="0">
+                <a:solidFill>
+                  <a:srgbClr val="1A1A1A"/>
+                </a:solidFill>
+                <a:latin typeface="Calibri"/>
+              </a:rPr>
+              <a:t>•  systemd: fl-httpd / firstboot</a:t>
+            </a:r>
+          </a:p>
+        </p:txBody>
+      </p:sp>
+      <p:sp>
+        <p:nvSpPr>
+          <p:cNvPr id="32" name="TextBox 31"/>
+          <p:cNvSpPr txBox="1"/>
+          <p:nvPr/>
+        </p:nvSpPr>
+        <p:spPr>
+          <a:xfrm>
+            <a:off x="7863840" y="3886200"/>
+            <a:ext cx="3200400" cy="320040"/>
+          </a:xfrm>
+          <a:prstGeom prst="rect">
+            <a:avLst/>
+          </a:prstGeom>
+          <a:noFill/>
+        </p:spPr>
+        <p:txBody>
+          <a:bodyPr wrap="none">
+            <a:spAutoFit/>
+          </a:bodyPr>
+          <a:lstStyle/>
+          <a:p>
+            <a:r>
+              <a:rPr sz="1400" b="1">
+                <a:solidFill>
+                  <a:srgbClr val="EE0000"/>
+                </a:solidFill>
+                <a:latin typeface="Calibri"/>
+              </a:rPr>
+              <a:t>Security baseline</a:t>
+            </a:r>
+          </a:p>
+        </p:txBody>
+      </p:sp>
+      <p:sp>
+        <p:nvSpPr>
+          <p:cNvPr id="33" name="TextBox 32"/>
+          <p:cNvSpPr txBox="1"/>
+          <p:nvPr/>
+        </p:nvSpPr>
+        <p:spPr>
+          <a:xfrm>
+            <a:off x="7863840" y="4251960"/>
+            <a:ext cx="3200400" cy="1828800"/>
+          </a:xfrm>
+          <a:prstGeom prst="rect">
+            <a:avLst/>
+          </a:prstGeom>
+          <a:noFill/>
+        </p:spPr>
+        <p:txBody>
+          <a:bodyPr wrap="square">
+            <a:spAutoFit/>
+          </a:bodyPr>
+          <a:lstStyle/>
+          <a:p>
+            <a:pPr>
+              <a:spcAft>
+                <a:spcPts val="400"/>
+              </a:spcAft>
+            </a:pPr>
+            <a:r>
+              <a:rPr sz="1300" b="0">
+                <a:solidFill>
+                  <a:srgbClr val="1A1A1A"/>
+                </a:solidFill>
+                <a:latin typeface="Calibri"/>
+              </a:rPr>
+              <a:t>•  Firewall: 2222 + 35443 only</a:t>
+            </a:r>
+          </a:p>
+          <a:p>
+            <a:pPr>
+              <a:spcAft>
+                <a:spcPts val="400"/>
+              </a:spcAft>
+            </a:pPr>
+            <a:r>
+              <a:rPr sz="1300" b="0">
+                <a:solidFill>
+                  <a:srgbClr val="1A1A1A"/>
+                </a:solidFill>
+                <a:latin typeface="Calibri"/>
+              </a:rPr>
+              <a:t>•  SELinux enforcing</a:t>
+            </a:r>
+          </a:p>
+          <a:p>
+            <a:pPr>
+              <a:spcAft>
+                <a:spcPts val="400"/>
+              </a:spcAft>
+            </a:pPr>
+            <a:r>
+              <a:rPr sz="1300" b="0">
+                <a:solidFill>
+                  <a:srgbClr val="1A1A1A"/>
+                </a:solidFill>
+                <a:latin typeface="Calibri"/>
+              </a:rPr>
+              <a:t>•  /tmp noexec · separate mounts</a:t>
             </a:r>
           </a:p>
         </p:txBody>
@@ -6561,7 +7898,7 @@
         <p:spPr>
           <a:xfrm>
             <a:off x="548640" y="228600"/>
-            <a:ext cx="2194560" cy="320040"/>
+            <a:ext cx="2377440" cy="320040"/>
           </a:xfrm>
           <a:prstGeom prst="roundRect">
             <a:avLst/>
@@ -6604,7 +7941,7 @@
         <p:spPr>
           <a:xfrm>
             <a:off x="548640" y="256032"/>
-            <a:ext cx="2194560" cy="292608"/>
+            <a:ext cx="2377440" cy="292608"/>
           </a:xfrm>
           <a:prstGeom prst="rect">
             <a:avLst/>
@@ -6617,7 +7954,7 @@
           </a:bodyPr>
           <a:lstStyle/>
           <a:p>
-            <a:pPr algn="l"/>
+            <a:pPr algn="ctr"/>
             <a:r>
               <a:rPr sz="1100" b="1">
                 <a:solidFill>
@@ -6659,7 +7996,7 @@
                 </a:solidFill>
                 <a:latin typeface="Calibri"/>
               </a:rPr>
-              <a:t>Live path (end-user view)</a:t>
+              <a:t>Build steps (what we run)</a:t>
             </a:r>
           </a:p>
         </p:txBody>
@@ -6741,7 +8078,7 @@
                 </a:solidFill>
                 <a:latin typeface="Calibri"/>
               </a:rPr>
-              <a:t>•  1. Blueprint in Git — recipe for mounts, SSH, fladmins, ports</a:t>
+              <a:t>•  1. Blueprint in Git — fl-rhel-gold.toml (distro=rhel-10.x)</a:t>
             </a:r>
           </a:p>
           <a:p>
@@ -6757,7 +8094,7 @@
                 </a:solidFill>
                 <a:latin typeface="Calibri"/>
               </a:rPr>
-              <a:t>•  2. Compose on subscribed RHEL builder → AMI or VHD</a:t>
+              <a:t>•  2. Builder host — install image-builder; sudo rhc connect</a:t>
             </a:r>
           </a:p>
           <a:p>
@@ -6773,7 +8110,7 @@
                 </a:solidFill>
                 <a:latin typeface="Calibri"/>
               </a:rPr>
-              <a:t>•  3. Register gold image in AWS / Azure</a:t>
+              <a:t>•  3. Compose — image-builder build ami → .raw on builder</a:t>
             </a:r>
           </a:p>
           <a:p>
@@ -6789,7 +8126,7 @@
                 </a:solidFill>
                 <a:latin typeface="Calibri"/>
               </a:rPr>
-              <a:t>•  4. Launch VM from gold image (Console or CLI)</a:t>
+              <a:t>•  4. Upload + register — S3 + vmimport → AMI fl-rhel-gold</a:t>
             </a:r>
           </a:p>
           <a:p>
@@ -6805,7 +8142,7 @@
                 </a:solidFill>
                 <a:latin typeface="Calibri"/>
               </a:rPr>
-              <a:t>•  5. Firstboot starts httpd container on 35443</a:t>
+              <a:t>•  5. Launch — EC2 from AMI (SG: 2222 + 35443)</a:t>
             </a:r>
           </a:p>
           <a:p>
@@ -6821,7 +8158,7 @@
                 </a:solidFill>
                 <a:latin typeface="Calibri"/>
               </a:rPr>
-              <a:t>•  6. Verify live: SELinux, mounts, ports, curl, reboot</a:t>
+              <a:t>•  6. Prove — SSH fladmin1, curl :35443, verify + reboot</a:t>
             </a:r>
           </a:p>
         </p:txBody>
@@ -6855,7 +8192,7 @@
                 </a:solidFill>
                 <a:latin typeface="Calibri"/>
               </a:rPr>
-              <a:t>Demo now: open gold VM + verify commands (see presentation script)</a:t>
+              <a:t>Same recipe → Azure VHD for dual-cloud</a:t>
             </a:r>
           </a:p>
         </p:txBody>
@@ -6973,7 +8310,7 @@
         <p:spPr>
           <a:xfrm>
             <a:off x="548640" y="228600"/>
-            <a:ext cx="2194560" cy="320040"/>
+            <a:ext cx="2377440" cy="320040"/>
           </a:xfrm>
           <a:prstGeom prst="roundRect">
             <a:avLst/>
@@ -7016,7 +8353,7 @@
         <p:spPr>
           <a:xfrm>
             <a:off x="548640" y="256032"/>
-            <a:ext cx="2194560" cy="292608"/>
+            <a:ext cx="2377440" cy="292608"/>
           </a:xfrm>
           <a:prstGeom prst="rect">
             <a:avLst/>
@@ -7029,7 +8366,7 @@
           </a:bodyPr>
           <a:lstStyle/>
           <a:p>
-            <a:pPr algn="l"/>
+            <a:pPr algn="ctr"/>
             <a:r>
               <a:rPr sz="1100" b="1">
                 <a:solidFill>
@@ -7051,7 +8388,7 @@
         <p:spPr>
           <a:xfrm>
             <a:off x="548640" y="640080"/>
-            <a:ext cx="10972800" cy="502920"/>
+            <a:ext cx="10972800" cy="548640"/>
           </a:xfrm>
           <a:prstGeom prst="rect">
             <a:avLst/>
@@ -7065,38 +8402,36 @@
           <a:lstStyle/>
           <a:p>
             <a:r>
-              <a:rPr sz="2400" b="1">
+              <a:rPr sz="2600" b="1">
                 <a:solidFill>
                   <a:srgbClr val="1A1A1A"/>
                 </a:solidFill>
                 <a:latin typeface="Calibri"/>
               </a:rPr>
-              <a:t>What we prove on the live VM</a:t>
-            </a:r>
-          </a:p>
-        </p:txBody>
-      </p:sp>
-      <p:sp>
-        <p:nvSpPr>
-          <p:cNvPr id="7" name="Rounded Rectangle 6"/>
+              <a:t>Critical decisions — and why</a:t>
+            </a:r>
+          </a:p>
+        </p:txBody>
+      </p:sp>
+      <p:sp>
+        <p:nvSpPr>
+          <p:cNvPr id="7" name="Rectangle 6"/>
           <p:cNvSpPr/>
           <p:nvPr/>
         </p:nvSpPr>
         <p:spPr>
           <a:xfrm>
-            <a:off x="548640" y="1371600"/>
-            <a:ext cx="5120640" cy="4663440"/>
-          </a:xfrm>
-          <a:prstGeom prst="roundRect">
+            <a:off x="548640" y="1234440"/>
+            <a:ext cx="1828800" cy="45720"/>
+          </a:xfrm>
+          <a:prstGeom prst="rect">
             <a:avLst/>
           </a:prstGeom>
           <a:solidFill>
-            <a:srgbClr val="FFFFFF"/>
+            <a:srgbClr val="EE0000"/>
           </a:solidFill>
           <a:ln>
-            <a:solidFill>
-              <a:srgbClr val="E0E0E0"/>
-            </a:solidFill>
+            <a:noFill/>
           </a:ln>
         </p:spPr>
         <p:style>
@@ -7129,42 +8464,8 @@
         </p:nvSpPr>
         <p:spPr>
           <a:xfrm>
-            <a:off x="822959" y="1554480"/>
-            <a:ext cx="4572000" cy="411480"/>
-          </a:xfrm>
-          <a:prstGeom prst="rect">
-            <a:avLst/>
-          </a:prstGeom>
-          <a:noFill/>
-        </p:spPr>
-        <p:txBody>
-          <a:bodyPr wrap="none">
-            <a:spAutoFit/>
-          </a:bodyPr>
-          <a:lstStyle/>
-          <a:p>
-            <a:r>
-              <a:rPr sz="1600" b="1">
-                <a:solidFill>
-                  <a:srgbClr val="EE0000"/>
-                </a:solidFill>
-                <a:latin typeface="Calibri"/>
-              </a:rPr>
-              <a:t>Expansion Pack controls</a:t>
-            </a:r>
-          </a:p>
-        </p:txBody>
-      </p:sp>
-      <p:sp>
-        <p:nvSpPr>
-          <p:cNvPr id="9" name="TextBox 8"/>
-          <p:cNvSpPr txBox="1"/>
-          <p:nvPr/>
-        </p:nvSpPr>
-        <p:spPr>
-          <a:xfrm>
-            <a:off x="822959" y="2103120"/>
-            <a:ext cx="4572000" cy="3657600"/>
+            <a:off x="548640" y="1463040"/>
+            <a:ext cx="10972800" cy="4572000"/>
           </a:xfrm>
           <a:prstGeom prst="rect">
             <a:avLst/>
@@ -7179,279 +8480,81 @@
           <a:p>
             <a:pPr>
               <a:spcAft>
-                <a:spcPts val="700"/>
+                <a:spcPts val="900"/>
               </a:spcAft>
             </a:pPr>
             <a:r>
-              <a:rPr sz="1500" b="0">
+              <a:rPr sz="1800" b="0">
                 <a:solidFill>
                   <a:srgbClr val="1A1A1A"/>
                 </a:solidFill>
                 <a:latin typeface="Calibri"/>
               </a:rPr>
-              <a:t>•  SELinux Enforcing</a:t>
+              <a:t>•  Local Image Builder (not hosted console.redhat.com) — matches Expansion Pack</a:t>
             </a:r>
           </a:p>
           <a:p>
             <a:pPr>
               <a:spcAft>
-                <a:spcPts val="700"/>
+                <a:spcPts val="900"/>
               </a:spcAft>
             </a:pPr>
             <a:r>
-              <a:rPr sz="1500" b="0">
+              <a:rPr sz="1800" b="0">
                 <a:solidFill>
                   <a:srgbClr val="1A1A1A"/>
                 </a:solidFill>
                 <a:latin typeface="Calibri"/>
               </a:rPr>
-              <a:t>•  Separate /var/log /home /tmp /var/tmp</a:t>
+              <a:t>•  One blueprint → two cloud artifacts — same controls on AWS and Azure</a:t>
             </a:r>
           </a:p>
           <a:p>
             <a:pPr>
               <a:spcAft>
-                <a:spcPts val="700"/>
+                <a:spcPts val="900"/>
               </a:spcAft>
             </a:pPr>
             <a:r>
-              <a:rPr sz="1500" b="0">
+              <a:rPr sz="1800" b="0">
                 <a:solidFill>
                   <a:srgbClr val="1A1A1A"/>
                 </a:solidFill>
                 <a:latin typeface="Calibri"/>
               </a:rPr>
-              <a:t>•  /tmp noexec</a:t>
+              <a:t>•  Replace from gold image in waves — not rebuild 1,600×, not in-place root swap</a:t>
             </a:r>
           </a:p>
           <a:p>
             <a:pPr>
               <a:spcAft>
-                <a:spcPts val="700"/>
+                <a:spcPts val="900"/>
               </a:spcAft>
             </a:pPr>
             <a:r>
-              <a:rPr sz="1500" b="0">
+              <a:rPr sz="1800" b="0">
                 <a:solidFill>
                   <a:srgbClr val="1A1A1A"/>
                 </a:solidFill>
                 <a:latin typeface="Calibri"/>
               </a:rPr>
-              <a:t>•  SSH 2222 key-only · no root SSH</a:t>
+              <a:t>•  Firstboot / User data starts httpd — image has tooling; launch completes service</a:t>
             </a:r>
           </a:p>
           <a:p>
             <a:pPr>
               <a:spcAft>
-                <a:spcPts val="700"/>
+                <a:spcPts val="900"/>
               </a:spcAft>
             </a:pPr>
             <a:r>
-              <a:rPr sz="1500" b="0">
+              <a:rPr sz="1800" b="0">
                 <a:solidFill>
                   <a:srgbClr val="1A1A1A"/>
                 </a:solidFill>
                 <a:latin typeface="Calibri"/>
               </a:rPr>
-              <a:t>•  fladmins · fladmin1 / fladmin2</a:t>
-            </a:r>
-          </a:p>
-          <a:p>
-            <a:pPr>
-              <a:spcAft>
-                <a:spcPts val="700"/>
-              </a:spcAft>
-            </a:pPr>
-            <a:r>
-              <a:rPr sz="1500" b="0">
-                <a:solidFill>
-                  <a:srgbClr val="1A1A1A"/>
-                </a:solidFill>
-                <a:latin typeface="Calibri"/>
-              </a:rPr>
-              <a:t>•  Firewall: 2222 + 35443 only</a:t>
-            </a:r>
-          </a:p>
-        </p:txBody>
-      </p:sp>
-      <p:sp>
-        <p:nvSpPr>
-          <p:cNvPr id="10" name="Rounded Rectangle 9"/>
-          <p:cNvSpPr/>
-          <p:nvPr/>
-        </p:nvSpPr>
-        <p:spPr>
-          <a:xfrm>
-            <a:off x="6400800" y="1371600"/>
-            <a:ext cx="5120640" cy="4663440"/>
-          </a:xfrm>
-          <a:prstGeom prst="roundRect">
-            <a:avLst/>
-          </a:prstGeom>
-          <a:solidFill>
-            <a:srgbClr val="FFFFFF"/>
-          </a:solidFill>
-          <a:ln>
-            <a:solidFill>
-              <a:srgbClr val="E0E0E0"/>
-            </a:solidFill>
-          </a:ln>
-        </p:spPr>
-        <p:style>
-          <a:lnRef idx="1">
-            <a:schemeClr val="accent1"/>
-          </a:lnRef>
-          <a:fillRef idx="3">
-            <a:schemeClr val="accent1"/>
-          </a:fillRef>
-          <a:effectRef idx="2">
-            <a:schemeClr val="accent1"/>
-          </a:effectRef>
-          <a:fontRef idx="minor">
-            <a:schemeClr val="lt1"/>
-          </a:fontRef>
-        </p:style>
-        <p:txBody>
-          <a:bodyPr rtlCol="0" anchor="ctr"/>
-          <a:lstStyle/>
-          <a:p>
-            <a:pPr algn="ctr"/>
-          </a:p>
-        </p:txBody>
-      </p:sp>
-      <p:sp>
-        <p:nvSpPr>
-          <p:cNvPr id="11" name="TextBox 10"/>
-          <p:cNvSpPr txBox="1"/>
-          <p:nvPr/>
-        </p:nvSpPr>
-        <p:spPr>
-          <a:xfrm>
-            <a:off x="6675120" y="1554480"/>
-            <a:ext cx="4572000" cy="411480"/>
-          </a:xfrm>
-          <a:prstGeom prst="rect">
-            <a:avLst/>
-          </a:prstGeom>
-          <a:noFill/>
-        </p:spPr>
-        <p:txBody>
-          <a:bodyPr wrap="none">
-            <a:spAutoFit/>
-          </a:bodyPr>
-          <a:lstStyle/>
-          <a:p>
-            <a:r>
-              <a:rPr sz="1600" b="1">
-                <a:solidFill>
-                  <a:srgbClr val="EE0000"/>
-                </a:solidFill>
-                <a:latin typeface="Calibri"/>
-              </a:rPr>
-              <a:t>Service in action</a:t>
-            </a:r>
-          </a:p>
-        </p:txBody>
-      </p:sp>
-      <p:sp>
-        <p:nvSpPr>
-          <p:cNvPr id="12" name="TextBox 11"/>
-          <p:cNvSpPr txBox="1"/>
-          <p:nvPr/>
-        </p:nvSpPr>
-        <p:spPr>
-          <a:xfrm>
-            <a:off x="6675120" y="2103120"/>
-            <a:ext cx="4572000" cy="3657600"/>
-          </a:xfrm>
-          <a:prstGeom prst="rect">
-            <a:avLst/>
-          </a:prstGeom>
-          <a:noFill/>
-        </p:spPr>
-        <p:txBody>
-          <a:bodyPr wrap="square">
-            <a:spAutoFit/>
-          </a:bodyPr>
-          <a:lstStyle/>
-          <a:p>
-            <a:pPr>
-              <a:spcAft>
-                <a:spcPts val="700"/>
-              </a:spcAft>
-            </a:pPr>
-            <a:r>
-              <a:rPr sz="1500" b="0">
-                <a:solidFill>
-                  <a:srgbClr val="1A1A1A"/>
-                </a:solidFill>
-                <a:latin typeface="Calibri"/>
-              </a:rPr>
-              <a:t>•  httpd container listening on 35443</a:t>
-            </a:r>
-          </a:p>
-          <a:p>
-            <a:pPr>
-              <a:spcAft>
-                <a:spcPts val="700"/>
-              </a:spcAft>
-            </a:pPr>
-            <a:r>
-              <a:rPr sz="1500" b="0">
-                <a:solidFill>
-                  <a:srgbClr val="1A1A1A"/>
-                </a:solidFill>
-                <a:latin typeface="Calibri"/>
-              </a:rPr>
-              <a:t>•  Fedora Lane index page via curl</a:t>
-            </a:r>
-          </a:p>
-          <a:p>
-            <a:pPr>
-              <a:spcAft>
-                <a:spcPts val="700"/>
-              </a:spcAft>
-            </a:pPr>
-            <a:r>
-              <a:rPr sz="1500" b="0">
-                <a:solidFill>
-                  <a:srgbClr val="1A1A1A"/>
-                </a:solidFill>
-                <a:latin typeface="Calibri"/>
-              </a:rPr>
-              <a:t>•  Same checklist after reboot</a:t>
-            </a:r>
-          </a:p>
-          <a:p>
-            <a:pPr>
-              <a:spcAft>
-                <a:spcPts val="700"/>
-              </a:spcAft>
-            </a:pPr>
-            <a:r>
-              <a:rPr sz="1500" b="0">
-                <a:solidFill>
-                  <a:srgbClr val="1A1A1A"/>
-                </a:solidFill>
-                <a:latin typeface="Calibri"/>
-              </a:rPr>
-              <a:t>•  Proven on AWS and Azure</a:t>
-            </a:r>
-          </a:p>
-          <a:p>
-            <a:pPr>
-              <a:spcAft>
-                <a:spcPts val="700"/>
-              </a:spcAft>
-            </a:pPr>
-            <a:r>
-              <a:rPr sz="1500" b="0">
-                <a:solidFill>
-                  <a:srgbClr val="1A1A1A"/>
-                </a:solidFill>
-                <a:latin typeface="Calibri"/>
-              </a:rPr>
-              <a:t>•  Repeatable from README + runbooks</a:t>
+              <a:t>•  App updates via volume deploy — OS changes need a new gold image</a:t>
             </a:r>
           </a:p>
         </p:txBody>
@@ -7569,7 +8672,7 @@
         <p:spPr>
           <a:xfrm>
             <a:off x="548640" y="228600"/>
-            <a:ext cx="2194560" cy="320040"/>
+            <a:ext cx="2377440" cy="320040"/>
           </a:xfrm>
           <a:prstGeom prst="roundRect">
             <a:avLst/>
@@ -7612,7 +8715,7 @@
         <p:spPr>
           <a:xfrm>
             <a:off x="548640" y="256032"/>
-            <a:ext cx="2194560" cy="292608"/>
+            <a:ext cx="2377440" cy="292608"/>
           </a:xfrm>
           <a:prstGeom prst="rect">
             <a:avLst/>
@@ -7625,7 +8728,7 @@
           </a:bodyPr>
           <a:lstStyle/>
           <a:p>
-            <a:pPr algn="l"/>
+            <a:pPr algn="ctr"/>
             <a:r>
               <a:rPr sz="1100" b="1">
                 <a:solidFill>
@@ -7633,7 +8736,7 @@
                 </a:solidFill>
                 <a:latin typeface="Calibri"/>
               </a:rPr>
-              <a:t>VALUE · 2–5 min</a:t>
+              <a:t>WALKTHROUGH</a:t>
             </a:r>
           </a:p>
         </p:txBody>
@@ -7647,7 +8750,7 @@
         <p:spPr>
           <a:xfrm>
             <a:off x="548640" y="640080"/>
-            <a:ext cx="10972800" cy="548640"/>
+            <a:ext cx="10972800" cy="502920"/>
           </a:xfrm>
           <a:prstGeom prst="rect">
             <a:avLst/>
@@ -7661,36 +8764,38 @@
           <a:lstStyle/>
           <a:p>
             <a:r>
-              <a:rPr sz="2600" b="1">
+              <a:rPr sz="2400" b="1">
                 <a:solidFill>
                   <a:srgbClr val="1A1A1A"/>
                 </a:solidFill>
                 <a:latin typeface="Calibri"/>
               </a:rPr>
-              <a:t>How this addresses Fedora Lane’s challenges</a:t>
-            </a:r>
-          </a:p>
-        </p:txBody>
-      </p:sp>
-      <p:sp>
-        <p:nvSpPr>
-          <p:cNvPr id="7" name="Rectangle 6"/>
+              <a:t>What we prove on the live VM</a:t>
+            </a:r>
+          </a:p>
+        </p:txBody>
+      </p:sp>
+      <p:sp>
+        <p:nvSpPr>
+          <p:cNvPr id="7" name="Rounded Rectangle 6"/>
           <p:cNvSpPr/>
           <p:nvPr/>
         </p:nvSpPr>
         <p:spPr>
           <a:xfrm>
-            <a:off x="548640" y="1234440"/>
-            <a:ext cx="1828800" cy="45720"/>
-          </a:xfrm>
-          <a:prstGeom prst="rect">
+            <a:off x="548640" y="1371600"/>
+            <a:ext cx="5120640" cy="4663440"/>
+          </a:xfrm>
+          <a:prstGeom prst="roundRect">
             <a:avLst/>
           </a:prstGeom>
           <a:solidFill>
-            <a:srgbClr val="EE0000"/>
+            <a:srgbClr val="FFFFFF"/>
           </a:solidFill>
           <a:ln>
-            <a:noFill/>
+            <a:solidFill>
+              <a:srgbClr val="E0E0E0"/>
+            </a:solidFill>
           </a:ln>
         </p:spPr>
         <p:style>
@@ -7723,8 +8828,42 @@
         </p:nvSpPr>
         <p:spPr>
           <a:xfrm>
-            <a:off x="548640" y="1463040"/>
-            <a:ext cx="10972800" cy="4572000"/>
+            <a:off x="822959" y="1554480"/>
+            <a:ext cx="4572000" cy="411480"/>
+          </a:xfrm>
+          <a:prstGeom prst="rect">
+            <a:avLst/>
+          </a:prstGeom>
+          <a:noFill/>
+        </p:spPr>
+        <p:txBody>
+          <a:bodyPr wrap="none">
+            <a:spAutoFit/>
+          </a:bodyPr>
+          <a:lstStyle/>
+          <a:p>
+            <a:r>
+              <a:rPr sz="1600" b="1">
+                <a:solidFill>
+                  <a:srgbClr val="EE0000"/>
+                </a:solidFill>
+                <a:latin typeface="Calibri"/>
+              </a:rPr>
+              <a:t>Expansion Pack controls</a:t>
+            </a:r>
+          </a:p>
+        </p:txBody>
+      </p:sp>
+      <p:sp>
+        <p:nvSpPr>
+          <p:cNvPr id="9" name="TextBox 8"/>
+          <p:cNvSpPr txBox="1"/>
+          <p:nvPr/>
+        </p:nvSpPr>
+        <p:spPr>
+          <a:xfrm>
+            <a:off x="822959" y="2103120"/>
+            <a:ext cx="4572000" cy="3657600"/>
           </a:xfrm>
           <a:prstGeom prst="rect">
             <a:avLst/>
@@ -7739,65 +8878,279 @@
           <a:p>
             <a:pPr>
               <a:spcAft>
-                <a:spcPts val="900"/>
+                <a:spcPts val="700"/>
               </a:spcAft>
             </a:pPr>
             <a:r>
-              <a:rPr sz="1800" b="0">
+              <a:rPr sz="1500" b="0">
                 <a:solidFill>
                   <a:srgbClr val="1A1A1A"/>
                 </a:solidFill>
                 <a:latin typeface="Calibri"/>
               </a:rPr>
-              <a:t>•  Inconsistency → one Git blueprint → identical gold baselines on AWS and Azure</a:t>
+              <a:t>•  SELinux Enforcing</a:t>
             </a:r>
           </a:p>
           <a:p>
             <a:pPr>
               <a:spcAft>
-                <a:spcPts val="900"/>
+                <a:spcPts val="700"/>
               </a:spcAft>
             </a:pPr>
             <a:r>
-              <a:rPr sz="1800" b="0">
+              <a:rPr sz="1500" b="0">
                 <a:solidFill>
                   <a:srgbClr val="1A1A1A"/>
                 </a:solidFill>
                 <a:latin typeface="Calibri"/>
               </a:rPr>
-              <a:t>•  Risky change → hardened SSH/sudo baked in; rebuild anytime from source of truth</a:t>
+              <a:t>•  Separate /var/log /home /tmp /var/tmp</a:t>
             </a:r>
           </a:p>
           <a:p>
             <a:pPr>
               <a:spcAft>
-                <a:spcPts val="900"/>
+                <a:spcPts val="700"/>
               </a:spcAft>
             </a:pPr>
             <a:r>
-              <a:rPr sz="1800" b="0">
+              <a:rPr sz="1500" b="0">
                 <a:solidFill>
                   <a:srgbClr val="1A1A1A"/>
                 </a:solidFill>
                 <a:latin typeface="Calibri"/>
               </a:rPr>
-              <a:t>•  Container skills gap → httpd runs as a container on every gold web VM</a:t>
+              <a:t>•  /tmp noexec</a:t>
             </a:r>
           </a:p>
           <a:p>
             <a:pPr>
               <a:spcAft>
-                <a:spcPts val="900"/>
+                <a:spcPts val="700"/>
               </a:spcAft>
             </a:pPr>
             <a:r>
-              <a:rPr sz="1800" b="0">
+              <a:rPr sz="1500" b="0">
                 <a:solidFill>
                   <a:srgbClr val="1A1A1A"/>
                 </a:solidFill>
                 <a:latin typeface="Calibri"/>
               </a:rPr>
-              <a:t>•  Dual-cloud reality → proven AMI path and VHD path with the same recipe</a:t>
+              <a:t>•  SSH 2222 key-only · no root SSH</a:t>
+            </a:r>
+          </a:p>
+          <a:p>
+            <a:pPr>
+              <a:spcAft>
+                <a:spcPts val="700"/>
+              </a:spcAft>
+            </a:pPr>
+            <a:r>
+              <a:rPr sz="1500" b="0">
+                <a:solidFill>
+                  <a:srgbClr val="1A1A1A"/>
+                </a:solidFill>
+                <a:latin typeface="Calibri"/>
+              </a:rPr>
+              <a:t>•  fladmins · fladmin1 / fladmin2</a:t>
+            </a:r>
+          </a:p>
+          <a:p>
+            <a:pPr>
+              <a:spcAft>
+                <a:spcPts val="700"/>
+              </a:spcAft>
+            </a:pPr>
+            <a:r>
+              <a:rPr sz="1500" b="0">
+                <a:solidFill>
+                  <a:srgbClr val="1A1A1A"/>
+                </a:solidFill>
+                <a:latin typeface="Calibri"/>
+              </a:rPr>
+              <a:t>•  Firewall: 2222 + 35443 only</a:t>
+            </a:r>
+          </a:p>
+        </p:txBody>
+      </p:sp>
+      <p:sp>
+        <p:nvSpPr>
+          <p:cNvPr id="10" name="Rounded Rectangle 9"/>
+          <p:cNvSpPr/>
+          <p:nvPr/>
+        </p:nvSpPr>
+        <p:spPr>
+          <a:xfrm>
+            <a:off x="6400800" y="1371600"/>
+            <a:ext cx="5120640" cy="4663440"/>
+          </a:xfrm>
+          <a:prstGeom prst="roundRect">
+            <a:avLst/>
+          </a:prstGeom>
+          <a:solidFill>
+            <a:srgbClr val="FFFFFF"/>
+          </a:solidFill>
+          <a:ln>
+            <a:solidFill>
+              <a:srgbClr val="E0E0E0"/>
+            </a:solidFill>
+          </a:ln>
+        </p:spPr>
+        <p:style>
+          <a:lnRef idx="1">
+            <a:schemeClr val="accent1"/>
+          </a:lnRef>
+          <a:fillRef idx="3">
+            <a:schemeClr val="accent1"/>
+          </a:fillRef>
+          <a:effectRef idx="2">
+            <a:schemeClr val="accent1"/>
+          </a:effectRef>
+          <a:fontRef idx="minor">
+            <a:schemeClr val="lt1"/>
+          </a:fontRef>
+        </p:style>
+        <p:txBody>
+          <a:bodyPr rtlCol="0" anchor="ctr"/>
+          <a:lstStyle/>
+          <a:p>
+            <a:pPr algn="ctr"/>
+          </a:p>
+        </p:txBody>
+      </p:sp>
+      <p:sp>
+        <p:nvSpPr>
+          <p:cNvPr id="11" name="TextBox 10"/>
+          <p:cNvSpPr txBox="1"/>
+          <p:nvPr/>
+        </p:nvSpPr>
+        <p:spPr>
+          <a:xfrm>
+            <a:off x="6675120" y="1554480"/>
+            <a:ext cx="4572000" cy="411480"/>
+          </a:xfrm>
+          <a:prstGeom prst="rect">
+            <a:avLst/>
+          </a:prstGeom>
+          <a:noFill/>
+        </p:spPr>
+        <p:txBody>
+          <a:bodyPr wrap="none">
+            <a:spAutoFit/>
+          </a:bodyPr>
+          <a:lstStyle/>
+          <a:p>
+            <a:r>
+              <a:rPr sz="1600" b="1">
+                <a:solidFill>
+                  <a:srgbClr val="EE0000"/>
+                </a:solidFill>
+                <a:latin typeface="Calibri"/>
+              </a:rPr>
+              <a:t>Service in action</a:t>
+            </a:r>
+          </a:p>
+        </p:txBody>
+      </p:sp>
+      <p:sp>
+        <p:nvSpPr>
+          <p:cNvPr id="12" name="TextBox 11"/>
+          <p:cNvSpPr txBox="1"/>
+          <p:nvPr/>
+        </p:nvSpPr>
+        <p:spPr>
+          <a:xfrm>
+            <a:off x="6675120" y="2103120"/>
+            <a:ext cx="4572000" cy="3657600"/>
+          </a:xfrm>
+          <a:prstGeom prst="rect">
+            <a:avLst/>
+          </a:prstGeom>
+          <a:noFill/>
+        </p:spPr>
+        <p:txBody>
+          <a:bodyPr wrap="square">
+            <a:spAutoFit/>
+          </a:bodyPr>
+          <a:lstStyle/>
+          <a:p>
+            <a:pPr>
+              <a:spcAft>
+                <a:spcPts val="700"/>
+              </a:spcAft>
+            </a:pPr>
+            <a:r>
+              <a:rPr sz="1500" b="0">
+                <a:solidFill>
+                  <a:srgbClr val="1A1A1A"/>
+                </a:solidFill>
+                <a:latin typeface="Calibri"/>
+              </a:rPr>
+              <a:t>•  httpd container on 35443</a:t>
+            </a:r>
+          </a:p>
+          <a:p>
+            <a:pPr>
+              <a:spcAft>
+                <a:spcPts val="700"/>
+              </a:spcAft>
+            </a:pPr>
+            <a:r>
+              <a:rPr sz="1500" b="0">
+                <a:solidFill>
+                  <a:srgbClr val="1A1A1A"/>
+                </a:solidFill>
+                <a:latin typeface="Calibri"/>
+              </a:rPr>
+              <a:t>•  Boutique demo app + health.json</a:t>
+            </a:r>
+          </a:p>
+          <a:p>
+            <a:pPr>
+              <a:spcAft>
+                <a:spcPts val="700"/>
+              </a:spcAft>
+            </a:pPr>
+            <a:r>
+              <a:rPr sz="1500" b="0">
+                <a:solidFill>
+                  <a:srgbClr val="1A1A1A"/>
+                </a:solidFill>
+                <a:latin typeface="Calibri"/>
+              </a:rPr>
+              <a:t>•  Same checklist after reboot</a:t>
+            </a:r>
+          </a:p>
+          <a:p>
+            <a:pPr>
+              <a:spcAft>
+                <a:spcPts val="700"/>
+              </a:spcAft>
+            </a:pPr>
+            <a:r>
+              <a:rPr sz="1500" b="0">
+                <a:solidFill>
+                  <a:srgbClr val="1A1A1A"/>
+                </a:solidFill>
+                <a:latin typeface="Calibri"/>
+              </a:rPr>
+              <a:t>•  Proven on AWS and Azure</a:t>
+            </a:r>
+          </a:p>
+          <a:p>
+            <a:pPr>
+              <a:spcAft>
+                <a:spcPts val="700"/>
+              </a:spcAft>
+            </a:pPr>
+            <a:r>
+              <a:rPr sz="1500" b="0">
+                <a:solidFill>
+                  <a:srgbClr val="1A1A1A"/>
+                </a:solidFill>
+                <a:latin typeface="Calibri"/>
+              </a:rPr>
+              <a:t>•  Repeatable from README + runbooks</a:t>
             </a:r>
           </a:p>
         </p:txBody>
